--- a/Bemutató (1).pptx
+++ b/Bemutató (1).pptx
@@ -576,7 +576,7 @@
           <a:p>
             <a:fld id="{4D4C322F-BC9B-42E0-BD88-98D7F3AB06DE}" type="datetimeFigureOut">
               <a:rPr lang="hu-HU" smtClean="0"/>
-              <a:t>2026.02.25</a:t>
+              <a:t>2026.03.02</a:t>
             </a:fld>
             <a:endParaRPr lang="hu-HU"/>
           </a:p>
@@ -908,7 +908,7 @@
           <a:p>
             <a:fld id="{4D4C322F-BC9B-42E0-BD88-98D7F3AB06DE}" type="datetimeFigureOut">
               <a:rPr lang="hu-HU" smtClean="0"/>
-              <a:t>2026.02.25</a:t>
+              <a:t>2026.03.02</a:t>
             </a:fld>
             <a:endParaRPr lang="hu-HU"/>
           </a:p>
@@ -1104,7 +1104,7 @@
           <a:p>
             <a:fld id="{4D4C322F-BC9B-42E0-BD88-98D7F3AB06DE}" type="datetimeFigureOut">
               <a:rPr lang="hu-HU" smtClean="0"/>
-              <a:t>2026.02.25</a:t>
+              <a:t>2026.03.02</a:t>
             </a:fld>
             <a:endParaRPr lang="hu-HU"/>
           </a:p>
@@ -1374,7 +1374,7 @@
           <a:p>
             <a:fld id="{4D4C322F-BC9B-42E0-BD88-98D7F3AB06DE}" type="datetimeFigureOut">
               <a:rPr lang="hu-HU" smtClean="0"/>
-              <a:t>2026.02.25</a:t>
+              <a:t>2026.03.02</a:t>
             </a:fld>
             <a:endParaRPr lang="hu-HU"/>
           </a:p>
@@ -1802,7 +1802,7 @@
           <a:p>
             <a:fld id="{4D4C322F-BC9B-42E0-BD88-98D7F3AB06DE}" type="datetimeFigureOut">
               <a:rPr lang="hu-HU" smtClean="0"/>
-              <a:t>2026.02.25</a:t>
+              <a:t>2026.03.02</a:t>
             </a:fld>
             <a:endParaRPr lang="hu-HU"/>
           </a:p>
@@ -2352,7 +2352,7 @@
           <a:p>
             <a:fld id="{4D4C322F-BC9B-42E0-BD88-98D7F3AB06DE}" type="datetimeFigureOut">
               <a:rPr lang="hu-HU" smtClean="0"/>
-              <a:t>2026.02.25</a:t>
+              <a:t>2026.03.02</a:t>
             </a:fld>
             <a:endParaRPr lang="hu-HU"/>
           </a:p>
@@ -3142,7 +3142,7 @@
           <a:p>
             <a:fld id="{4D4C322F-BC9B-42E0-BD88-98D7F3AB06DE}" type="datetimeFigureOut">
               <a:rPr lang="hu-HU" smtClean="0"/>
-              <a:t>2026.02.25</a:t>
+              <a:t>2026.03.02</a:t>
             </a:fld>
             <a:endParaRPr lang="hu-HU"/>
           </a:p>
@@ -3321,7 +3321,7 @@
           <a:p>
             <a:fld id="{4D4C322F-BC9B-42E0-BD88-98D7F3AB06DE}" type="datetimeFigureOut">
               <a:rPr lang="hu-HU" smtClean="0"/>
-              <a:t>2026.02.25</a:t>
+              <a:t>2026.03.02</a:t>
             </a:fld>
             <a:endParaRPr lang="hu-HU"/>
           </a:p>
@@ -3505,7 +3505,7 @@
           <a:p>
             <a:fld id="{4D4C322F-BC9B-42E0-BD88-98D7F3AB06DE}" type="datetimeFigureOut">
               <a:rPr lang="hu-HU" smtClean="0"/>
-              <a:t>2026.02.25</a:t>
+              <a:t>2026.03.02</a:t>
             </a:fld>
             <a:endParaRPr lang="hu-HU"/>
           </a:p>
@@ -3680,7 +3680,7 @@
           <a:p>
             <a:fld id="{4D4C322F-BC9B-42E0-BD88-98D7F3AB06DE}" type="datetimeFigureOut">
               <a:rPr lang="hu-HU" smtClean="0"/>
-              <a:t>2026.02.25</a:t>
+              <a:t>2026.03.02</a:t>
             </a:fld>
             <a:endParaRPr lang="hu-HU"/>
           </a:p>
@@ -3930,7 +3930,7 @@
           <a:p>
             <a:fld id="{4D4C322F-BC9B-42E0-BD88-98D7F3AB06DE}" type="datetimeFigureOut">
               <a:rPr lang="hu-HU" smtClean="0"/>
-              <a:t>2026.02.25</a:t>
+              <a:t>2026.03.02</a:t>
             </a:fld>
             <a:endParaRPr lang="hu-HU"/>
           </a:p>
@@ -4167,7 +4167,7 @@
           <a:p>
             <a:fld id="{4D4C322F-BC9B-42E0-BD88-98D7F3AB06DE}" type="datetimeFigureOut">
               <a:rPr lang="hu-HU" smtClean="0"/>
-              <a:t>2026.02.25</a:t>
+              <a:t>2026.03.02</a:t>
             </a:fld>
             <a:endParaRPr lang="hu-HU"/>
           </a:p>
@@ -4552,7 +4552,7 @@
           <a:p>
             <a:fld id="{4D4C322F-BC9B-42E0-BD88-98D7F3AB06DE}" type="datetimeFigureOut">
               <a:rPr lang="hu-HU" smtClean="0"/>
-              <a:t>2026.02.25</a:t>
+              <a:t>2026.03.02</a:t>
             </a:fld>
             <a:endParaRPr lang="hu-HU"/>
           </a:p>
@@ -4670,7 +4670,7 @@
           <a:p>
             <a:fld id="{4D4C322F-BC9B-42E0-BD88-98D7F3AB06DE}" type="datetimeFigureOut">
               <a:rPr lang="hu-HU" smtClean="0"/>
-              <a:t>2026.02.25</a:t>
+              <a:t>2026.03.02</a:t>
             </a:fld>
             <a:endParaRPr lang="hu-HU"/>
           </a:p>
@@ -4765,7 +4765,7 @@
           <a:p>
             <a:fld id="{4D4C322F-BC9B-42E0-BD88-98D7F3AB06DE}" type="datetimeFigureOut">
               <a:rPr lang="hu-HU" smtClean="0"/>
-              <a:t>2026.02.25</a:t>
+              <a:t>2026.03.02</a:t>
             </a:fld>
             <a:endParaRPr lang="hu-HU"/>
           </a:p>
@@ -5018,7 +5018,7 @@
           <a:p>
             <a:fld id="{4D4C322F-BC9B-42E0-BD88-98D7F3AB06DE}" type="datetimeFigureOut">
               <a:rPr lang="hu-HU" smtClean="0"/>
-              <a:t>2026.02.25</a:t>
+              <a:t>2026.03.02</a:t>
             </a:fld>
             <a:endParaRPr lang="hu-HU"/>
           </a:p>
@@ -5287,7 +5287,7 @@
           <a:p>
             <a:fld id="{4D4C322F-BC9B-42E0-BD88-98D7F3AB06DE}" type="datetimeFigureOut">
               <a:rPr lang="hu-HU" smtClean="0"/>
-              <a:t>2026.02.25</a:t>
+              <a:t>2026.03.02</a:t>
             </a:fld>
             <a:endParaRPr lang="hu-HU"/>
           </a:p>
@@ -5690,7 +5690,7 @@
           <a:p>
             <a:fld id="{4D4C322F-BC9B-42E0-BD88-98D7F3AB06DE}" type="datetimeFigureOut">
               <a:rPr lang="hu-HU" smtClean="0"/>
-              <a:t>2026.02.25</a:t>
+              <a:t>2026.03.02</a:t>
             </a:fld>
             <a:endParaRPr lang="hu-HU"/>
           </a:p>
@@ -6399,861 +6399,6 @@
       </p:sp>
       <p:sp>
         <p:nvSpPr>
-          <p:cNvPr id="2" name="Szövegdoboz 1">
-            <a:extLst>
-              <a:ext uri="{FF2B5EF4-FFF2-40B4-BE49-F238E27FC236}">
-                <a16:creationId xmlns:a16="http://schemas.microsoft.com/office/drawing/2014/main" id="{185943A9-DFFA-48AE-96FA-7262C2D863EE}"/>
-              </a:ext>
-            </a:extLst>
-          </p:cNvPr>
-          <p:cNvSpPr txBox="1"/>
-          <p:nvPr/>
-        </p:nvSpPr>
-        <p:spPr>
-          <a:xfrm>
-            <a:off x="4936898" y="192117"/>
-            <a:ext cx="6429479" cy="5170646"/>
-          </a:xfrm>
-          <a:prstGeom prst="rect">
-            <a:avLst/>
-          </a:prstGeom>
-          <a:noFill/>
-        </p:spPr>
-        <p:txBody>
-          <a:bodyPr wrap="square" rtlCol="0">
-            <a:spAutoFit/>
-          </a:bodyPr>
-          <a:lstStyle/>
-          <a:p>
-            <a:endParaRPr lang="hu-HU" sz="1100" dirty="0">
-              <a:latin typeface="Monospac821 BT" panose="020B0609020202020204" pitchFamily="49" charset="0"/>
-            </a:endParaRPr>
-          </a:p>
-          <a:p>
-            <a:r>
-              <a:rPr lang="hu-HU" sz="1100" dirty="0">
-                <a:latin typeface="Monospac821 BT" panose="020B0609020202020204" pitchFamily="49" charset="0"/>
-              </a:rPr>
-              <a:t>&lt;!-- </a:t>
-            </a:r>
-            <a:r>
-              <a:rPr lang="hu-HU" sz="1100" dirty="0" err="1">
-                <a:latin typeface="Monospac821 BT" panose="020B0609020202020204" pitchFamily="49" charset="0"/>
-              </a:rPr>
-              <a:t>Dayan</a:t>
-            </a:r>
-            <a:r>
-              <a:rPr lang="hu-HU" sz="1100" dirty="0">
-                <a:latin typeface="Monospac821 BT" panose="020B0609020202020204" pitchFamily="49" charset="0"/>
-              </a:rPr>
-              <a:t>  --&gt;</a:t>
-            </a:r>
-          </a:p>
-          <a:p>
-            <a:endParaRPr lang="hu-HU" sz="1100" dirty="0">
-              <a:latin typeface="Monospac821 BT" panose="020B0609020202020204" pitchFamily="49" charset="0"/>
-            </a:endParaRPr>
-          </a:p>
-          <a:p>
-            <a:r>
-              <a:rPr lang="hu-HU" sz="1100" dirty="0">
-                <a:latin typeface="Monospac821 BT" panose="020B0609020202020204" pitchFamily="49" charset="0"/>
-              </a:rPr>
-              <a:t>        &lt;div </a:t>
-            </a:r>
-            <a:r>
-              <a:rPr lang="hu-HU" sz="1100" dirty="0" err="1">
-                <a:latin typeface="Monospac821 BT" panose="020B0609020202020204" pitchFamily="49" charset="0"/>
-              </a:rPr>
-              <a:t>class</a:t>
-            </a:r>
-            <a:r>
-              <a:rPr lang="hu-HU" sz="1100" dirty="0">
-                <a:latin typeface="Monospac821 BT" panose="020B0609020202020204" pitchFamily="49" charset="0"/>
-              </a:rPr>
-              <a:t>="col-12 col-md-6 col-lg-3 mb-5 </a:t>
-            </a:r>
-            <a:r>
-              <a:rPr lang="hu-HU" sz="1100" dirty="0" err="1">
-                <a:latin typeface="Monospac821 BT" panose="020B0609020202020204" pitchFamily="49" charset="0"/>
-              </a:rPr>
-              <a:t>ghost-card</a:t>
-            </a:r>
-            <a:r>
-              <a:rPr lang="hu-HU" sz="1100" dirty="0">
-                <a:latin typeface="Monospac821 BT" panose="020B0609020202020204" pitchFamily="49" charset="0"/>
-              </a:rPr>
-              <a:t>" </a:t>
-            </a:r>
-            <a:r>
-              <a:rPr lang="hu-HU" sz="1100" dirty="0" err="1">
-                <a:latin typeface="Monospac821 BT" panose="020B0609020202020204" pitchFamily="49" charset="0"/>
-              </a:rPr>
-              <a:t>data-evidence</a:t>
-            </a:r>
-            <a:r>
-              <a:rPr lang="hu-HU" sz="1100" dirty="0">
-                <a:latin typeface="Monospac821 BT" panose="020B0609020202020204" pitchFamily="49" charset="0"/>
-              </a:rPr>
-              <a:t>="</a:t>
-            </a:r>
-            <a:r>
-              <a:rPr lang="hu-HU" sz="1100" dirty="0" err="1">
-                <a:latin typeface="Monospac821 BT" panose="020B0609020202020204" pitchFamily="49" charset="0"/>
-              </a:rPr>
-              <a:t>emf</a:t>
-            </a:r>
-            <a:r>
-              <a:rPr lang="hu-HU" sz="1100" dirty="0">
-                <a:latin typeface="Monospac821 BT" panose="020B0609020202020204" pitchFamily="49" charset="0"/>
-              </a:rPr>
-              <a:t> </a:t>
-            </a:r>
-            <a:r>
-              <a:rPr lang="hu-HU" sz="1100" dirty="0" err="1">
-                <a:latin typeface="Monospac821 BT" panose="020B0609020202020204" pitchFamily="49" charset="0"/>
-              </a:rPr>
-              <a:t>orb</a:t>
-            </a:r>
-            <a:r>
-              <a:rPr lang="hu-HU" sz="1100" dirty="0">
-                <a:latin typeface="Monospac821 BT" panose="020B0609020202020204" pitchFamily="49" charset="0"/>
-              </a:rPr>
-              <a:t> </a:t>
-            </a:r>
-            <a:r>
-              <a:rPr lang="hu-HU" sz="1100" dirty="0" err="1">
-                <a:latin typeface="Monospac821 BT" panose="020B0609020202020204" pitchFamily="49" charset="0"/>
-              </a:rPr>
-              <a:t>spirit_box</a:t>
-            </a:r>
-            <a:r>
-              <a:rPr lang="hu-HU" sz="1100" dirty="0">
-                <a:latin typeface="Monospac821 BT" panose="020B0609020202020204" pitchFamily="49" charset="0"/>
-              </a:rPr>
-              <a:t>"&gt;</a:t>
-            </a:r>
-          </a:p>
-          <a:p>
-            <a:r>
-              <a:rPr lang="hu-HU" sz="1100" dirty="0">
-                <a:latin typeface="Monospac821 BT" panose="020B0609020202020204" pitchFamily="49" charset="0"/>
-              </a:rPr>
-              <a:t>        &lt;div </a:t>
-            </a:r>
-            <a:r>
-              <a:rPr lang="hu-HU" sz="1100" dirty="0" err="1">
-                <a:latin typeface="Monospac821 BT" panose="020B0609020202020204" pitchFamily="49" charset="0"/>
-              </a:rPr>
-              <a:t>class</a:t>
-            </a:r>
-            <a:r>
-              <a:rPr lang="hu-HU" sz="1100" dirty="0">
-                <a:latin typeface="Monospac821 BT" panose="020B0609020202020204" pitchFamily="49" charset="0"/>
-              </a:rPr>
-              <a:t>="</a:t>
-            </a:r>
-            <a:r>
-              <a:rPr lang="hu-HU" sz="1100" dirty="0" err="1">
-                <a:latin typeface="Monospac821 BT" panose="020B0609020202020204" pitchFamily="49" charset="0"/>
-              </a:rPr>
-              <a:t>card</a:t>
-            </a:r>
-            <a:r>
-              <a:rPr lang="hu-HU" sz="1100" dirty="0">
-                <a:latin typeface="Monospac821 BT" panose="020B0609020202020204" pitchFamily="49" charset="0"/>
-              </a:rPr>
-              <a:t> </a:t>
-            </a:r>
-            <a:r>
-              <a:rPr lang="hu-HU" sz="1100" dirty="0" err="1">
-                <a:latin typeface="Monospac821 BT" panose="020B0609020202020204" pitchFamily="49" charset="0"/>
-              </a:rPr>
-              <a:t>bg-dark</a:t>
-            </a:r>
-            <a:r>
-              <a:rPr lang="hu-HU" sz="1100" dirty="0">
-                <a:latin typeface="Monospac821 BT" panose="020B0609020202020204" pitchFamily="49" charset="0"/>
-              </a:rPr>
-              <a:t> text-</a:t>
-            </a:r>
-            <a:r>
-              <a:rPr lang="hu-HU" sz="1100" dirty="0" err="1">
-                <a:latin typeface="Monospac821 BT" panose="020B0609020202020204" pitchFamily="49" charset="0"/>
-              </a:rPr>
-              <a:t>light</a:t>
-            </a:r>
-            <a:r>
-              <a:rPr lang="hu-HU" sz="1100" dirty="0">
-                <a:latin typeface="Monospac821 BT" panose="020B0609020202020204" pitchFamily="49" charset="0"/>
-              </a:rPr>
-              <a:t> </a:t>
-            </a:r>
-            <a:r>
-              <a:rPr lang="hu-HU" sz="1100" dirty="0" err="1">
-                <a:latin typeface="Monospac821 BT" panose="020B0609020202020204" pitchFamily="49" charset="0"/>
-              </a:rPr>
-              <a:t>border-danger</a:t>
-            </a:r>
-            <a:r>
-              <a:rPr lang="hu-HU" sz="1100" dirty="0">
-                <a:latin typeface="Monospac821 BT" panose="020B0609020202020204" pitchFamily="49" charset="0"/>
-              </a:rPr>
-              <a:t> </a:t>
-            </a:r>
-            <a:r>
-              <a:rPr lang="hu-HU" sz="1100" dirty="0" err="1">
-                <a:latin typeface="Monospac821 BT" panose="020B0609020202020204" pitchFamily="49" charset="0"/>
-              </a:rPr>
-              <a:t>shadow</a:t>
-            </a:r>
-            <a:r>
-              <a:rPr lang="hu-HU" sz="1100" dirty="0">
-                <a:latin typeface="Monospac821 BT" panose="020B0609020202020204" pitchFamily="49" charset="0"/>
-              </a:rPr>
-              <a:t>-lg rounded-4 h-100"&gt;</a:t>
-            </a:r>
-          </a:p>
-          <a:p>
-            <a:r>
-              <a:rPr lang="hu-HU" sz="1100" dirty="0">
-                <a:latin typeface="Monospac821 BT" panose="020B0609020202020204" pitchFamily="49" charset="0"/>
-              </a:rPr>
-              <a:t>        </a:t>
-            </a:r>
-          </a:p>
-          <a:p>
-            <a:r>
-              <a:rPr lang="hu-HU" sz="1100" dirty="0">
-                <a:latin typeface="Monospac821 BT" panose="020B0609020202020204" pitchFamily="49" charset="0"/>
-              </a:rPr>
-              <a:t>            &lt;h4 </a:t>
-            </a:r>
-            <a:r>
-              <a:rPr lang="hu-HU" sz="1100" dirty="0" err="1">
-                <a:latin typeface="Monospac821 BT" panose="020B0609020202020204" pitchFamily="49" charset="0"/>
-              </a:rPr>
-              <a:t>class</a:t>
-            </a:r>
-            <a:r>
-              <a:rPr lang="hu-HU" sz="1100" dirty="0">
-                <a:latin typeface="Monospac821 BT" panose="020B0609020202020204" pitchFamily="49" charset="0"/>
-              </a:rPr>
-              <a:t>="</a:t>
-            </a:r>
-            <a:r>
-              <a:rPr lang="hu-HU" sz="1100" dirty="0" err="1">
-                <a:latin typeface="Monospac821 BT" panose="020B0609020202020204" pitchFamily="49" charset="0"/>
-              </a:rPr>
-              <a:t>card-header</a:t>
-            </a:r>
-            <a:r>
-              <a:rPr lang="hu-HU" sz="1100" dirty="0">
-                <a:latin typeface="Monospac821 BT" panose="020B0609020202020204" pitchFamily="49" charset="0"/>
-              </a:rPr>
-              <a:t> </a:t>
-            </a:r>
-            <a:r>
-              <a:rPr lang="hu-HU" sz="1100" dirty="0" err="1">
-                <a:latin typeface="Monospac821 BT" panose="020B0609020202020204" pitchFamily="49" charset="0"/>
-              </a:rPr>
-              <a:t>bg-danger</a:t>
-            </a:r>
-            <a:r>
-              <a:rPr lang="hu-HU" sz="1100" dirty="0">
-                <a:latin typeface="Monospac821 BT" panose="020B0609020202020204" pitchFamily="49" charset="0"/>
-              </a:rPr>
-              <a:t> text-</a:t>
-            </a:r>
-            <a:r>
-              <a:rPr lang="hu-HU" sz="1100" dirty="0" err="1">
-                <a:latin typeface="Monospac821 BT" panose="020B0609020202020204" pitchFamily="49" charset="0"/>
-              </a:rPr>
-              <a:t>white</a:t>
-            </a:r>
-            <a:r>
-              <a:rPr lang="hu-HU" sz="1100" dirty="0">
-                <a:latin typeface="Monospac821 BT" panose="020B0609020202020204" pitchFamily="49" charset="0"/>
-              </a:rPr>
-              <a:t> text-center </a:t>
-            </a:r>
-            <a:r>
-              <a:rPr lang="hu-HU" sz="1100" dirty="0" err="1">
-                <a:latin typeface="Monospac821 BT" panose="020B0609020202020204" pitchFamily="49" charset="0"/>
-              </a:rPr>
-              <a:t>fw-bold</a:t>
-            </a:r>
-            <a:r>
-              <a:rPr lang="hu-HU" sz="1100" dirty="0">
-                <a:latin typeface="Monospac821 BT" panose="020B0609020202020204" pitchFamily="49" charset="0"/>
-              </a:rPr>
-              <a:t> rounded-top-4 "&gt;</a:t>
-            </a:r>
-            <a:r>
-              <a:rPr lang="hu-HU" sz="1100" dirty="0" err="1">
-                <a:latin typeface="Monospac821 BT" panose="020B0609020202020204" pitchFamily="49" charset="0"/>
-              </a:rPr>
-              <a:t>Dayan</a:t>
-            </a:r>
-            <a:r>
-              <a:rPr lang="hu-HU" sz="1100" dirty="0">
-                <a:latin typeface="Monospac821 BT" panose="020B0609020202020204" pitchFamily="49" charset="0"/>
-              </a:rPr>
-              <a:t>&lt;/h4&gt;</a:t>
-            </a:r>
-          </a:p>
-          <a:p>
-            <a:r>
-              <a:rPr lang="hu-HU" sz="1100" dirty="0">
-                <a:latin typeface="Monospac821 BT" panose="020B0609020202020204" pitchFamily="49" charset="0"/>
-              </a:rPr>
-              <a:t>        </a:t>
-            </a:r>
-          </a:p>
-          <a:p>
-            <a:r>
-              <a:rPr lang="hu-HU" sz="1100" dirty="0">
-                <a:latin typeface="Monospac821 BT" panose="020B0609020202020204" pitchFamily="49" charset="0"/>
-              </a:rPr>
-              <a:t>            &lt;div </a:t>
-            </a:r>
-            <a:r>
-              <a:rPr lang="hu-HU" sz="1100" dirty="0" err="1">
-                <a:latin typeface="Monospac821 BT" panose="020B0609020202020204" pitchFamily="49" charset="0"/>
-              </a:rPr>
-              <a:t>class</a:t>
-            </a:r>
-            <a:r>
-              <a:rPr lang="hu-HU" sz="1100" dirty="0">
-                <a:latin typeface="Monospac821 BT" panose="020B0609020202020204" pitchFamily="49" charset="0"/>
-              </a:rPr>
-              <a:t>="</a:t>
-            </a:r>
-            <a:r>
-              <a:rPr lang="hu-HU" sz="1100" dirty="0" err="1">
-                <a:latin typeface="Monospac821 BT" panose="020B0609020202020204" pitchFamily="49" charset="0"/>
-              </a:rPr>
-              <a:t>card</a:t>
-            </a:r>
-            <a:r>
-              <a:rPr lang="hu-HU" sz="1100" dirty="0">
-                <a:latin typeface="Monospac821 BT" panose="020B0609020202020204" pitchFamily="49" charset="0"/>
-              </a:rPr>
-              <a:t>-body text-center d-</a:t>
-            </a:r>
-            <a:r>
-              <a:rPr lang="hu-HU" sz="1100" dirty="0" err="1">
-                <a:latin typeface="Monospac821 BT" panose="020B0609020202020204" pitchFamily="49" charset="0"/>
-              </a:rPr>
-              <a:t>flex</a:t>
-            </a:r>
-            <a:r>
-              <a:rPr lang="hu-HU" sz="1100" dirty="0">
-                <a:latin typeface="Monospac821 BT" panose="020B0609020202020204" pitchFamily="49" charset="0"/>
-              </a:rPr>
-              <a:t> </a:t>
-            </a:r>
-            <a:r>
-              <a:rPr lang="hu-HU" sz="1100" dirty="0" err="1">
-                <a:latin typeface="Monospac821 BT" panose="020B0609020202020204" pitchFamily="49" charset="0"/>
-              </a:rPr>
-              <a:t>flex-column</a:t>
-            </a:r>
-            <a:r>
-              <a:rPr lang="hu-HU" sz="1100" dirty="0">
-                <a:latin typeface="Monospac821 BT" panose="020B0609020202020204" pitchFamily="49" charset="0"/>
-              </a:rPr>
-              <a:t>"&gt;</a:t>
-            </a:r>
-          </a:p>
-          <a:p>
-            <a:r>
-              <a:rPr lang="hu-HU" sz="1100" dirty="0">
-                <a:latin typeface="Monospac821 BT" panose="020B0609020202020204" pitchFamily="49" charset="0"/>
-              </a:rPr>
-              <a:t>                &lt;h5 </a:t>
-            </a:r>
-            <a:r>
-              <a:rPr lang="hu-HU" sz="1100" dirty="0" err="1">
-                <a:latin typeface="Monospac821 BT" panose="020B0609020202020204" pitchFamily="49" charset="0"/>
-              </a:rPr>
-              <a:t>class</a:t>
-            </a:r>
-            <a:r>
-              <a:rPr lang="hu-HU" sz="1100" dirty="0">
-                <a:latin typeface="Monospac821 BT" panose="020B0609020202020204" pitchFamily="49" charset="0"/>
-              </a:rPr>
-              <a:t>="</a:t>
-            </a:r>
-            <a:r>
-              <a:rPr lang="hu-HU" sz="1100" dirty="0" err="1">
-                <a:latin typeface="Monospac821 BT" panose="020B0609020202020204" pitchFamily="49" charset="0"/>
-              </a:rPr>
-              <a:t>card-title</a:t>
-            </a:r>
-            <a:r>
-              <a:rPr lang="hu-HU" sz="1100" dirty="0">
-                <a:latin typeface="Monospac821 BT" panose="020B0609020202020204" pitchFamily="49" charset="0"/>
-              </a:rPr>
-              <a:t> text-</a:t>
-            </a:r>
-            <a:r>
-              <a:rPr lang="hu-HU" sz="1100" dirty="0" err="1">
-                <a:latin typeface="Monospac821 BT" panose="020B0609020202020204" pitchFamily="49" charset="0"/>
-              </a:rPr>
-              <a:t>danger</a:t>
-            </a:r>
-            <a:r>
-              <a:rPr lang="hu-HU" sz="1100" dirty="0">
-                <a:latin typeface="Monospac821 BT" panose="020B0609020202020204" pitchFamily="49" charset="0"/>
-              </a:rPr>
-              <a:t> </a:t>
-            </a:r>
-            <a:r>
-              <a:rPr lang="hu-HU" sz="1100" dirty="0" err="1">
-                <a:latin typeface="Monospac821 BT" panose="020B0609020202020204" pitchFamily="49" charset="0"/>
-              </a:rPr>
-              <a:t>fw-bold</a:t>
-            </a:r>
-            <a:r>
-              <a:rPr lang="hu-HU" sz="1100" dirty="0">
-                <a:latin typeface="Monospac821 BT" panose="020B0609020202020204" pitchFamily="49" charset="0"/>
-              </a:rPr>
-              <a:t>"&gt;Sebessége: Átlag (1.0 - 3.0 m/s)&lt;/h5&gt;</a:t>
-            </a:r>
-          </a:p>
-          <a:p>
-            <a:r>
-              <a:rPr lang="hu-HU" sz="1100" dirty="0">
-                <a:latin typeface="Monospac821 BT" panose="020B0609020202020204" pitchFamily="49" charset="0"/>
-              </a:rPr>
-              <a:t>        </a:t>
-            </a:r>
-          </a:p>
-          <a:p>
-            <a:r>
-              <a:rPr lang="hu-HU" sz="1100" dirty="0">
-                <a:latin typeface="Monospac821 BT" panose="020B0609020202020204" pitchFamily="49" charset="0"/>
-              </a:rPr>
-              <a:t>                &lt;p </a:t>
-            </a:r>
-            <a:r>
-              <a:rPr lang="hu-HU" sz="1100" dirty="0" err="1">
-                <a:latin typeface="Monospac821 BT" panose="020B0609020202020204" pitchFamily="49" charset="0"/>
-              </a:rPr>
-              <a:t>class</a:t>
-            </a:r>
-            <a:r>
-              <a:rPr lang="hu-HU" sz="1100" dirty="0">
-                <a:latin typeface="Monospac821 BT" panose="020B0609020202020204" pitchFamily="49" charset="0"/>
-              </a:rPr>
-              <a:t>="</a:t>
-            </a:r>
-            <a:r>
-              <a:rPr lang="hu-HU" sz="1100" dirty="0" err="1">
-                <a:latin typeface="Monospac821 BT" panose="020B0609020202020204" pitchFamily="49" charset="0"/>
-              </a:rPr>
-              <a:t>card</a:t>
-            </a:r>
-            <a:r>
-              <a:rPr lang="hu-HU" sz="1100" dirty="0">
-                <a:latin typeface="Monospac821 BT" panose="020B0609020202020204" pitchFamily="49" charset="0"/>
-              </a:rPr>
-              <a:t>-text text-</a:t>
-            </a:r>
-            <a:r>
-              <a:rPr lang="hu-HU" sz="1100" dirty="0" err="1">
-                <a:latin typeface="Monospac821 BT" panose="020B0609020202020204" pitchFamily="49" charset="0"/>
-              </a:rPr>
-              <a:t>secondary</a:t>
-            </a:r>
-            <a:r>
-              <a:rPr lang="hu-HU" sz="1100" dirty="0">
-                <a:latin typeface="Monospac821 BT" panose="020B0609020202020204" pitchFamily="49" charset="0"/>
-              </a:rPr>
-              <a:t>"&gt;</a:t>
-            </a:r>
-          </a:p>
-          <a:p>
-            <a:r>
-              <a:rPr lang="hu-HU" sz="1100" dirty="0">
-                <a:latin typeface="Monospac821 BT" panose="020B0609020202020204" pitchFamily="49" charset="0"/>
-              </a:rPr>
-              <a:t>                    Nagyon lassú, amíg nem lát játékost, de látáskor rendkívül gyors. Ha elbújsz és megszakad a látótáv, azonnal lelassul.</a:t>
-            </a:r>
-          </a:p>
-          <a:p>
-            <a:r>
-              <a:rPr lang="hu-HU" sz="1100" dirty="0">
-                <a:latin typeface="Monospac821 BT" panose="020B0609020202020204" pitchFamily="49" charset="0"/>
-              </a:rPr>
-              <a:t>                &lt;/p&gt;</a:t>
-            </a:r>
-          </a:p>
-          <a:p>
-            <a:r>
-              <a:rPr lang="hu-HU" sz="1100" dirty="0">
-                <a:latin typeface="Monospac821 BT" panose="020B0609020202020204" pitchFamily="49" charset="0"/>
-              </a:rPr>
-              <a:t>        </a:t>
-            </a:r>
-          </a:p>
-          <a:p>
-            <a:r>
-              <a:rPr lang="hu-HU" sz="1100" dirty="0">
-                <a:latin typeface="Monospac821 BT" panose="020B0609020202020204" pitchFamily="49" charset="0"/>
-              </a:rPr>
-              <a:t>                &lt;div </a:t>
-            </a:r>
-            <a:r>
-              <a:rPr lang="hu-HU" sz="1100" dirty="0" err="1">
-                <a:latin typeface="Monospac821 BT" panose="020B0609020202020204" pitchFamily="49" charset="0"/>
-              </a:rPr>
-              <a:t>class</a:t>
-            </a:r>
-            <a:r>
-              <a:rPr lang="hu-HU" sz="1100" dirty="0">
-                <a:latin typeface="Monospac821 BT" panose="020B0609020202020204" pitchFamily="49" charset="0"/>
-              </a:rPr>
-              <a:t>="mb-3 </a:t>
-            </a:r>
-            <a:r>
-              <a:rPr lang="hu-HU" sz="1100" dirty="0" err="1">
-                <a:latin typeface="Monospac821 BT" panose="020B0609020202020204" pitchFamily="49" charset="0"/>
-              </a:rPr>
-              <a:t>mt-auto</a:t>
-            </a:r>
-            <a:r>
-              <a:rPr lang="hu-HU" sz="1100" dirty="0">
-                <a:latin typeface="Monospac821 BT" panose="020B0609020202020204" pitchFamily="49" charset="0"/>
-              </a:rPr>
-              <a:t>"&gt;</a:t>
-            </a:r>
-          </a:p>
-          <a:p>
-            <a:r>
-              <a:rPr lang="hu-HU" sz="1100" dirty="0">
-                <a:latin typeface="Monospac821 BT" panose="020B0609020202020204" pitchFamily="49" charset="0"/>
-              </a:rPr>
-              <a:t>                    &lt;</a:t>
-            </a:r>
-            <a:r>
-              <a:rPr lang="hu-HU" sz="1100" dirty="0" err="1">
-                <a:latin typeface="Monospac821 BT" panose="020B0609020202020204" pitchFamily="49" charset="0"/>
-              </a:rPr>
-              <a:t>span</a:t>
-            </a:r>
-            <a:r>
-              <a:rPr lang="hu-HU" sz="1100" dirty="0">
-                <a:latin typeface="Monospac821 BT" panose="020B0609020202020204" pitchFamily="49" charset="0"/>
-              </a:rPr>
-              <a:t> </a:t>
-            </a:r>
-            <a:r>
-              <a:rPr lang="hu-HU" sz="1100" dirty="0" err="1">
-                <a:latin typeface="Monospac821 BT" panose="020B0609020202020204" pitchFamily="49" charset="0"/>
-              </a:rPr>
-              <a:t>class</a:t>
-            </a:r>
-            <a:r>
-              <a:rPr lang="hu-HU" sz="1100" dirty="0">
-                <a:latin typeface="Monospac821 BT" panose="020B0609020202020204" pitchFamily="49" charset="0"/>
-              </a:rPr>
-              <a:t>="</a:t>
-            </a:r>
-            <a:r>
-              <a:rPr lang="hu-HU" sz="1100" dirty="0" err="1">
-                <a:latin typeface="Monospac821 BT" panose="020B0609020202020204" pitchFamily="49" charset="0"/>
-              </a:rPr>
-              <a:t>badge</a:t>
-            </a:r>
-            <a:r>
-              <a:rPr lang="hu-HU" sz="1100" dirty="0">
-                <a:latin typeface="Monospac821 BT" panose="020B0609020202020204" pitchFamily="49" charset="0"/>
-              </a:rPr>
-              <a:t> </a:t>
-            </a:r>
-            <a:r>
-              <a:rPr lang="hu-HU" sz="1100" dirty="0" err="1">
-                <a:latin typeface="Monospac821 BT" panose="020B0609020202020204" pitchFamily="49" charset="0"/>
-              </a:rPr>
-              <a:t>emf</a:t>
-            </a:r>
-            <a:r>
-              <a:rPr lang="hu-HU" sz="1100" dirty="0">
-                <a:latin typeface="Monospac821 BT" panose="020B0609020202020204" pitchFamily="49" charset="0"/>
-              </a:rPr>
-              <a:t> text-</a:t>
-            </a:r>
-            <a:r>
-              <a:rPr lang="hu-HU" sz="1100" dirty="0" err="1">
-                <a:latin typeface="Monospac821 BT" panose="020B0609020202020204" pitchFamily="49" charset="0"/>
-              </a:rPr>
-              <a:t>dark</a:t>
-            </a:r>
-            <a:r>
-              <a:rPr lang="hu-HU" sz="1100" dirty="0">
-                <a:latin typeface="Monospac821 BT" panose="020B0609020202020204" pitchFamily="49" charset="0"/>
-              </a:rPr>
-              <a:t>"&gt;EMF 5&lt;/</a:t>
-            </a:r>
-            <a:r>
-              <a:rPr lang="hu-HU" sz="1100" dirty="0" err="1">
-                <a:latin typeface="Monospac821 BT" panose="020B0609020202020204" pitchFamily="49" charset="0"/>
-              </a:rPr>
-              <a:t>span</a:t>
-            </a:r>
-            <a:r>
-              <a:rPr lang="hu-HU" sz="1100" dirty="0">
-                <a:latin typeface="Monospac821 BT" panose="020B0609020202020204" pitchFamily="49" charset="0"/>
-              </a:rPr>
-              <a:t>&gt;</a:t>
-            </a:r>
-          </a:p>
-          <a:p>
-            <a:r>
-              <a:rPr lang="hu-HU" sz="1100" dirty="0">
-                <a:latin typeface="Monospac821 BT" panose="020B0609020202020204" pitchFamily="49" charset="0"/>
-              </a:rPr>
-              <a:t>                    &lt;</a:t>
-            </a:r>
-            <a:r>
-              <a:rPr lang="hu-HU" sz="1100" dirty="0" err="1">
-                <a:latin typeface="Monospac821 BT" panose="020B0609020202020204" pitchFamily="49" charset="0"/>
-              </a:rPr>
-              <a:t>span</a:t>
-            </a:r>
-            <a:r>
-              <a:rPr lang="hu-HU" sz="1100" dirty="0">
-                <a:latin typeface="Monospac821 BT" panose="020B0609020202020204" pitchFamily="49" charset="0"/>
-              </a:rPr>
-              <a:t> </a:t>
-            </a:r>
-            <a:r>
-              <a:rPr lang="hu-HU" sz="1100" dirty="0" err="1">
-                <a:latin typeface="Monospac821 BT" panose="020B0609020202020204" pitchFamily="49" charset="0"/>
-              </a:rPr>
-              <a:t>class</a:t>
-            </a:r>
-            <a:r>
-              <a:rPr lang="hu-HU" sz="1100" dirty="0">
-                <a:latin typeface="Monospac821 BT" panose="020B0609020202020204" pitchFamily="49" charset="0"/>
-              </a:rPr>
-              <a:t>="</a:t>
-            </a:r>
-            <a:r>
-              <a:rPr lang="hu-HU" sz="1100" dirty="0" err="1">
-                <a:latin typeface="Monospac821 BT" panose="020B0609020202020204" pitchFamily="49" charset="0"/>
-              </a:rPr>
-              <a:t>badge</a:t>
-            </a:r>
-            <a:r>
-              <a:rPr lang="hu-HU" sz="1100" dirty="0">
-                <a:latin typeface="Monospac821 BT" panose="020B0609020202020204" pitchFamily="49" charset="0"/>
-              </a:rPr>
-              <a:t> </a:t>
-            </a:r>
-            <a:r>
-              <a:rPr lang="hu-HU" sz="1100" dirty="0" err="1">
-                <a:latin typeface="Monospac821 BT" panose="020B0609020202020204" pitchFamily="49" charset="0"/>
-              </a:rPr>
-              <a:t>orb</a:t>
-            </a:r>
-            <a:r>
-              <a:rPr lang="hu-HU" sz="1100" dirty="0">
-                <a:latin typeface="Monospac821 BT" panose="020B0609020202020204" pitchFamily="49" charset="0"/>
-              </a:rPr>
-              <a:t> text-</a:t>
-            </a:r>
-            <a:r>
-              <a:rPr lang="hu-HU" sz="1100" dirty="0" err="1">
-                <a:latin typeface="Monospac821 BT" panose="020B0609020202020204" pitchFamily="49" charset="0"/>
-              </a:rPr>
-              <a:t>dark</a:t>
-            </a:r>
-            <a:r>
-              <a:rPr lang="hu-HU" sz="1100" dirty="0">
-                <a:latin typeface="Monospac821 BT" panose="020B0609020202020204" pitchFamily="49" charset="0"/>
-              </a:rPr>
-              <a:t>"&gt;</a:t>
-            </a:r>
-            <a:r>
-              <a:rPr lang="hu-HU" sz="1100" dirty="0" err="1">
-                <a:latin typeface="Monospac821 BT" panose="020B0609020202020204" pitchFamily="49" charset="0"/>
-              </a:rPr>
-              <a:t>Ghost</a:t>
-            </a:r>
-            <a:r>
-              <a:rPr lang="hu-HU" sz="1100" dirty="0">
-                <a:latin typeface="Monospac821 BT" panose="020B0609020202020204" pitchFamily="49" charset="0"/>
-              </a:rPr>
-              <a:t> </a:t>
-            </a:r>
-            <a:r>
-              <a:rPr lang="hu-HU" sz="1100" dirty="0" err="1">
-                <a:latin typeface="Monospac821 BT" panose="020B0609020202020204" pitchFamily="49" charset="0"/>
-              </a:rPr>
-              <a:t>orb</a:t>
-            </a:r>
-            <a:r>
-              <a:rPr lang="hu-HU" sz="1100" dirty="0">
-                <a:latin typeface="Monospac821 BT" panose="020B0609020202020204" pitchFamily="49" charset="0"/>
-              </a:rPr>
-              <a:t> &lt;/</a:t>
-            </a:r>
-            <a:r>
-              <a:rPr lang="hu-HU" sz="1100" dirty="0" err="1">
-                <a:latin typeface="Monospac821 BT" panose="020B0609020202020204" pitchFamily="49" charset="0"/>
-              </a:rPr>
-              <a:t>span</a:t>
-            </a:r>
-            <a:r>
-              <a:rPr lang="hu-HU" sz="1100" dirty="0">
-                <a:latin typeface="Monospac821 BT" panose="020B0609020202020204" pitchFamily="49" charset="0"/>
-              </a:rPr>
-              <a:t>&gt;</a:t>
-            </a:r>
-          </a:p>
-          <a:p>
-            <a:r>
-              <a:rPr lang="hu-HU" sz="1100" dirty="0">
-                <a:latin typeface="Monospac821 BT" panose="020B0609020202020204" pitchFamily="49" charset="0"/>
-              </a:rPr>
-              <a:t>                    &lt;</a:t>
-            </a:r>
-            <a:r>
-              <a:rPr lang="hu-HU" sz="1100" dirty="0" err="1">
-                <a:latin typeface="Monospac821 BT" panose="020B0609020202020204" pitchFamily="49" charset="0"/>
-              </a:rPr>
-              <a:t>span</a:t>
-            </a:r>
-            <a:r>
-              <a:rPr lang="hu-HU" sz="1100" dirty="0">
-                <a:latin typeface="Monospac821 BT" panose="020B0609020202020204" pitchFamily="49" charset="0"/>
-              </a:rPr>
-              <a:t> </a:t>
-            </a:r>
-            <a:r>
-              <a:rPr lang="hu-HU" sz="1100" dirty="0" err="1">
-                <a:latin typeface="Monospac821 BT" panose="020B0609020202020204" pitchFamily="49" charset="0"/>
-              </a:rPr>
-              <a:t>class</a:t>
-            </a:r>
-            <a:r>
-              <a:rPr lang="hu-HU" sz="1100" dirty="0">
-                <a:latin typeface="Monospac821 BT" panose="020B0609020202020204" pitchFamily="49" charset="0"/>
-              </a:rPr>
-              <a:t>="</a:t>
-            </a:r>
-            <a:r>
-              <a:rPr lang="hu-HU" sz="1100" dirty="0" err="1">
-                <a:latin typeface="Monospac821 BT" panose="020B0609020202020204" pitchFamily="49" charset="0"/>
-              </a:rPr>
-              <a:t>badge</a:t>
-            </a:r>
-            <a:r>
-              <a:rPr lang="hu-HU" sz="1100" dirty="0">
-                <a:latin typeface="Monospac821 BT" panose="020B0609020202020204" pitchFamily="49" charset="0"/>
-              </a:rPr>
-              <a:t> </a:t>
-            </a:r>
-            <a:r>
-              <a:rPr lang="hu-HU" sz="1100" dirty="0" err="1">
-                <a:latin typeface="Monospac821 BT" panose="020B0609020202020204" pitchFamily="49" charset="0"/>
-              </a:rPr>
-              <a:t>spirit_box</a:t>
-            </a:r>
-            <a:r>
-              <a:rPr lang="hu-HU" sz="1100" dirty="0">
-                <a:latin typeface="Monospac821 BT" panose="020B0609020202020204" pitchFamily="49" charset="0"/>
-              </a:rPr>
-              <a:t> text-</a:t>
-            </a:r>
-            <a:r>
-              <a:rPr lang="hu-HU" sz="1100" dirty="0" err="1">
-                <a:latin typeface="Monospac821 BT" panose="020B0609020202020204" pitchFamily="49" charset="0"/>
-              </a:rPr>
-              <a:t>dark</a:t>
-            </a:r>
-            <a:r>
-              <a:rPr lang="hu-HU" sz="1100" dirty="0">
-                <a:latin typeface="Monospac821 BT" panose="020B0609020202020204" pitchFamily="49" charset="0"/>
-              </a:rPr>
-              <a:t>"&gt;</a:t>
-            </a:r>
-            <a:r>
-              <a:rPr lang="hu-HU" sz="1100" dirty="0" err="1">
-                <a:latin typeface="Monospac821 BT" panose="020B0609020202020204" pitchFamily="49" charset="0"/>
-              </a:rPr>
-              <a:t>Spirit</a:t>
-            </a:r>
-            <a:r>
-              <a:rPr lang="hu-HU" sz="1100" dirty="0">
-                <a:latin typeface="Monospac821 BT" panose="020B0609020202020204" pitchFamily="49" charset="0"/>
-              </a:rPr>
-              <a:t> </a:t>
-            </a:r>
-            <a:r>
-              <a:rPr lang="hu-HU" sz="1100" dirty="0" err="1">
-                <a:latin typeface="Monospac821 BT" panose="020B0609020202020204" pitchFamily="49" charset="0"/>
-              </a:rPr>
-              <a:t>Box</a:t>
-            </a:r>
-            <a:r>
-              <a:rPr lang="hu-HU" sz="1100" dirty="0">
-                <a:latin typeface="Monospac821 BT" panose="020B0609020202020204" pitchFamily="49" charset="0"/>
-              </a:rPr>
-              <a:t>&lt;/</a:t>
-            </a:r>
-            <a:r>
-              <a:rPr lang="hu-HU" sz="1100" dirty="0" err="1">
-                <a:latin typeface="Monospac821 BT" panose="020B0609020202020204" pitchFamily="49" charset="0"/>
-              </a:rPr>
-              <a:t>span</a:t>
-            </a:r>
-            <a:r>
-              <a:rPr lang="hu-HU" sz="1100" dirty="0">
-                <a:latin typeface="Monospac821 BT" panose="020B0609020202020204" pitchFamily="49" charset="0"/>
-              </a:rPr>
-              <a:t>&gt;</a:t>
-            </a:r>
-          </a:p>
-          <a:p>
-            <a:r>
-              <a:rPr lang="hu-HU" sz="1100" dirty="0">
-                <a:latin typeface="Monospac821 BT" panose="020B0609020202020204" pitchFamily="49" charset="0"/>
-              </a:rPr>
-              <a:t>                &lt;/div&gt;</a:t>
-            </a:r>
-          </a:p>
-          <a:p>
-            <a:r>
-              <a:rPr lang="hu-HU" sz="1100" dirty="0">
-                <a:latin typeface="Monospac821 BT" panose="020B0609020202020204" pitchFamily="49" charset="0"/>
-              </a:rPr>
-              <a:t>            &lt;/div&gt;</a:t>
-            </a:r>
-          </a:p>
-          <a:p>
-            <a:r>
-              <a:rPr lang="hu-HU" sz="1100" dirty="0">
-                <a:latin typeface="Monospac821 BT" panose="020B0609020202020204" pitchFamily="49" charset="0"/>
-              </a:rPr>
-              <a:t>        &lt;/div&gt;</a:t>
-            </a:r>
-          </a:p>
-          <a:p>
-            <a:r>
-              <a:rPr lang="hu-HU" sz="1100" dirty="0">
-                <a:latin typeface="Monospac821 BT" panose="020B0609020202020204" pitchFamily="49" charset="0"/>
-              </a:rPr>
-              <a:t>    &lt;/div&gt;</a:t>
-            </a:r>
-          </a:p>
-        </p:txBody>
-      </p:sp>
-      <p:sp>
-        <p:nvSpPr>
           <p:cNvPr id="8" name="Szövegdoboz 7">
             <a:extLst>
               <a:ext uri="{FF2B5EF4-FFF2-40B4-BE49-F238E27FC236}">
@@ -7401,6 +6546,36 @@
           </a:p>
         </p:txBody>
       </p:sp>
+      <p:pic>
+        <p:nvPicPr>
+          <p:cNvPr id="5" name="Kép 4">
+            <a:extLst>
+              <a:ext uri="{FF2B5EF4-FFF2-40B4-BE49-F238E27FC236}">
+                <a16:creationId xmlns:a16="http://schemas.microsoft.com/office/drawing/2014/main" id="{6D24B581-B911-4183-B52D-502BA0F84E74}"/>
+              </a:ext>
+            </a:extLst>
+          </p:cNvPr>
+          <p:cNvPicPr>
+            <a:picLocks noChangeAspect="1"/>
+          </p:cNvPicPr>
+          <p:nvPr/>
+        </p:nvPicPr>
+        <p:blipFill>
+          <a:blip r:embed="rId2"/>
+          <a:stretch>
+            <a:fillRect/>
+          </a:stretch>
+        </p:blipFill>
+        <p:spPr>
+          <a:xfrm>
+            <a:off x="4403322" y="1208543"/>
+            <a:ext cx="7400471" cy="3201721"/>
+          </a:xfrm>
+          <a:prstGeom prst="rect">
+            <a:avLst/>
+          </a:prstGeom>
+        </p:spPr>
+      </p:pic>
     </p:spTree>
     <p:extLst>
       <p:ext uri="{BB962C8B-B14F-4D97-AF65-F5344CB8AC3E}">
@@ -7571,861 +6746,6 @@
       </p:sp>
       <p:sp>
         <p:nvSpPr>
-          <p:cNvPr id="2" name="Szövegdoboz 1">
-            <a:extLst>
-              <a:ext uri="{FF2B5EF4-FFF2-40B4-BE49-F238E27FC236}">
-                <a16:creationId xmlns:a16="http://schemas.microsoft.com/office/drawing/2014/main" id="{185943A9-DFFA-48AE-96FA-7262C2D863EE}"/>
-              </a:ext>
-            </a:extLst>
-          </p:cNvPr>
-          <p:cNvSpPr txBox="1"/>
-          <p:nvPr/>
-        </p:nvSpPr>
-        <p:spPr>
-          <a:xfrm>
-            <a:off x="4936898" y="192117"/>
-            <a:ext cx="6429479" cy="5170646"/>
-          </a:xfrm>
-          <a:prstGeom prst="rect">
-            <a:avLst/>
-          </a:prstGeom>
-          <a:noFill/>
-        </p:spPr>
-        <p:txBody>
-          <a:bodyPr wrap="square" rtlCol="0">
-            <a:spAutoFit/>
-          </a:bodyPr>
-          <a:lstStyle/>
-          <a:p>
-            <a:endParaRPr lang="hu-HU" sz="1100" dirty="0">
-              <a:latin typeface="Monospac821 BT" panose="020B0609020202020204" pitchFamily="49" charset="0"/>
-            </a:endParaRPr>
-          </a:p>
-          <a:p>
-            <a:r>
-              <a:rPr lang="hu-HU" sz="1100" dirty="0">
-                <a:latin typeface="Monospac821 BT" panose="020B0609020202020204" pitchFamily="49" charset="0"/>
-              </a:rPr>
-              <a:t>&lt;!-- </a:t>
-            </a:r>
-            <a:r>
-              <a:rPr lang="hu-HU" sz="1100" dirty="0" err="1">
-                <a:latin typeface="Monospac821 BT" panose="020B0609020202020204" pitchFamily="49" charset="0"/>
-              </a:rPr>
-              <a:t>Dayan</a:t>
-            </a:r>
-            <a:r>
-              <a:rPr lang="hu-HU" sz="1100" dirty="0">
-                <a:latin typeface="Monospac821 BT" panose="020B0609020202020204" pitchFamily="49" charset="0"/>
-              </a:rPr>
-              <a:t>  --&gt;</a:t>
-            </a:r>
-          </a:p>
-          <a:p>
-            <a:endParaRPr lang="hu-HU" sz="1100" dirty="0">
-              <a:latin typeface="Monospac821 BT" panose="020B0609020202020204" pitchFamily="49" charset="0"/>
-            </a:endParaRPr>
-          </a:p>
-          <a:p>
-            <a:r>
-              <a:rPr lang="hu-HU" sz="1100" dirty="0">
-                <a:latin typeface="Monospac821 BT" panose="020B0609020202020204" pitchFamily="49" charset="0"/>
-              </a:rPr>
-              <a:t>        &lt;div </a:t>
-            </a:r>
-            <a:r>
-              <a:rPr lang="hu-HU" sz="1100" dirty="0" err="1">
-                <a:latin typeface="Monospac821 BT" panose="020B0609020202020204" pitchFamily="49" charset="0"/>
-              </a:rPr>
-              <a:t>class</a:t>
-            </a:r>
-            <a:r>
-              <a:rPr lang="hu-HU" sz="1100" dirty="0">
-                <a:latin typeface="Monospac821 BT" panose="020B0609020202020204" pitchFamily="49" charset="0"/>
-              </a:rPr>
-              <a:t>="col-12 col-md-6 col-lg-3 mb-5 </a:t>
-            </a:r>
-            <a:r>
-              <a:rPr lang="hu-HU" sz="1100" dirty="0" err="1">
-                <a:latin typeface="Monospac821 BT" panose="020B0609020202020204" pitchFamily="49" charset="0"/>
-              </a:rPr>
-              <a:t>ghost-card</a:t>
-            </a:r>
-            <a:r>
-              <a:rPr lang="hu-HU" sz="1100" dirty="0">
-                <a:latin typeface="Monospac821 BT" panose="020B0609020202020204" pitchFamily="49" charset="0"/>
-              </a:rPr>
-              <a:t>" </a:t>
-            </a:r>
-            <a:r>
-              <a:rPr lang="hu-HU" sz="1100" dirty="0" err="1">
-                <a:latin typeface="Monospac821 BT" panose="020B0609020202020204" pitchFamily="49" charset="0"/>
-              </a:rPr>
-              <a:t>data-evidence</a:t>
-            </a:r>
-            <a:r>
-              <a:rPr lang="hu-HU" sz="1100" dirty="0">
-                <a:latin typeface="Monospac821 BT" panose="020B0609020202020204" pitchFamily="49" charset="0"/>
-              </a:rPr>
-              <a:t>="</a:t>
-            </a:r>
-            <a:r>
-              <a:rPr lang="hu-HU" sz="1100" dirty="0" err="1">
-                <a:latin typeface="Monospac821 BT" panose="020B0609020202020204" pitchFamily="49" charset="0"/>
-              </a:rPr>
-              <a:t>emf</a:t>
-            </a:r>
-            <a:r>
-              <a:rPr lang="hu-HU" sz="1100" dirty="0">
-                <a:latin typeface="Monospac821 BT" panose="020B0609020202020204" pitchFamily="49" charset="0"/>
-              </a:rPr>
-              <a:t> </a:t>
-            </a:r>
-            <a:r>
-              <a:rPr lang="hu-HU" sz="1100" dirty="0" err="1">
-                <a:latin typeface="Monospac821 BT" panose="020B0609020202020204" pitchFamily="49" charset="0"/>
-              </a:rPr>
-              <a:t>orb</a:t>
-            </a:r>
-            <a:r>
-              <a:rPr lang="hu-HU" sz="1100" dirty="0">
-                <a:latin typeface="Monospac821 BT" panose="020B0609020202020204" pitchFamily="49" charset="0"/>
-              </a:rPr>
-              <a:t> </a:t>
-            </a:r>
-            <a:r>
-              <a:rPr lang="hu-HU" sz="1100" dirty="0" err="1">
-                <a:latin typeface="Monospac821 BT" panose="020B0609020202020204" pitchFamily="49" charset="0"/>
-              </a:rPr>
-              <a:t>spirit_box</a:t>
-            </a:r>
-            <a:r>
-              <a:rPr lang="hu-HU" sz="1100" dirty="0">
-                <a:latin typeface="Monospac821 BT" panose="020B0609020202020204" pitchFamily="49" charset="0"/>
-              </a:rPr>
-              <a:t>"&gt;</a:t>
-            </a:r>
-          </a:p>
-          <a:p>
-            <a:r>
-              <a:rPr lang="hu-HU" sz="1100" dirty="0">
-                <a:latin typeface="Monospac821 BT" panose="020B0609020202020204" pitchFamily="49" charset="0"/>
-              </a:rPr>
-              <a:t>        &lt;div </a:t>
-            </a:r>
-            <a:r>
-              <a:rPr lang="hu-HU" sz="1100" dirty="0" err="1">
-                <a:latin typeface="Monospac821 BT" panose="020B0609020202020204" pitchFamily="49" charset="0"/>
-              </a:rPr>
-              <a:t>class</a:t>
-            </a:r>
-            <a:r>
-              <a:rPr lang="hu-HU" sz="1100" dirty="0">
-                <a:latin typeface="Monospac821 BT" panose="020B0609020202020204" pitchFamily="49" charset="0"/>
-              </a:rPr>
-              <a:t>="</a:t>
-            </a:r>
-            <a:r>
-              <a:rPr lang="hu-HU" sz="1100" dirty="0" err="1">
-                <a:latin typeface="Monospac821 BT" panose="020B0609020202020204" pitchFamily="49" charset="0"/>
-              </a:rPr>
-              <a:t>card</a:t>
-            </a:r>
-            <a:r>
-              <a:rPr lang="hu-HU" sz="1100" dirty="0">
-                <a:latin typeface="Monospac821 BT" panose="020B0609020202020204" pitchFamily="49" charset="0"/>
-              </a:rPr>
-              <a:t> </a:t>
-            </a:r>
-            <a:r>
-              <a:rPr lang="hu-HU" sz="1100" dirty="0" err="1">
-                <a:latin typeface="Monospac821 BT" panose="020B0609020202020204" pitchFamily="49" charset="0"/>
-              </a:rPr>
-              <a:t>bg-dark</a:t>
-            </a:r>
-            <a:r>
-              <a:rPr lang="hu-HU" sz="1100" dirty="0">
-                <a:latin typeface="Monospac821 BT" panose="020B0609020202020204" pitchFamily="49" charset="0"/>
-              </a:rPr>
-              <a:t> text-</a:t>
-            </a:r>
-            <a:r>
-              <a:rPr lang="hu-HU" sz="1100" dirty="0" err="1">
-                <a:latin typeface="Monospac821 BT" panose="020B0609020202020204" pitchFamily="49" charset="0"/>
-              </a:rPr>
-              <a:t>light</a:t>
-            </a:r>
-            <a:r>
-              <a:rPr lang="hu-HU" sz="1100" dirty="0">
-                <a:latin typeface="Monospac821 BT" panose="020B0609020202020204" pitchFamily="49" charset="0"/>
-              </a:rPr>
-              <a:t> </a:t>
-            </a:r>
-            <a:r>
-              <a:rPr lang="hu-HU" sz="1100" dirty="0" err="1">
-                <a:latin typeface="Monospac821 BT" panose="020B0609020202020204" pitchFamily="49" charset="0"/>
-              </a:rPr>
-              <a:t>border-danger</a:t>
-            </a:r>
-            <a:r>
-              <a:rPr lang="hu-HU" sz="1100" dirty="0">
-                <a:latin typeface="Monospac821 BT" panose="020B0609020202020204" pitchFamily="49" charset="0"/>
-              </a:rPr>
-              <a:t> </a:t>
-            </a:r>
-            <a:r>
-              <a:rPr lang="hu-HU" sz="1100" dirty="0" err="1">
-                <a:latin typeface="Monospac821 BT" panose="020B0609020202020204" pitchFamily="49" charset="0"/>
-              </a:rPr>
-              <a:t>shadow</a:t>
-            </a:r>
-            <a:r>
-              <a:rPr lang="hu-HU" sz="1100" dirty="0">
-                <a:latin typeface="Monospac821 BT" panose="020B0609020202020204" pitchFamily="49" charset="0"/>
-              </a:rPr>
-              <a:t>-lg rounded-4 h-100"&gt;</a:t>
-            </a:r>
-          </a:p>
-          <a:p>
-            <a:r>
-              <a:rPr lang="hu-HU" sz="1100" dirty="0">
-                <a:latin typeface="Monospac821 BT" panose="020B0609020202020204" pitchFamily="49" charset="0"/>
-              </a:rPr>
-              <a:t>        </a:t>
-            </a:r>
-          </a:p>
-          <a:p>
-            <a:r>
-              <a:rPr lang="hu-HU" sz="1100" dirty="0">
-                <a:latin typeface="Monospac821 BT" panose="020B0609020202020204" pitchFamily="49" charset="0"/>
-              </a:rPr>
-              <a:t>            &lt;h4 </a:t>
-            </a:r>
-            <a:r>
-              <a:rPr lang="hu-HU" sz="1100" dirty="0" err="1">
-                <a:latin typeface="Monospac821 BT" panose="020B0609020202020204" pitchFamily="49" charset="0"/>
-              </a:rPr>
-              <a:t>class</a:t>
-            </a:r>
-            <a:r>
-              <a:rPr lang="hu-HU" sz="1100" dirty="0">
-                <a:latin typeface="Monospac821 BT" panose="020B0609020202020204" pitchFamily="49" charset="0"/>
-              </a:rPr>
-              <a:t>="</a:t>
-            </a:r>
-            <a:r>
-              <a:rPr lang="hu-HU" sz="1100" dirty="0" err="1">
-                <a:latin typeface="Monospac821 BT" panose="020B0609020202020204" pitchFamily="49" charset="0"/>
-              </a:rPr>
-              <a:t>card-header</a:t>
-            </a:r>
-            <a:r>
-              <a:rPr lang="hu-HU" sz="1100" dirty="0">
-                <a:latin typeface="Monospac821 BT" panose="020B0609020202020204" pitchFamily="49" charset="0"/>
-              </a:rPr>
-              <a:t> </a:t>
-            </a:r>
-            <a:r>
-              <a:rPr lang="hu-HU" sz="1100" dirty="0" err="1">
-                <a:latin typeface="Monospac821 BT" panose="020B0609020202020204" pitchFamily="49" charset="0"/>
-              </a:rPr>
-              <a:t>bg-danger</a:t>
-            </a:r>
-            <a:r>
-              <a:rPr lang="hu-HU" sz="1100" dirty="0">
-                <a:latin typeface="Monospac821 BT" panose="020B0609020202020204" pitchFamily="49" charset="0"/>
-              </a:rPr>
-              <a:t> text-</a:t>
-            </a:r>
-            <a:r>
-              <a:rPr lang="hu-HU" sz="1100" dirty="0" err="1">
-                <a:latin typeface="Monospac821 BT" panose="020B0609020202020204" pitchFamily="49" charset="0"/>
-              </a:rPr>
-              <a:t>white</a:t>
-            </a:r>
-            <a:r>
-              <a:rPr lang="hu-HU" sz="1100" dirty="0">
-                <a:latin typeface="Monospac821 BT" panose="020B0609020202020204" pitchFamily="49" charset="0"/>
-              </a:rPr>
-              <a:t> text-center </a:t>
-            </a:r>
-            <a:r>
-              <a:rPr lang="hu-HU" sz="1100" dirty="0" err="1">
-                <a:latin typeface="Monospac821 BT" panose="020B0609020202020204" pitchFamily="49" charset="0"/>
-              </a:rPr>
-              <a:t>fw-bold</a:t>
-            </a:r>
-            <a:r>
-              <a:rPr lang="hu-HU" sz="1100" dirty="0">
-                <a:latin typeface="Monospac821 BT" panose="020B0609020202020204" pitchFamily="49" charset="0"/>
-              </a:rPr>
-              <a:t> rounded-top-4 "&gt;</a:t>
-            </a:r>
-            <a:r>
-              <a:rPr lang="hu-HU" sz="1100" dirty="0" err="1">
-                <a:latin typeface="Monospac821 BT" panose="020B0609020202020204" pitchFamily="49" charset="0"/>
-              </a:rPr>
-              <a:t>Dayan</a:t>
-            </a:r>
-            <a:r>
-              <a:rPr lang="hu-HU" sz="1100" dirty="0">
-                <a:latin typeface="Monospac821 BT" panose="020B0609020202020204" pitchFamily="49" charset="0"/>
-              </a:rPr>
-              <a:t>&lt;/h4&gt;</a:t>
-            </a:r>
-          </a:p>
-          <a:p>
-            <a:r>
-              <a:rPr lang="hu-HU" sz="1100" dirty="0">
-                <a:latin typeface="Monospac821 BT" panose="020B0609020202020204" pitchFamily="49" charset="0"/>
-              </a:rPr>
-              <a:t>        </a:t>
-            </a:r>
-          </a:p>
-          <a:p>
-            <a:r>
-              <a:rPr lang="hu-HU" sz="1100" dirty="0">
-                <a:latin typeface="Monospac821 BT" panose="020B0609020202020204" pitchFamily="49" charset="0"/>
-              </a:rPr>
-              <a:t>            &lt;div </a:t>
-            </a:r>
-            <a:r>
-              <a:rPr lang="hu-HU" sz="1100" dirty="0" err="1">
-                <a:latin typeface="Monospac821 BT" panose="020B0609020202020204" pitchFamily="49" charset="0"/>
-              </a:rPr>
-              <a:t>class</a:t>
-            </a:r>
-            <a:r>
-              <a:rPr lang="hu-HU" sz="1100" dirty="0">
-                <a:latin typeface="Monospac821 BT" panose="020B0609020202020204" pitchFamily="49" charset="0"/>
-              </a:rPr>
-              <a:t>="</a:t>
-            </a:r>
-            <a:r>
-              <a:rPr lang="hu-HU" sz="1100" dirty="0" err="1">
-                <a:latin typeface="Monospac821 BT" panose="020B0609020202020204" pitchFamily="49" charset="0"/>
-              </a:rPr>
-              <a:t>card</a:t>
-            </a:r>
-            <a:r>
-              <a:rPr lang="hu-HU" sz="1100" dirty="0">
-                <a:latin typeface="Monospac821 BT" panose="020B0609020202020204" pitchFamily="49" charset="0"/>
-              </a:rPr>
-              <a:t>-body text-center d-</a:t>
-            </a:r>
-            <a:r>
-              <a:rPr lang="hu-HU" sz="1100" dirty="0" err="1">
-                <a:latin typeface="Monospac821 BT" panose="020B0609020202020204" pitchFamily="49" charset="0"/>
-              </a:rPr>
-              <a:t>flex</a:t>
-            </a:r>
-            <a:r>
-              <a:rPr lang="hu-HU" sz="1100" dirty="0">
-                <a:latin typeface="Monospac821 BT" panose="020B0609020202020204" pitchFamily="49" charset="0"/>
-              </a:rPr>
-              <a:t> </a:t>
-            </a:r>
-            <a:r>
-              <a:rPr lang="hu-HU" sz="1100" dirty="0" err="1">
-                <a:latin typeface="Monospac821 BT" panose="020B0609020202020204" pitchFamily="49" charset="0"/>
-              </a:rPr>
-              <a:t>flex-column</a:t>
-            </a:r>
-            <a:r>
-              <a:rPr lang="hu-HU" sz="1100" dirty="0">
-                <a:latin typeface="Monospac821 BT" panose="020B0609020202020204" pitchFamily="49" charset="0"/>
-              </a:rPr>
-              <a:t>"&gt;</a:t>
-            </a:r>
-          </a:p>
-          <a:p>
-            <a:r>
-              <a:rPr lang="hu-HU" sz="1100" dirty="0">
-                <a:latin typeface="Monospac821 BT" panose="020B0609020202020204" pitchFamily="49" charset="0"/>
-              </a:rPr>
-              <a:t>                &lt;h5 </a:t>
-            </a:r>
-            <a:r>
-              <a:rPr lang="hu-HU" sz="1100" dirty="0" err="1">
-                <a:latin typeface="Monospac821 BT" panose="020B0609020202020204" pitchFamily="49" charset="0"/>
-              </a:rPr>
-              <a:t>class</a:t>
-            </a:r>
-            <a:r>
-              <a:rPr lang="hu-HU" sz="1100" dirty="0">
-                <a:latin typeface="Monospac821 BT" panose="020B0609020202020204" pitchFamily="49" charset="0"/>
-              </a:rPr>
-              <a:t>="</a:t>
-            </a:r>
-            <a:r>
-              <a:rPr lang="hu-HU" sz="1100" dirty="0" err="1">
-                <a:latin typeface="Monospac821 BT" panose="020B0609020202020204" pitchFamily="49" charset="0"/>
-              </a:rPr>
-              <a:t>card-title</a:t>
-            </a:r>
-            <a:r>
-              <a:rPr lang="hu-HU" sz="1100" dirty="0">
-                <a:latin typeface="Monospac821 BT" panose="020B0609020202020204" pitchFamily="49" charset="0"/>
-              </a:rPr>
-              <a:t> text-</a:t>
-            </a:r>
-            <a:r>
-              <a:rPr lang="hu-HU" sz="1100" dirty="0" err="1">
-                <a:latin typeface="Monospac821 BT" panose="020B0609020202020204" pitchFamily="49" charset="0"/>
-              </a:rPr>
-              <a:t>danger</a:t>
-            </a:r>
-            <a:r>
-              <a:rPr lang="hu-HU" sz="1100" dirty="0">
-                <a:latin typeface="Monospac821 BT" panose="020B0609020202020204" pitchFamily="49" charset="0"/>
-              </a:rPr>
-              <a:t> </a:t>
-            </a:r>
-            <a:r>
-              <a:rPr lang="hu-HU" sz="1100" dirty="0" err="1">
-                <a:latin typeface="Monospac821 BT" panose="020B0609020202020204" pitchFamily="49" charset="0"/>
-              </a:rPr>
-              <a:t>fw-bold</a:t>
-            </a:r>
-            <a:r>
-              <a:rPr lang="hu-HU" sz="1100" dirty="0">
-                <a:latin typeface="Monospac821 BT" panose="020B0609020202020204" pitchFamily="49" charset="0"/>
-              </a:rPr>
-              <a:t>"&gt;Sebessége: Átlag (1.0 - 3.0 m/s)&lt;/h5&gt;</a:t>
-            </a:r>
-          </a:p>
-          <a:p>
-            <a:r>
-              <a:rPr lang="hu-HU" sz="1100" dirty="0">
-                <a:latin typeface="Monospac821 BT" panose="020B0609020202020204" pitchFamily="49" charset="0"/>
-              </a:rPr>
-              <a:t>        </a:t>
-            </a:r>
-          </a:p>
-          <a:p>
-            <a:r>
-              <a:rPr lang="hu-HU" sz="1100" dirty="0">
-                <a:latin typeface="Monospac821 BT" panose="020B0609020202020204" pitchFamily="49" charset="0"/>
-              </a:rPr>
-              <a:t>                &lt;p </a:t>
-            </a:r>
-            <a:r>
-              <a:rPr lang="hu-HU" sz="1100" dirty="0" err="1">
-                <a:latin typeface="Monospac821 BT" panose="020B0609020202020204" pitchFamily="49" charset="0"/>
-              </a:rPr>
-              <a:t>class</a:t>
-            </a:r>
-            <a:r>
-              <a:rPr lang="hu-HU" sz="1100" dirty="0">
-                <a:latin typeface="Monospac821 BT" panose="020B0609020202020204" pitchFamily="49" charset="0"/>
-              </a:rPr>
-              <a:t>="</a:t>
-            </a:r>
-            <a:r>
-              <a:rPr lang="hu-HU" sz="1100" dirty="0" err="1">
-                <a:latin typeface="Monospac821 BT" panose="020B0609020202020204" pitchFamily="49" charset="0"/>
-              </a:rPr>
-              <a:t>card</a:t>
-            </a:r>
-            <a:r>
-              <a:rPr lang="hu-HU" sz="1100" dirty="0">
-                <a:latin typeface="Monospac821 BT" panose="020B0609020202020204" pitchFamily="49" charset="0"/>
-              </a:rPr>
-              <a:t>-text text-</a:t>
-            </a:r>
-            <a:r>
-              <a:rPr lang="hu-HU" sz="1100" dirty="0" err="1">
-                <a:latin typeface="Monospac821 BT" panose="020B0609020202020204" pitchFamily="49" charset="0"/>
-              </a:rPr>
-              <a:t>secondary</a:t>
-            </a:r>
-            <a:r>
-              <a:rPr lang="hu-HU" sz="1100" dirty="0">
-                <a:latin typeface="Monospac821 BT" panose="020B0609020202020204" pitchFamily="49" charset="0"/>
-              </a:rPr>
-              <a:t>"&gt;</a:t>
-            </a:r>
-          </a:p>
-          <a:p>
-            <a:r>
-              <a:rPr lang="hu-HU" sz="1100" dirty="0">
-                <a:latin typeface="Monospac821 BT" panose="020B0609020202020204" pitchFamily="49" charset="0"/>
-              </a:rPr>
-              <a:t>                    Nagyon lassú, amíg nem lát játékost, de látáskor rendkívül gyors. Ha elbújsz és megszakad a látótáv, azonnal lelassul.</a:t>
-            </a:r>
-          </a:p>
-          <a:p>
-            <a:r>
-              <a:rPr lang="hu-HU" sz="1100" dirty="0">
-                <a:latin typeface="Monospac821 BT" panose="020B0609020202020204" pitchFamily="49" charset="0"/>
-              </a:rPr>
-              <a:t>                &lt;/p&gt;</a:t>
-            </a:r>
-          </a:p>
-          <a:p>
-            <a:r>
-              <a:rPr lang="hu-HU" sz="1100" dirty="0">
-                <a:latin typeface="Monospac821 BT" panose="020B0609020202020204" pitchFamily="49" charset="0"/>
-              </a:rPr>
-              <a:t>        </a:t>
-            </a:r>
-          </a:p>
-          <a:p>
-            <a:r>
-              <a:rPr lang="hu-HU" sz="1100" dirty="0">
-                <a:latin typeface="Monospac821 BT" panose="020B0609020202020204" pitchFamily="49" charset="0"/>
-              </a:rPr>
-              <a:t>                &lt;div </a:t>
-            </a:r>
-            <a:r>
-              <a:rPr lang="hu-HU" sz="1100" dirty="0" err="1">
-                <a:latin typeface="Monospac821 BT" panose="020B0609020202020204" pitchFamily="49" charset="0"/>
-              </a:rPr>
-              <a:t>class</a:t>
-            </a:r>
-            <a:r>
-              <a:rPr lang="hu-HU" sz="1100" dirty="0">
-                <a:latin typeface="Monospac821 BT" panose="020B0609020202020204" pitchFamily="49" charset="0"/>
-              </a:rPr>
-              <a:t>="mb-3 </a:t>
-            </a:r>
-            <a:r>
-              <a:rPr lang="hu-HU" sz="1100" dirty="0" err="1">
-                <a:latin typeface="Monospac821 BT" panose="020B0609020202020204" pitchFamily="49" charset="0"/>
-              </a:rPr>
-              <a:t>mt-auto</a:t>
-            </a:r>
-            <a:r>
-              <a:rPr lang="hu-HU" sz="1100" dirty="0">
-                <a:latin typeface="Monospac821 BT" panose="020B0609020202020204" pitchFamily="49" charset="0"/>
-              </a:rPr>
-              <a:t>"&gt;</a:t>
-            </a:r>
-          </a:p>
-          <a:p>
-            <a:r>
-              <a:rPr lang="hu-HU" sz="1100" dirty="0">
-                <a:latin typeface="Monospac821 BT" panose="020B0609020202020204" pitchFamily="49" charset="0"/>
-              </a:rPr>
-              <a:t>                    &lt;</a:t>
-            </a:r>
-            <a:r>
-              <a:rPr lang="hu-HU" sz="1100" dirty="0" err="1">
-                <a:latin typeface="Monospac821 BT" panose="020B0609020202020204" pitchFamily="49" charset="0"/>
-              </a:rPr>
-              <a:t>span</a:t>
-            </a:r>
-            <a:r>
-              <a:rPr lang="hu-HU" sz="1100" dirty="0">
-                <a:latin typeface="Monospac821 BT" panose="020B0609020202020204" pitchFamily="49" charset="0"/>
-              </a:rPr>
-              <a:t> </a:t>
-            </a:r>
-            <a:r>
-              <a:rPr lang="hu-HU" sz="1100" dirty="0" err="1">
-                <a:latin typeface="Monospac821 BT" panose="020B0609020202020204" pitchFamily="49" charset="0"/>
-              </a:rPr>
-              <a:t>class</a:t>
-            </a:r>
-            <a:r>
-              <a:rPr lang="hu-HU" sz="1100" dirty="0">
-                <a:latin typeface="Monospac821 BT" panose="020B0609020202020204" pitchFamily="49" charset="0"/>
-              </a:rPr>
-              <a:t>="</a:t>
-            </a:r>
-            <a:r>
-              <a:rPr lang="hu-HU" sz="1100" dirty="0" err="1">
-                <a:latin typeface="Monospac821 BT" panose="020B0609020202020204" pitchFamily="49" charset="0"/>
-              </a:rPr>
-              <a:t>badge</a:t>
-            </a:r>
-            <a:r>
-              <a:rPr lang="hu-HU" sz="1100" dirty="0">
-                <a:latin typeface="Monospac821 BT" panose="020B0609020202020204" pitchFamily="49" charset="0"/>
-              </a:rPr>
-              <a:t> </a:t>
-            </a:r>
-            <a:r>
-              <a:rPr lang="hu-HU" sz="1100" dirty="0" err="1">
-                <a:latin typeface="Monospac821 BT" panose="020B0609020202020204" pitchFamily="49" charset="0"/>
-              </a:rPr>
-              <a:t>emf</a:t>
-            </a:r>
-            <a:r>
-              <a:rPr lang="hu-HU" sz="1100" dirty="0">
-                <a:latin typeface="Monospac821 BT" panose="020B0609020202020204" pitchFamily="49" charset="0"/>
-              </a:rPr>
-              <a:t> text-</a:t>
-            </a:r>
-            <a:r>
-              <a:rPr lang="hu-HU" sz="1100" dirty="0" err="1">
-                <a:latin typeface="Monospac821 BT" panose="020B0609020202020204" pitchFamily="49" charset="0"/>
-              </a:rPr>
-              <a:t>dark</a:t>
-            </a:r>
-            <a:r>
-              <a:rPr lang="hu-HU" sz="1100" dirty="0">
-                <a:latin typeface="Monospac821 BT" panose="020B0609020202020204" pitchFamily="49" charset="0"/>
-              </a:rPr>
-              <a:t>"&gt;EMF 5&lt;/</a:t>
-            </a:r>
-            <a:r>
-              <a:rPr lang="hu-HU" sz="1100" dirty="0" err="1">
-                <a:latin typeface="Monospac821 BT" panose="020B0609020202020204" pitchFamily="49" charset="0"/>
-              </a:rPr>
-              <a:t>span</a:t>
-            </a:r>
-            <a:r>
-              <a:rPr lang="hu-HU" sz="1100" dirty="0">
-                <a:latin typeface="Monospac821 BT" panose="020B0609020202020204" pitchFamily="49" charset="0"/>
-              </a:rPr>
-              <a:t>&gt;</a:t>
-            </a:r>
-          </a:p>
-          <a:p>
-            <a:r>
-              <a:rPr lang="hu-HU" sz="1100" dirty="0">
-                <a:latin typeface="Monospac821 BT" panose="020B0609020202020204" pitchFamily="49" charset="0"/>
-              </a:rPr>
-              <a:t>                    &lt;</a:t>
-            </a:r>
-            <a:r>
-              <a:rPr lang="hu-HU" sz="1100" dirty="0" err="1">
-                <a:latin typeface="Monospac821 BT" panose="020B0609020202020204" pitchFamily="49" charset="0"/>
-              </a:rPr>
-              <a:t>span</a:t>
-            </a:r>
-            <a:r>
-              <a:rPr lang="hu-HU" sz="1100" dirty="0">
-                <a:latin typeface="Monospac821 BT" panose="020B0609020202020204" pitchFamily="49" charset="0"/>
-              </a:rPr>
-              <a:t> </a:t>
-            </a:r>
-            <a:r>
-              <a:rPr lang="hu-HU" sz="1100" dirty="0" err="1">
-                <a:latin typeface="Monospac821 BT" panose="020B0609020202020204" pitchFamily="49" charset="0"/>
-              </a:rPr>
-              <a:t>class</a:t>
-            </a:r>
-            <a:r>
-              <a:rPr lang="hu-HU" sz="1100" dirty="0">
-                <a:latin typeface="Monospac821 BT" panose="020B0609020202020204" pitchFamily="49" charset="0"/>
-              </a:rPr>
-              <a:t>="</a:t>
-            </a:r>
-            <a:r>
-              <a:rPr lang="hu-HU" sz="1100" dirty="0" err="1">
-                <a:latin typeface="Monospac821 BT" panose="020B0609020202020204" pitchFamily="49" charset="0"/>
-              </a:rPr>
-              <a:t>badge</a:t>
-            </a:r>
-            <a:r>
-              <a:rPr lang="hu-HU" sz="1100" dirty="0">
-                <a:latin typeface="Monospac821 BT" panose="020B0609020202020204" pitchFamily="49" charset="0"/>
-              </a:rPr>
-              <a:t> </a:t>
-            </a:r>
-            <a:r>
-              <a:rPr lang="hu-HU" sz="1100" dirty="0" err="1">
-                <a:latin typeface="Monospac821 BT" panose="020B0609020202020204" pitchFamily="49" charset="0"/>
-              </a:rPr>
-              <a:t>orb</a:t>
-            </a:r>
-            <a:r>
-              <a:rPr lang="hu-HU" sz="1100" dirty="0">
-                <a:latin typeface="Monospac821 BT" panose="020B0609020202020204" pitchFamily="49" charset="0"/>
-              </a:rPr>
-              <a:t> text-</a:t>
-            </a:r>
-            <a:r>
-              <a:rPr lang="hu-HU" sz="1100" dirty="0" err="1">
-                <a:latin typeface="Monospac821 BT" panose="020B0609020202020204" pitchFamily="49" charset="0"/>
-              </a:rPr>
-              <a:t>dark</a:t>
-            </a:r>
-            <a:r>
-              <a:rPr lang="hu-HU" sz="1100" dirty="0">
-                <a:latin typeface="Monospac821 BT" panose="020B0609020202020204" pitchFamily="49" charset="0"/>
-              </a:rPr>
-              <a:t>"&gt;</a:t>
-            </a:r>
-            <a:r>
-              <a:rPr lang="hu-HU" sz="1100" dirty="0" err="1">
-                <a:latin typeface="Monospac821 BT" panose="020B0609020202020204" pitchFamily="49" charset="0"/>
-              </a:rPr>
-              <a:t>Ghost</a:t>
-            </a:r>
-            <a:r>
-              <a:rPr lang="hu-HU" sz="1100" dirty="0">
-                <a:latin typeface="Monospac821 BT" panose="020B0609020202020204" pitchFamily="49" charset="0"/>
-              </a:rPr>
-              <a:t> </a:t>
-            </a:r>
-            <a:r>
-              <a:rPr lang="hu-HU" sz="1100" dirty="0" err="1">
-                <a:latin typeface="Monospac821 BT" panose="020B0609020202020204" pitchFamily="49" charset="0"/>
-              </a:rPr>
-              <a:t>orb</a:t>
-            </a:r>
-            <a:r>
-              <a:rPr lang="hu-HU" sz="1100" dirty="0">
-                <a:latin typeface="Monospac821 BT" panose="020B0609020202020204" pitchFamily="49" charset="0"/>
-              </a:rPr>
-              <a:t> &lt;/</a:t>
-            </a:r>
-            <a:r>
-              <a:rPr lang="hu-HU" sz="1100" dirty="0" err="1">
-                <a:latin typeface="Monospac821 BT" panose="020B0609020202020204" pitchFamily="49" charset="0"/>
-              </a:rPr>
-              <a:t>span</a:t>
-            </a:r>
-            <a:r>
-              <a:rPr lang="hu-HU" sz="1100" dirty="0">
-                <a:latin typeface="Monospac821 BT" panose="020B0609020202020204" pitchFamily="49" charset="0"/>
-              </a:rPr>
-              <a:t>&gt;</a:t>
-            </a:r>
-          </a:p>
-          <a:p>
-            <a:r>
-              <a:rPr lang="hu-HU" sz="1100" dirty="0">
-                <a:latin typeface="Monospac821 BT" panose="020B0609020202020204" pitchFamily="49" charset="0"/>
-              </a:rPr>
-              <a:t>                    &lt;</a:t>
-            </a:r>
-            <a:r>
-              <a:rPr lang="hu-HU" sz="1100" dirty="0" err="1">
-                <a:latin typeface="Monospac821 BT" panose="020B0609020202020204" pitchFamily="49" charset="0"/>
-              </a:rPr>
-              <a:t>span</a:t>
-            </a:r>
-            <a:r>
-              <a:rPr lang="hu-HU" sz="1100" dirty="0">
-                <a:latin typeface="Monospac821 BT" panose="020B0609020202020204" pitchFamily="49" charset="0"/>
-              </a:rPr>
-              <a:t> </a:t>
-            </a:r>
-            <a:r>
-              <a:rPr lang="hu-HU" sz="1100" dirty="0" err="1">
-                <a:latin typeface="Monospac821 BT" panose="020B0609020202020204" pitchFamily="49" charset="0"/>
-              </a:rPr>
-              <a:t>class</a:t>
-            </a:r>
-            <a:r>
-              <a:rPr lang="hu-HU" sz="1100" dirty="0">
-                <a:latin typeface="Monospac821 BT" panose="020B0609020202020204" pitchFamily="49" charset="0"/>
-              </a:rPr>
-              <a:t>="</a:t>
-            </a:r>
-            <a:r>
-              <a:rPr lang="hu-HU" sz="1100" dirty="0" err="1">
-                <a:latin typeface="Monospac821 BT" panose="020B0609020202020204" pitchFamily="49" charset="0"/>
-              </a:rPr>
-              <a:t>badge</a:t>
-            </a:r>
-            <a:r>
-              <a:rPr lang="hu-HU" sz="1100" dirty="0">
-                <a:latin typeface="Monospac821 BT" panose="020B0609020202020204" pitchFamily="49" charset="0"/>
-              </a:rPr>
-              <a:t> </a:t>
-            </a:r>
-            <a:r>
-              <a:rPr lang="hu-HU" sz="1100" dirty="0" err="1">
-                <a:latin typeface="Monospac821 BT" panose="020B0609020202020204" pitchFamily="49" charset="0"/>
-              </a:rPr>
-              <a:t>spirit_box</a:t>
-            </a:r>
-            <a:r>
-              <a:rPr lang="hu-HU" sz="1100" dirty="0">
-                <a:latin typeface="Monospac821 BT" panose="020B0609020202020204" pitchFamily="49" charset="0"/>
-              </a:rPr>
-              <a:t> text-</a:t>
-            </a:r>
-            <a:r>
-              <a:rPr lang="hu-HU" sz="1100" dirty="0" err="1">
-                <a:latin typeface="Monospac821 BT" panose="020B0609020202020204" pitchFamily="49" charset="0"/>
-              </a:rPr>
-              <a:t>dark</a:t>
-            </a:r>
-            <a:r>
-              <a:rPr lang="hu-HU" sz="1100" dirty="0">
-                <a:latin typeface="Monospac821 BT" panose="020B0609020202020204" pitchFamily="49" charset="0"/>
-              </a:rPr>
-              <a:t>"&gt;</a:t>
-            </a:r>
-            <a:r>
-              <a:rPr lang="hu-HU" sz="1100" dirty="0" err="1">
-                <a:latin typeface="Monospac821 BT" panose="020B0609020202020204" pitchFamily="49" charset="0"/>
-              </a:rPr>
-              <a:t>Spirit</a:t>
-            </a:r>
-            <a:r>
-              <a:rPr lang="hu-HU" sz="1100" dirty="0">
-                <a:latin typeface="Monospac821 BT" panose="020B0609020202020204" pitchFamily="49" charset="0"/>
-              </a:rPr>
-              <a:t> </a:t>
-            </a:r>
-            <a:r>
-              <a:rPr lang="hu-HU" sz="1100" dirty="0" err="1">
-                <a:latin typeface="Monospac821 BT" panose="020B0609020202020204" pitchFamily="49" charset="0"/>
-              </a:rPr>
-              <a:t>Box</a:t>
-            </a:r>
-            <a:r>
-              <a:rPr lang="hu-HU" sz="1100" dirty="0">
-                <a:latin typeface="Monospac821 BT" panose="020B0609020202020204" pitchFamily="49" charset="0"/>
-              </a:rPr>
-              <a:t>&lt;/</a:t>
-            </a:r>
-            <a:r>
-              <a:rPr lang="hu-HU" sz="1100" dirty="0" err="1">
-                <a:latin typeface="Monospac821 BT" panose="020B0609020202020204" pitchFamily="49" charset="0"/>
-              </a:rPr>
-              <a:t>span</a:t>
-            </a:r>
-            <a:r>
-              <a:rPr lang="hu-HU" sz="1100" dirty="0">
-                <a:latin typeface="Monospac821 BT" panose="020B0609020202020204" pitchFamily="49" charset="0"/>
-              </a:rPr>
-              <a:t>&gt;</a:t>
-            </a:r>
-          </a:p>
-          <a:p>
-            <a:r>
-              <a:rPr lang="hu-HU" sz="1100" dirty="0">
-                <a:latin typeface="Monospac821 BT" panose="020B0609020202020204" pitchFamily="49" charset="0"/>
-              </a:rPr>
-              <a:t>                &lt;/div&gt;</a:t>
-            </a:r>
-          </a:p>
-          <a:p>
-            <a:r>
-              <a:rPr lang="hu-HU" sz="1100" dirty="0">
-                <a:latin typeface="Monospac821 BT" panose="020B0609020202020204" pitchFamily="49" charset="0"/>
-              </a:rPr>
-              <a:t>            &lt;/div&gt;</a:t>
-            </a:r>
-          </a:p>
-          <a:p>
-            <a:r>
-              <a:rPr lang="hu-HU" sz="1100" dirty="0">
-                <a:latin typeface="Monospac821 BT" panose="020B0609020202020204" pitchFamily="49" charset="0"/>
-              </a:rPr>
-              <a:t>        &lt;/div&gt;</a:t>
-            </a:r>
-          </a:p>
-          <a:p>
-            <a:r>
-              <a:rPr lang="hu-HU" sz="1100" dirty="0">
-                <a:latin typeface="Monospac821 BT" panose="020B0609020202020204" pitchFamily="49" charset="0"/>
-              </a:rPr>
-              <a:t>    &lt;/div&gt;</a:t>
-            </a:r>
-          </a:p>
-        </p:txBody>
-      </p:sp>
-      <p:sp>
-        <p:nvSpPr>
           <p:cNvPr id="8" name="Szövegdoboz 7">
             <a:extLst>
               <a:ext uri="{FF2B5EF4-FFF2-40B4-BE49-F238E27FC236}">
@@ -8581,6 +6901,36 @@
           </a:p>
         </p:txBody>
       </p:sp>
+      <p:pic>
+        <p:nvPicPr>
+          <p:cNvPr id="5" name="Kép 4">
+            <a:extLst>
+              <a:ext uri="{FF2B5EF4-FFF2-40B4-BE49-F238E27FC236}">
+                <a16:creationId xmlns:a16="http://schemas.microsoft.com/office/drawing/2014/main" id="{6F9324E7-C3BF-4357-9CF7-42604C6402F6}"/>
+              </a:ext>
+            </a:extLst>
+          </p:cNvPr>
+          <p:cNvPicPr>
+            <a:picLocks noChangeAspect="1"/>
+          </p:cNvPicPr>
+          <p:nvPr/>
+        </p:nvPicPr>
+        <p:blipFill>
+          <a:blip r:embed="rId2"/>
+          <a:stretch>
+            <a:fillRect/>
+          </a:stretch>
+        </p:blipFill>
+        <p:spPr>
+          <a:xfrm>
+            <a:off x="4274826" y="1242874"/>
+            <a:ext cx="7502007" cy="3245650"/>
+          </a:xfrm>
+          <a:prstGeom prst="rect">
+            <a:avLst/>
+          </a:prstGeom>
+        </p:spPr>
+      </p:pic>
     </p:spTree>
     <p:extLst>
       <p:ext uri="{BB962C8B-B14F-4D97-AF65-F5344CB8AC3E}">
@@ -9439,1066 +7789,6 @@
       </p:sp>
       <p:sp>
         <p:nvSpPr>
-          <p:cNvPr id="8" name="Szövegdoboz 7">
-            <a:extLst>
-              <a:ext uri="{FF2B5EF4-FFF2-40B4-BE49-F238E27FC236}">
-                <a16:creationId xmlns:a16="http://schemas.microsoft.com/office/drawing/2014/main" id="{AC0D1428-A006-4BB2-8484-4E5209DEE31C}"/>
-              </a:ext>
-            </a:extLst>
-          </p:cNvPr>
-          <p:cNvSpPr txBox="1"/>
-          <p:nvPr/>
-        </p:nvSpPr>
-        <p:spPr>
-          <a:xfrm>
-            <a:off x="585926" y="2613607"/>
-            <a:ext cx="9499108" cy="2492990"/>
-          </a:xfrm>
-          <a:prstGeom prst="rect">
-            <a:avLst/>
-          </a:prstGeom>
-          <a:noFill/>
-        </p:spPr>
-        <p:txBody>
-          <a:bodyPr wrap="square" rtlCol="0">
-            <a:spAutoFit/>
-          </a:bodyPr>
-          <a:lstStyle/>
-          <a:p>
-            <a:r>
-              <a:rPr lang="hu-HU" sz="1200" dirty="0">
-                <a:latin typeface="Monospac821 BT" panose="020B0609020202020204" pitchFamily="49" charset="0"/>
-              </a:rPr>
-              <a:t>&lt;div </a:t>
-            </a:r>
-            <a:r>
-              <a:rPr lang="hu-HU" sz="1200" dirty="0" err="1">
-                <a:latin typeface="Monospac821 BT" panose="020B0609020202020204" pitchFamily="49" charset="0"/>
-              </a:rPr>
-              <a:t>class</a:t>
-            </a:r>
-            <a:r>
-              <a:rPr lang="hu-HU" sz="1200" dirty="0">
-                <a:latin typeface="Monospac821 BT" panose="020B0609020202020204" pitchFamily="49" charset="0"/>
-              </a:rPr>
-              <a:t>="mb-4 text-center"&gt;</a:t>
-            </a:r>
-          </a:p>
-          <a:p>
-            <a:endParaRPr lang="hu-HU" sz="1200" dirty="0">
-              <a:latin typeface="Monospac821 BT" panose="020B0609020202020204" pitchFamily="49" charset="0"/>
-            </a:endParaRPr>
-          </a:p>
-          <a:p>
-            <a:r>
-              <a:rPr lang="hu-HU" sz="1200" dirty="0">
-                <a:latin typeface="Monospac821 BT" panose="020B0609020202020204" pitchFamily="49" charset="0"/>
-              </a:rPr>
-              <a:t>    &lt;</a:t>
-            </a:r>
-            <a:r>
-              <a:rPr lang="hu-HU" sz="1200" dirty="0" err="1">
-                <a:latin typeface="Monospac821 BT" panose="020B0609020202020204" pitchFamily="49" charset="0"/>
-              </a:rPr>
-              <a:t>button</a:t>
-            </a:r>
-            <a:r>
-              <a:rPr lang="hu-HU" sz="1200" dirty="0">
-                <a:latin typeface="Monospac821 BT" panose="020B0609020202020204" pitchFamily="49" charset="0"/>
-              </a:rPr>
-              <a:t> </a:t>
-            </a:r>
-            <a:r>
-              <a:rPr lang="hu-HU" sz="1200" dirty="0" err="1">
-                <a:latin typeface="Monospac821 BT" panose="020B0609020202020204" pitchFamily="49" charset="0"/>
-              </a:rPr>
-              <a:t>class</a:t>
-            </a:r>
-            <a:r>
-              <a:rPr lang="hu-HU" sz="1200" dirty="0">
-                <a:latin typeface="Monospac821 BT" panose="020B0609020202020204" pitchFamily="49" charset="0"/>
-              </a:rPr>
-              <a:t>="</a:t>
-            </a:r>
-            <a:r>
-              <a:rPr lang="hu-HU" sz="1200" dirty="0" err="1">
-                <a:latin typeface="Monospac821 BT" panose="020B0609020202020204" pitchFamily="49" charset="0"/>
-              </a:rPr>
-              <a:t>btn</a:t>
-            </a:r>
-            <a:r>
-              <a:rPr lang="hu-HU" sz="1200" dirty="0">
-                <a:latin typeface="Monospac821 BT" panose="020B0609020202020204" pitchFamily="49" charset="0"/>
-              </a:rPr>
-              <a:t> </a:t>
-            </a:r>
-            <a:r>
-              <a:rPr lang="hu-HU" sz="1200" dirty="0" err="1">
-                <a:latin typeface="Monospac821 BT" panose="020B0609020202020204" pitchFamily="49" charset="0"/>
-              </a:rPr>
-              <a:t>btn</a:t>
-            </a:r>
-            <a:r>
-              <a:rPr lang="hu-HU" sz="1200" dirty="0">
-                <a:latin typeface="Monospac821 BT" panose="020B0609020202020204" pitchFamily="49" charset="0"/>
-              </a:rPr>
-              <a:t>-outline-</a:t>
-            </a:r>
-            <a:r>
-              <a:rPr lang="hu-HU" sz="1200" dirty="0" err="1">
-                <a:latin typeface="Monospac821 BT" panose="020B0609020202020204" pitchFamily="49" charset="0"/>
-              </a:rPr>
-              <a:t>danger</a:t>
-            </a:r>
-            <a:r>
-              <a:rPr lang="hu-HU" sz="1200" dirty="0">
-                <a:latin typeface="Monospac821 BT" panose="020B0609020202020204" pitchFamily="49" charset="0"/>
-              </a:rPr>
-              <a:t> filter-</a:t>
-            </a:r>
-            <a:r>
-              <a:rPr lang="hu-HU" sz="1200" dirty="0" err="1">
-                <a:latin typeface="Monospac821 BT" panose="020B0609020202020204" pitchFamily="49" charset="0"/>
-              </a:rPr>
-              <a:t>btn</a:t>
-            </a:r>
-            <a:r>
-              <a:rPr lang="hu-HU" sz="1200" dirty="0">
-                <a:latin typeface="Monospac821 BT" panose="020B0609020202020204" pitchFamily="49" charset="0"/>
-              </a:rPr>
-              <a:t>" </a:t>
-            </a:r>
-            <a:r>
-              <a:rPr lang="hu-HU" sz="1200" dirty="0" err="1">
-                <a:latin typeface="Monospac821 BT" panose="020B0609020202020204" pitchFamily="49" charset="0"/>
-              </a:rPr>
-              <a:t>data</a:t>
-            </a:r>
-            <a:r>
-              <a:rPr lang="hu-HU" sz="1200" dirty="0">
-                <a:latin typeface="Monospac821 BT" panose="020B0609020202020204" pitchFamily="49" charset="0"/>
-              </a:rPr>
-              <a:t>-filter="</a:t>
-            </a:r>
-            <a:r>
-              <a:rPr lang="hu-HU" sz="1200" dirty="0" err="1">
-                <a:latin typeface="Monospac821 BT" panose="020B0609020202020204" pitchFamily="49" charset="0"/>
-              </a:rPr>
-              <a:t>emf</a:t>
-            </a:r>
-            <a:r>
-              <a:rPr lang="hu-HU" sz="1200" dirty="0">
-                <a:latin typeface="Monospac821 BT" panose="020B0609020202020204" pitchFamily="49" charset="0"/>
-              </a:rPr>
-              <a:t>"&gt;EMF 5&lt;/</a:t>
-            </a:r>
-            <a:r>
-              <a:rPr lang="hu-HU" sz="1200" dirty="0" err="1">
-                <a:latin typeface="Monospac821 BT" panose="020B0609020202020204" pitchFamily="49" charset="0"/>
-              </a:rPr>
-              <a:t>button</a:t>
-            </a:r>
-            <a:r>
-              <a:rPr lang="hu-HU" sz="1200" dirty="0">
-                <a:latin typeface="Monospac821 BT" panose="020B0609020202020204" pitchFamily="49" charset="0"/>
-              </a:rPr>
-              <a:t>&gt;</a:t>
-            </a:r>
-          </a:p>
-          <a:p>
-            <a:r>
-              <a:rPr lang="hu-HU" sz="1200" dirty="0">
-                <a:latin typeface="Monospac821 BT" panose="020B0609020202020204" pitchFamily="49" charset="0"/>
-              </a:rPr>
-              <a:t>    &lt;</a:t>
-            </a:r>
-            <a:r>
-              <a:rPr lang="hu-HU" sz="1200" dirty="0" err="1">
-                <a:latin typeface="Monospac821 BT" panose="020B0609020202020204" pitchFamily="49" charset="0"/>
-              </a:rPr>
-              <a:t>button</a:t>
-            </a:r>
-            <a:r>
-              <a:rPr lang="hu-HU" sz="1200" dirty="0">
-                <a:latin typeface="Monospac821 BT" panose="020B0609020202020204" pitchFamily="49" charset="0"/>
-              </a:rPr>
-              <a:t> </a:t>
-            </a:r>
-            <a:r>
-              <a:rPr lang="hu-HU" sz="1200" dirty="0" err="1">
-                <a:latin typeface="Monospac821 BT" panose="020B0609020202020204" pitchFamily="49" charset="0"/>
-              </a:rPr>
-              <a:t>class</a:t>
-            </a:r>
-            <a:r>
-              <a:rPr lang="hu-HU" sz="1200" dirty="0">
-                <a:latin typeface="Monospac821 BT" panose="020B0609020202020204" pitchFamily="49" charset="0"/>
-              </a:rPr>
-              <a:t>="</a:t>
-            </a:r>
-            <a:r>
-              <a:rPr lang="hu-HU" sz="1200" dirty="0" err="1">
-                <a:latin typeface="Monospac821 BT" panose="020B0609020202020204" pitchFamily="49" charset="0"/>
-              </a:rPr>
-              <a:t>btn</a:t>
-            </a:r>
-            <a:r>
-              <a:rPr lang="hu-HU" sz="1200" dirty="0">
-                <a:latin typeface="Monospac821 BT" panose="020B0609020202020204" pitchFamily="49" charset="0"/>
-              </a:rPr>
-              <a:t> </a:t>
-            </a:r>
-            <a:r>
-              <a:rPr lang="hu-HU" sz="1200" dirty="0" err="1">
-                <a:latin typeface="Monospac821 BT" panose="020B0609020202020204" pitchFamily="49" charset="0"/>
-              </a:rPr>
-              <a:t>btn</a:t>
-            </a:r>
-            <a:r>
-              <a:rPr lang="hu-HU" sz="1200" dirty="0">
-                <a:latin typeface="Monospac821 BT" panose="020B0609020202020204" pitchFamily="49" charset="0"/>
-              </a:rPr>
-              <a:t>-outline-</a:t>
-            </a:r>
-            <a:r>
-              <a:rPr lang="hu-HU" sz="1200" dirty="0" err="1">
-                <a:latin typeface="Monospac821 BT" panose="020B0609020202020204" pitchFamily="49" charset="0"/>
-              </a:rPr>
-              <a:t>danger</a:t>
-            </a:r>
-            <a:r>
-              <a:rPr lang="hu-HU" sz="1200" dirty="0">
-                <a:latin typeface="Monospac821 BT" panose="020B0609020202020204" pitchFamily="49" charset="0"/>
-              </a:rPr>
-              <a:t> filter-</a:t>
-            </a:r>
-            <a:r>
-              <a:rPr lang="hu-HU" sz="1200" dirty="0" err="1">
-                <a:latin typeface="Monospac821 BT" panose="020B0609020202020204" pitchFamily="49" charset="0"/>
-              </a:rPr>
-              <a:t>btn</a:t>
-            </a:r>
-            <a:r>
-              <a:rPr lang="hu-HU" sz="1200" dirty="0">
-                <a:latin typeface="Monospac821 BT" panose="020B0609020202020204" pitchFamily="49" charset="0"/>
-              </a:rPr>
-              <a:t>" </a:t>
-            </a:r>
-            <a:r>
-              <a:rPr lang="hu-HU" sz="1200" dirty="0" err="1">
-                <a:latin typeface="Monospac821 BT" panose="020B0609020202020204" pitchFamily="49" charset="0"/>
-              </a:rPr>
-              <a:t>data</a:t>
-            </a:r>
-            <a:r>
-              <a:rPr lang="hu-HU" sz="1200" dirty="0">
-                <a:latin typeface="Monospac821 BT" panose="020B0609020202020204" pitchFamily="49" charset="0"/>
-              </a:rPr>
-              <a:t>-filter="</a:t>
-            </a:r>
-            <a:r>
-              <a:rPr lang="hu-HU" sz="1200" dirty="0" err="1">
-                <a:latin typeface="Monospac821 BT" panose="020B0609020202020204" pitchFamily="49" charset="0"/>
-              </a:rPr>
-              <a:t>ultraviolet</a:t>
-            </a:r>
-            <a:r>
-              <a:rPr lang="hu-HU" sz="1200" dirty="0">
-                <a:latin typeface="Monospac821 BT" panose="020B0609020202020204" pitchFamily="49" charset="0"/>
-              </a:rPr>
-              <a:t>"&gt;</a:t>
-            </a:r>
-            <a:r>
-              <a:rPr lang="hu-HU" sz="1200" dirty="0" err="1">
-                <a:latin typeface="Monospac821 BT" panose="020B0609020202020204" pitchFamily="49" charset="0"/>
-              </a:rPr>
-              <a:t>Ultraviolet</a:t>
-            </a:r>
-            <a:r>
-              <a:rPr lang="hu-HU" sz="1200" dirty="0">
-                <a:latin typeface="Monospac821 BT" panose="020B0609020202020204" pitchFamily="49" charset="0"/>
-              </a:rPr>
-              <a:t>&lt;/</a:t>
-            </a:r>
-            <a:r>
-              <a:rPr lang="hu-HU" sz="1200" dirty="0" err="1">
-                <a:latin typeface="Monospac821 BT" panose="020B0609020202020204" pitchFamily="49" charset="0"/>
-              </a:rPr>
-              <a:t>button</a:t>
-            </a:r>
-            <a:r>
-              <a:rPr lang="hu-HU" sz="1200" dirty="0">
-                <a:latin typeface="Monospac821 BT" panose="020B0609020202020204" pitchFamily="49" charset="0"/>
-              </a:rPr>
-              <a:t>&gt;</a:t>
-            </a:r>
-          </a:p>
-          <a:p>
-            <a:r>
-              <a:rPr lang="hu-HU" sz="1200" dirty="0">
-                <a:latin typeface="Monospac821 BT" panose="020B0609020202020204" pitchFamily="49" charset="0"/>
-              </a:rPr>
-              <a:t>    &lt;</a:t>
-            </a:r>
-            <a:r>
-              <a:rPr lang="hu-HU" sz="1200" dirty="0" err="1">
-                <a:latin typeface="Monospac821 BT" panose="020B0609020202020204" pitchFamily="49" charset="0"/>
-              </a:rPr>
-              <a:t>button</a:t>
-            </a:r>
-            <a:r>
-              <a:rPr lang="hu-HU" sz="1200" dirty="0">
-                <a:latin typeface="Monospac821 BT" panose="020B0609020202020204" pitchFamily="49" charset="0"/>
-              </a:rPr>
-              <a:t> </a:t>
-            </a:r>
-            <a:r>
-              <a:rPr lang="hu-HU" sz="1200" dirty="0" err="1">
-                <a:latin typeface="Monospac821 BT" panose="020B0609020202020204" pitchFamily="49" charset="0"/>
-              </a:rPr>
-              <a:t>class</a:t>
-            </a:r>
-            <a:r>
-              <a:rPr lang="hu-HU" sz="1200" dirty="0">
-                <a:latin typeface="Monospac821 BT" panose="020B0609020202020204" pitchFamily="49" charset="0"/>
-              </a:rPr>
-              <a:t>="</a:t>
-            </a:r>
-            <a:r>
-              <a:rPr lang="hu-HU" sz="1200" dirty="0" err="1">
-                <a:latin typeface="Monospac821 BT" panose="020B0609020202020204" pitchFamily="49" charset="0"/>
-              </a:rPr>
-              <a:t>btn</a:t>
-            </a:r>
-            <a:r>
-              <a:rPr lang="hu-HU" sz="1200" dirty="0">
-                <a:latin typeface="Monospac821 BT" panose="020B0609020202020204" pitchFamily="49" charset="0"/>
-              </a:rPr>
-              <a:t> </a:t>
-            </a:r>
-            <a:r>
-              <a:rPr lang="hu-HU" sz="1200" dirty="0" err="1">
-                <a:latin typeface="Monospac821 BT" panose="020B0609020202020204" pitchFamily="49" charset="0"/>
-              </a:rPr>
-              <a:t>btn</a:t>
-            </a:r>
-            <a:r>
-              <a:rPr lang="hu-HU" sz="1200" dirty="0">
-                <a:latin typeface="Monospac821 BT" panose="020B0609020202020204" pitchFamily="49" charset="0"/>
-              </a:rPr>
-              <a:t>-outline-</a:t>
-            </a:r>
-            <a:r>
-              <a:rPr lang="hu-HU" sz="1200" dirty="0" err="1">
-                <a:latin typeface="Monospac821 BT" panose="020B0609020202020204" pitchFamily="49" charset="0"/>
-              </a:rPr>
-              <a:t>danger</a:t>
-            </a:r>
-            <a:r>
-              <a:rPr lang="hu-HU" sz="1200" dirty="0">
-                <a:latin typeface="Monospac821 BT" panose="020B0609020202020204" pitchFamily="49" charset="0"/>
-              </a:rPr>
-              <a:t> filter-</a:t>
-            </a:r>
-            <a:r>
-              <a:rPr lang="hu-HU" sz="1200" dirty="0" err="1">
-                <a:latin typeface="Monospac821 BT" panose="020B0609020202020204" pitchFamily="49" charset="0"/>
-              </a:rPr>
-              <a:t>btn</a:t>
-            </a:r>
-            <a:r>
-              <a:rPr lang="hu-HU" sz="1200" dirty="0">
-                <a:latin typeface="Monospac821 BT" panose="020B0609020202020204" pitchFamily="49" charset="0"/>
-              </a:rPr>
-              <a:t>" </a:t>
-            </a:r>
-            <a:r>
-              <a:rPr lang="hu-HU" sz="1200" dirty="0" err="1">
-                <a:latin typeface="Monospac821 BT" panose="020B0609020202020204" pitchFamily="49" charset="0"/>
-              </a:rPr>
-              <a:t>data</a:t>
-            </a:r>
-            <a:r>
-              <a:rPr lang="hu-HU" sz="1200" dirty="0">
-                <a:latin typeface="Monospac821 BT" panose="020B0609020202020204" pitchFamily="49" charset="0"/>
-              </a:rPr>
-              <a:t>-filter="</a:t>
-            </a:r>
-            <a:r>
-              <a:rPr lang="hu-HU" sz="1200" dirty="0" err="1">
-                <a:latin typeface="Monospac821 BT" panose="020B0609020202020204" pitchFamily="49" charset="0"/>
-              </a:rPr>
-              <a:t>spirit_box</a:t>
-            </a:r>
-            <a:r>
-              <a:rPr lang="hu-HU" sz="1200" dirty="0">
-                <a:latin typeface="Monospac821 BT" panose="020B0609020202020204" pitchFamily="49" charset="0"/>
-              </a:rPr>
-              <a:t>"&gt;</a:t>
-            </a:r>
-            <a:r>
-              <a:rPr lang="hu-HU" sz="1200" dirty="0" err="1">
-                <a:latin typeface="Monospac821 BT" panose="020B0609020202020204" pitchFamily="49" charset="0"/>
-              </a:rPr>
-              <a:t>Spirit</a:t>
-            </a:r>
-            <a:r>
-              <a:rPr lang="hu-HU" sz="1200" dirty="0">
-                <a:latin typeface="Monospac821 BT" panose="020B0609020202020204" pitchFamily="49" charset="0"/>
-              </a:rPr>
-              <a:t> </a:t>
-            </a:r>
-            <a:r>
-              <a:rPr lang="hu-HU" sz="1200" dirty="0" err="1">
-                <a:latin typeface="Monospac821 BT" panose="020B0609020202020204" pitchFamily="49" charset="0"/>
-              </a:rPr>
-              <a:t>Box</a:t>
-            </a:r>
-            <a:r>
-              <a:rPr lang="hu-HU" sz="1200" dirty="0">
-                <a:latin typeface="Monospac821 BT" panose="020B0609020202020204" pitchFamily="49" charset="0"/>
-              </a:rPr>
-              <a:t>&lt;/</a:t>
-            </a:r>
-            <a:r>
-              <a:rPr lang="hu-HU" sz="1200" dirty="0" err="1">
-                <a:latin typeface="Monospac821 BT" panose="020B0609020202020204" pitchFamily="49" charset="0"/>
-              </a:rPr>
-              <a:t>button</a:t>
-            </a:r>
-            <a:r>
-              <a:rPr lang="hu-HU" sz="1200" dirty="0">
-                <a:latin typeface="Monospac821 BT" panose="020B0609020202020204" pitchFamily="49" charset="0"/>
-              </a:rPr>
-              <a:t>&gt;</a:t>
-            </a:r>
-          </a:p>
-          <a:p>
-            <a:r>
-              <a:rPr lang="hu-HU" sz="1200" dirty="0">
-                <a:latin typeface="Monospac821 BT" panose="020B0609020202020204" pitchFamily="49" charset="0"/>
-              </a:rPr>
-              <a:t>    &lt;</a:t>
-            </a:r>
-            <a:r>
-              <a:rPr lang="hu-HU" sz="1200" dirty="0" err="1">
-                <a:latin typeface="Monospac821 BT" panose="020B0609020202020204" pitchFamily="49" charset="0"/>
-              </a:rPr>
-              <a:t>button</a:t>
-            </a:r>
-            <a:r>
-              <a:rPr lang="hu-HU" sz="1200" dirty="0">
-                <a:latin typeface="Monospac821 BT" panose="020B0609020202020204" pitchFamily="49" charset="0"/>
-              </a:rPr>
-              <a:t> </a:t>
-            </a:r>
-            <a:r>
-              <a:rPr lang="hu-HU" sz="1200" dirty="0" err="1">
-                <a:latin typeface="Monospac821 BT" panose="020B0609020202020204" pitchFamily="49" charset="0"/>
-              </a:rPr>
-              <a:t>class</a:t>
-            </a:r>
-            <a:r>
-              <a:rPr lang="hu-HU" sz="1200" dirty="0">
-                <a:latin typeface="Monospac821 BT" panose="020B0609020202020204" pitchFamily="49" charset="0"/>
-              </a:rPr>
-              <a:t>="</a:t>
-            </a:r>
-            <a:r>
-              <a:rPr lang="hu-HU" sz="1200" dirty="0" err="1">
-                <a:latin typeface="Monospac821 BT" panose="020B0609020202020204" pitchFamily="49" charset="0"/>
-              </a:rPr>
-              <a:t>btn</a:t>
-            </a:r>
-            <a:r>
-              <a:rPr lang="hu-HU" sz="1200" dirty="0">
-                <a:latin typeface="Monospac821 BT" panose="020B0609020202020204" pitchFamily="49" charset="0"/>
-              </a:rPr>
-              <a:t> </a:t>
-            </a:r>
-            <a:r>
-              <a:rPr lang="hu-HU" sz="1200" dirty="0" err="1">
-                <a:latin typeface="Monospac821 BT" panose="020B0609020202020204" pitchFamily="49" charset="0"/>
-              </a:rPr>
-              <a:t>btn</a:t>
-            </a:r>
-            <a:r>
-              <a:rPr lang="hu-HU" sz="1200" dirty="0">
-                <a:latin typeface="Monospac821 BT" panose="020B0609020202020204" pitchFamily="49" charset="0"/>
-              </a:rPr>
-              <a:t>-outline-</a:t>
-            </a:r>
-            <a:r>
-              <a:rPr lang="hu-HU" sz="1200" dirty="0" err="1">
-                <a:latin typeface="Monospac821 BT" panose="020B0609020202020204" pitchFamily="49" charset="0"/>
-              </a:rPr>
-              <a:t>danger</a:t>
-            </a:r>
-            <a:r>
-              <a:rPr lang="hu-HU" sz="1200" dirty="0">
-                <a:latin typeface="Monospac821 BT" panose="020B0609020202020204" pitchFamily="49" charset="0"/>
-              </a:rPr>
-              <a:t> filter-</a:t>
-            </a:r>
-            <a:r>
-              <a:rPr lang="hu-HU" sz="1200" dirty="0" err="1">
-                <a:latin typeface="Monospac821 BT" panose="020B0609020202020204" pitchFamily="49" charset="0"/>
-              </a:rPr>
-              <a:t>btn</a:t>
-            </a:r>
-            <a:r>
-              <a:rPr lang="hu-HU" sz="1200" dirty="0">
-                <a:latin typeface="Monospac821 BT" panose="020B0609020202020204" pitchFamily="49" charset="0"/>
-              </a:rPr>
-              <a:t>" </a:t>
-            </a:r>
-            <a:r>
-              <a:rPr lang="hu-HU" sz="1200" dirty="0" err="1">
-                <a:latin typeface="Monospac821 BT" panose="020B0609020202020204" pitchFamily="49" charset="0"/>
-              </a:rPr>
-              <a:t>data</a:t>
-            </a:r>
-            <a:r>
-              <a:rPr lang="hu-HU" sz="1200" dirty="0">
-                <a:latin typeface="Monospac821 BT" panose="020B0609020202020204" pitchFamily="49" charset="0"/>
-              </a:rPr>
-              <a:t>-filter="</a:t>
-            </a:r>
-            <a:r>
-              <a:rPr lang="hu-HU" sz="1200" dirty="0" err="1">
-                <a:latin typeface="Monospac821 BT" panose="020B0609020202020204" pitchFamily="49" charset="0"/>
-              </a:rPr>
-              <a:t>freezing</a:t>
-            </a:r>
-            <a:r>
-              <a:rPr lang="hu-HU" sz="1200" dirty="0">
-                <a:latin typeface="Monospac821 BT" panose="020B0609020202020204" pitchFamily="49" charset="0"/>
-              </a:rPr>
-              <a:t>"&gt;</a:t>
-            </a:r>
-            <a:r>
-              <a:rPr lang="hu-HU" sz="1200" dirty="0" err="1">
-                <a:latin typeface="Monospac821 BT" panose="020B0609020202020204" pitchFamily="49" charset="0"/>
-              </a:rPr>
-              <a:t>Freezing</a:t>
-            </a:r>
-            <a:r>
-              <a:rPr lang="hu-HU" sz="1200" dirty="0">
-                <a:latin typeface="Monospac821 BT" panose="020B0609020202020204" pitchFamily="49" charset="0"/>
-              </a:rPr>
-              <a:t>&lt;/</a:t>
-            </a:r>
-            <a:r>
-              <a:rPr lang="hu-HU" sz="1200" dirty="0" err="1">
-                <a:latin typeface="Monospac821 BT" panose="020B0609020202020204" pitchFamily="49" charset="0"/>
-              </a:rPr>
-              <a:t>button</a:t>
-            </a:r>
-            <a:r>
-              <a:rPr lang="hu-HU" sz="1200" dirty="0">
-                <a:latin typeface="Monospac821 BT" panose="020B0609020202020204" pitchFamily="49" charset="0"/>
-              </a:rPr>
-              <a:t>&gt;</a:t>
-            </a:r>
-          </a:p>
-          <a:p>
-            <a:r>
-              <a:rPr lang="hu-HU" sz="1200" dirty="0">
-                <a:latin typeface="Monospac821 BT" panose="020B0609020202020204" pitchFamily="49" charset="0"/>
-              </a:rPr>
-              <a:t>    &lt;</a:t>
-            </a:r>
-            <a:r>
-              <a:rPr lang="hu-HU" sz="1200" dirty="0" err="1">
-                <a:latin typeface="Monospac821 BT" panose="020B0609020202020204" pitchFamily="49" charset="0"/>
-              </a:rPr>
-              <a:t>button</a:t>
-            </a:r>
-            <a:r>
-              <a:rPr lang="hu-HU" sz="1200" dirty="0">
-                <a:latin typeface="Monospac821 BT" panose="020B0609020202020204" pitchFamily="49" charset="0"/>
-              </a:rPr>
-              <a:t> </a:t>
-            </a:r>
-            <a:r>
-              <a:rPr lang="hu-HU" sz="1200" dirty="0" err="1">
-                <a:latin typeface="Monospac821 BT" panose="020B0609020202020204" pitchFamily="49" charset="0"/>
-              </a:rPr>
-              <a:t>class</a:t>
-            </a:r>
-            <a:r>
-              <a:rPr lang="hu-HU" sz="1200" dirty="0">
-                <a:latin typeface="Monospac821 BT" panose="020B0609020202020204" pitchFamily="49" charset="0"/>
-              </a:rPr>
-              <a:t>="</a:t>
-            </a:r>
-            <a:r>
-              <a:rPr lang="hu-HU" sz="1200" dirty="0" err="1">
-                <a:latin typeface="Monospac821 BT" panose="020B0609020202020204" pitchFamily="49" charset="0"/>
-              </a:rPr>
-              <a:t>btn</a:t>
-            </a:r>
-            <a:r>
-              <a:rPr lang="hu-HU" sz="1200" dirty="0">
-                <a:latin typeface="Monospac821 BT" panose="020B0609020202020204" pitchFamily="49" charset="0"/>
-              </a:rPr>
-              <a:t> </a:t>
-            </a:r>
-            <a:r>
-              <a:rPr lang="hu-HU" sz="1200" dirty="0" err="1">
-                <a:latin typeface="Monospac821 BT" panose="020B0609020202020204" pitchFamily="49" charset="0"/>
-              </a:rPr>
-              <a:t>btn</a:t>
-            </a:r>
-            <a:r>
-              <a:rPr lang="hu-HU" sz="1200" dirty="0">
-                <a:latin typeface="Monospac821 BT" panose="020B0609020202020204" pitchFamily="49" charset="0"/>
-              </a:rPr>
-              <a:t>-outline-</a:t>
-            </a:r>
-            <a:r>
-              <a:rPr lang="hu-HU" sz="1200" dirty="0" err="1">
-                <a:latin typeface="Monospac821 BT" panose="020B0609020202020204" pitchFamily="49" charset="0"/>
-              </a:rPr>
-              <a:t>danger</a:t>
-            </a:r>
-            <a:r>
-              <a:rPr lang="hu-HU" sz="1200" dirty="0">
-                <a:latin typeface="Monospac821 BT" panose="020B0609020202020204" pitchFamily="49" charset="0"/>
-              </a:rPr>
-              <a:t> filter-</a:t>
-            </a:r>
-            <a:r>
-              <a:rPr lang="hu-HU" sz="1200" dirty="0" err="1">
-                <a:latin typeface="Monospac821 BT" panose="020B0609020202020204" pitchFamily="49" charset="0"/>
-              </a:rPr>
-              <a:t>btn</a:t>
-            </a:r>
-            <a:r>
-              <a:rPr lang="hu-HU" sz="1200" dirty="0">
-                <a:latin typeface="Monospac821 BT" panose="020B0609020202020204" pitchFamily="49" charset="0"/>
-              </a:rPr>
-              <a:t>" </a:t>
-            </a:r>
-            <a:r>
-              <a:rPr lang="hu-HU" sz="1200" dirty="0" err="1">
-                <a:latin typeface="Monospac821 BT" panose="020B0609020202020204" pitchFamily="49" charset="0"/>
-              </a:rPr>
-              <a:t>data</a:t>
-            </a:r>
-            <a:r>
-              <a:rPr lang="hu-HU" sz="1200" dirty="0">
-                <a:latin typeface="Monospac821 BT" panose="020B0609020202020204" pitchFamily="49" charset="0"/>
-              </a:rPr>
-              <a:t>-filter="</a:t>
-            </a:r>
-            <a:r>
-              <a:rPr lang="hu-HU" sz="1200" dirty="0" err="1">
-                <a:latin typeface="Monospac821 BT" panose="020B0609020202020204" pitchFamily="49" charset="0"/>
-              </a:rPr>
-              <a:t>orb</a:t>
-            </a:r>
-            <a:r>
-              <a:rPr lang="hu-HU" sz="1200" dirty="0">
-                <a:latin typeface="Monospac821 BT" panose="020B0609020202020204" pitchFamily="49" charset="0"/>
-              </a:rPr>
-              <a:t>"&gt;</a:t>
-            </a:r>
-            <a:r>
-              <a:rPr lang="hu-HU" sz="1200" dirty="0" err="1">
-                <a:latin typeface="Monospac821 BT" panose="020B0609020202020204" pitchFamily="49" charset="0"/>
-              </a:rPr>
-              <a:t>Ghost</a:t>
-            </a:r>
-            <a:r>
-              <a:rPr lang="hu-HU" sz="1200" dirty="0">
-                <a:latin typeface="Monospac821 BT" panose="020B0609020202020204" pitchFamily="49" charset="0"/>
-              </a:rPr>
-              <a:t> </a:t>
-            </a:r>
-            <a:r>
-              <a:rPr lang="hu-HU" sz="1200" dirty="0" err="1">
-                <a:latin typeface="Monospac821 BT" panose="020B0609020202020204" pitchFamily="49" charset="0"/>
-              </a:rPr>
-              <a:t>Orb</a:t>
-            </a:r>
-            <a:r>
-              <a:rPr lang="hu-HU" sz="1200" dirty="0">
-                <a:latin typeface="Monospac821 BT" panose="020B0609020202020204" pitchFamily="49" charset="0"/>
-              </a:rPr>
-              <a:t>&lt;/</a:t>
-            </a:r>
-            <a:r>
-              <a:rPr lang="hu-HU" sz="1200" dirty="0" err="1">
-                <a:latin typeface="Monospac821 BT" panose="020B0609020202020204" pitchFamily="49" charset="0"/>
-              </a:rPr>
-              <a:t>button</a:t>
-            </a:r>
-            <a:r>
-              <a:rPr lang="hu-HU" sz="1200" dirty="0">
-                <a:latin typeface="Monospac821 BT" panose="020B0609020202020204" pitchFamily="49" charset="0"/>
-              </a:rPr>
-              <a:t>&gt;</a:t>
-            </a:r>
-          </a:p>
-          <a:p>
-            <a:r>
-              <a:rPr lang="hu-HU" sz="1200" dirty="0">
-                <a:latin typeface="Monospac821 BT" panose="020B0609020202020204" pitchFamily="49" charset="0"/>
-              </a:rPr>
-              <a:t>    &lt;</a:t>
-            </a:r>
-            <a:r>
-              <a:rPr lang="hu-HU" sz="1200" dirty="0" err="1">
-                <a:latin typeface="Monospac821 BT" panose="020B0609020202020204" pitchFamily="49" charset="0"/>
-              </a:rPr>
-              <a:t>button</a:t>
-            </a:r>
-            <a:r>
-              <a:rPr lang="hu-HU" sz="1200" dirty="0">
-                <a:latin typeface="Monospac821 BT" panose="020B0609020202020204" pitchFamily="49" charset="0"/>
-              </a:rPr>
-              <a:t> </a:t>
-            </a:r>
-            <a:r>
-              <a:rPr lang="hu-HU" sz="1200" dirty="0" err="1">
-                <a:latin typeface="Monospac821 BT" panose="020B0609020202020204" pitchFamily="49" charset="0"/>
-              </a:rPr>
-              <a:t>class</a:t>
-            </a:r>
-            <a:r>
-              <a:rPr lang="hu-HU" sz="1200" dirty="0">
-                <a:latin typeface="Monospac821 BT" panose="020B0609020202020204" pitchFamily="49" charset="0"/>
-              </a:rPr>
-              <a:t>="</a:t>
-            </a:r>
-            <a:r>
-              <a:rPr lang="hu-HU" sz="1200" dirty="0" err="1">
-                <a:latin typeface="Monospac821 BT" panose="020B0609020202020204" pitchFamily="49" charset="0"/>
-              </a:rPr>
-              <a:t>btn</a:t>
-            </a:r>
-            <a:r>
-              <a:rPr lang="hu-HU" sz="1200" dirty="0">
-                <a:latin typeface="Monospac821 BT" panose="020B0609020202020204" pitchFamily="49" charset="0"/>
-              </a:rPr>
-              <a:t> </a:t>
-            </a:r>
-            <a:r>
-              <a:rPr lang="hu-HU" sz="1200" dirty="0" err="1">
-                <a:latin typeface="Monospac821 BT" panose="020B0609020202020204" pitchFamily="49" charset="0"/>
-              </a:rPr>
-              <a:t>btn</a:t>
-            </a:r>
-            <a:r>
-              <a:rPr lang="hu-HU" sz="1200" dirty="0">
-                <a:latin typeface="Monospac821 BT" panose="020B0609020202020204" pitchFamily="49" charset="0"/>
-              </a:rPr>
-              <a:t>-outline-</a:t>
-            </a:r>
-            <a:r>
-              <a:rPr lang="hu-HU" sz="1200" dirty="0" err="1">
-                <a:latin typeface="Monospac821 BT" panose="020B0609020202020204" pitchFamily="49" charset="0"/>
-              </a:rPr>
-              <a:t>danger</a:t>
-            </a:r>
-            <a:r>
-              <a:rPr lang="hu-HU" sz="1200" dirty="0">
-                <a:latin typeface="Monospac821 BT" panose="020B0609020202020204" pitchFamily="49" charset="0"/>
-              </a:rPr>
-              <a:t> filter-</a:t>
-            </a:r>
-            <a:r>
-              <a:rPr lang="hu-HU" sz="1200" dirty="0" err="1">
-                <a:latin typeface="Monospac821 BT" panose="020B0609020202020204" pitchFamily="49" charset="0"/>
-              </a:rPr>
-              <a:t>btn</a:t>
-            </a:r>
-            <a:r>
-              <a:rPr lang="hu-HU" sz="1200" dirty="0">
-                <a:latin typeface="Monospac821 BT" panose="020B0609020202020204" pitchFamily="49" charset="0"/>
-              </a:rPr>
-              <a:t>" </a:t>
-            </a:r>
-            <a:r>
-              <a:rPr lang="hu-HU" sz="1200" dirty="0" err="1">
-                <a:latin typeface="Monospac821 BT" panose="020B0609020202020204" pitchFamily="49" charset="0"/>
-              </a:rPr>
-              <a:t>data</a:t>
-            </a:r>
-            <a:r>
-              <a:rPr lang="hu-HU" sz="1200" dirty="0">
-                <a:latin typeface="Monospac821 BT" panose="020B0609020202020204" pitchFamily="49" charset="0"/>
-              </a:rPr>
-              <a:t>-filter="</a:t>
-            </a:r>
-            <a:r>
-              <a:rPr lang="hu-HU" sz="1200" dirty="0" err="1">
-                <a:latin typeface="Monospac821 BT" panose="020B0609020202020204" pitchFamily="49" charset="0"/>
-              </a:rPr>
-              <a:t>writing</a:t>
-            </a:r>
-            <a:r>
-              <a:rPr lang="hu-HU" sz="1200" dirty="0">
-                <a:latin typeface="Monospac821 BT" panose="020B0609020202020204" pitchFamily="49" charset="0"/>
-              </a:rPr>
-              <a:t>"&gt;</a:t>
-            </a:r>
-            <a:r>
-              <a:rPr lang="hu-HU" sz="1200" dirty="0" err="1">
-                <a:latin typeface="Monospac821 BT" panose="020B0609020202020204" pitchFamily="49" charset="0"/>
-              </a:rPr>
-              <a:t>Writing</a:t>
-            </a:r>
-            <a:r>
-              <a:rPr lang="hu-HU" sz="1200" dirty="0">
-                <a:latin typeface="Monospac821 BT" panose="020B0609020202020204" pitchFamily="49" charset="0"/>
-              </a:rPr>
-              <a:t>&lt;/</a:t>
-            </a:r>
-            <a:r>
-              <a:rPr lang="hu-HU" sz="1200" dirty="0" err="1">
-                <a:latin typeface="Monospac821 BT" panose="020B0609020202020204" pitchFamily="49" charset="0"/>
-              </a:rPr>
-              <a:t>button</a:t>
-            </a:r>
-            <a:r>
-              <a:rPr lang="hu-HU" sz="1200" dirty="0">
-                <a:latin typeface="Monospac821 BT" panose="020B0609020202020204" pitchFamily="49" charset="0"/>
-              </a:rPr>
-              <a:t>&gt;</a:t>
-            </a:r>
-          </a:p>
-          <a:p>
-            <a:r>
-              <a:rPr lang="hu-HU" sz="1200" dirty="0">
-                <a:latin typeface="Monospac821 BT" panose="020B0609020202020204" pitchFamily="49" charset="0"/>
-              </a:rPr>
-              <a:t>    &lt;</a:t>
-            </a:r>
-            <a:r>
-              <a:rPr lang="hu-HU" sz="1200" dirty="0" err="1">
-                <a:latin typeface="Monospac821 BT" panose="020B0609020202020204" pitchFamily="49" charset="0"/>
-              </a:rPr>
-              <a:t>button</a:t>
-            </a:r>
-            <a:r>
-              <a:rPr lang="hu-HU" sz="1200" dirty="0">
-                <a:latin typeface="Monospac821 BT" panose="020B0609020202020204" pitchFamily="49" charset="0"/>
-              </a:rPr>
-              <a:t> </a:t>
-            </a:r>
-            <a:r>
-              <a:rPr lang="hu-HU" sz="1200" dirty="0" err="1">
-                <a:latin typeface="Monospac821 BT" panose="020B0609020202020204" pitchFamily="49" charset="0"/>
-              </a:rPr>
-              <a:t>class</a:t>
-            </a:r>
-            <a:r>
-              <a:rPr lang="hu-HU" sz="1200" dirty="0">
-                <a:latin typeface="Monospac821 BT" panose="020B0609020202020204" pitchFamily="49" charset="0"/>
-              </a:rPr>
-              <a:t>="</a:t>
-            </a:r>
-            <a:r>
-              <a:rPr lang="hu-HU" sz="1200" dirty="0" err="1">
-                <a:latin typeface="Monospac821 BT" panose="020B0609020202020204" pitchFamily="49" charset="0"/>
-              </a:rPr>
-              <a:t>btn</a:t>
-            </a:r>
-            <a:r>
-              <a:rPr lang="hu-HU" sz="1200" dirty="0">
-                <a:latin typeface="Monospac821 BT" panose="020B0609020202020204" pitchFamily="49" charset="0"/>
-              </a:rPr>
-              <a:t> </a:t>
-            </a:r>
-            <a:r>
-              <a:rPr lang="hu-HU" sz="1200" dirty="0" err="1">
-                <a:latin typeface="Monospac821 BT" panose="020B0609020202020204" pitchFamily="49" charset="0"/>
-              </a:rPr>
-              <a:t>btn</a:t>
-            </a:r>
-            <a:r>
-              <a:rPr lang="hu-HU" sz="1200" dirty="0">
-                <a:latin typeface="Monospac821 BT" panose="020B0609020202020204" pitchFamily="49" charset="0"/>
-              </a:rPr>
-              <a:t>-outline-</a:t>
-            </a:r>
-            <a:r>
-              <a:rPr lang="hu-HU" sz="1200" dirty="0" err="1">
-                <a:latin typeface="Monospac821 BT" panose="020B0609020202020204" pitchFamily="49" charset="0"/>
-              </a:rPr>
-              <a:t>danger</a:t>
-            </a:r>
-            <a:r>
-              <a:rPr lang="hu-HU" sz="1200" dirty="0">
-                <a:latin typeface="Monospac821 BT" panose="020B0609020202020204" pitchFamily="49" charset="0"/>
-              </a:rPr>
-              <a:t> filter-</a:t>
-            </a:r>
-            <a:r>
-              <a:rPr lang="hu-HU" sz="1200" dirty="0" err="1">
-                <a:latin typeface="Monospac821 BT" panose="020B0609020202020204" pitchFamily="49" charset="0"/>
-              </a:rPr>
-              <a:t>btn</a:t>
-            </a:r>
-            <a:r>
-              <a:rPr lang="hu-HU" sz="1200" dirty="0">
-                <a:latin typeface="Monospac821 BT" panose="020B0609020202020204" pitchFamily="49" charset="0"/>
-              </a:rPr>
-              <a:t>" </a:t>
-            </a:r>
-            <a:r>
-              <a:rPr lang="hu-HU" sz="1200" dirty="0" err="1">
-                <a:latin typeface="Monospac821 BT" panose="020B0609020202020204" pitchFamily="49" charset="0"/>
-              </a:rPr>
-              <a:t>data</a:t>
-            </a:r>
-            <a:r>
-              <a:rPr lang="hu-HU" sz="1200" dirty="0">
-                <a:latin typeface="Monospac821 BT" panose="020B0609020202020204" pitchFamily="49" charset="0"/>
-              </a:rPr>
-              <a:t>-filter="</a:t>
-            </a:r>
-            <a:r>
-              <a:rPr lang="hu-HU" sz="1200" dirty="0" err="1">
-                <a:latin typeface="Monospac821 BT" panose="020B0609020202020204" pitchFamily="49" charset="0"/>
-              </a:rPr>
-              <a:t>dots</a:t>
-            </a:r>
-            <a:r>
-              <a:rPr lang="hu-HU" sz="1200" dirty="0">
-                <a:latin typeface="Monospac821 BT" panose="020B0609020202020204" pitchFamily="49" charset="0"/>
-              </a:rPr>
-              <a:t>"&gt;DOTS&lt;/</a:t>
-            </a:r>
-            <a:r>
-              <a:rPr lang="hu-HU" sz="1200" dirty="0" err="1">
-                <a:latin typeface="Monospac821 BT" panose="020B0609020202020204" pitchFamily="49" charset="0"/>
-              </a:rPr>
-              <a:t>button</a:t>
-            </a:r>
-            <a:r>
-              <a:rPr lang="hu-HU" sz="1200" dirty="0">
-                <a:latin typeface="Monospac821 BT" panose="020B0609020202020204" pitchFamily="49" charset="0"/>
-              </a:rPr>
-              <a:t>&gt;</a:t>
-            </a:r>
-          </a:p>
-          <a:p>
-            <a:endParaRPr lang="hu-HU" sz="1200" dirty="0">
-              <a:latin typeface="Monospac821 BT" panose="020B0609020202020204" pitchFamily="49" charset="0"/>
-            </a:endParaRPr>
-          </a:p>
-          <a:p>
-            <a:r>
-              <a:rPr lang="hu-HU" sz="1200" dirty="0">
-                <a:latin typeface="Monospac821 BT" panose="020B0609020202020204" pitchFamily="49" charset="0"/>
-              </a:rPr>
-              <a:t>    &lt;</a:t>
-            </a:r>
-            <a:r>
-              <a:rPr lang="hu-HU" sz="1200" dirty="0" err="1">
-                <a:latin typeface="Monospac821 BT" panose="020B0609020202020204" pitchFamily="49" charset="0"/>
-              </a:rPr>
-              <a:t>button</a:t>
-            </a:r>
-            <a:r>
-              <a:rPr lang="hu-HU" sz="1200" dirty="0">
-                <a:latin typeface="Monospac821 BT" panose="020B0609020202020204" pitchFamily="49" charset="0"/>
-              </a:rPr>
-              <a:t> </a:t>
-            </a:r>
-            <a:r>
-              <a:rPr lang="hu-HU" sz="1200" dirty="0" err="1">
-                <a:latin typeface="Monospac821 BT" panose="020B0609020202020204" pitchFamily="49" charset="0"/>
-              </a:rPr>
-              <a:t>class</a:t>
-            </a:r>
-            <a:r>
-              <a:rPr lang="hu-HU" sz="1200" dirty="0">
-                <a:latin typeface="Monospac821 BT" panose="020B0609020202020204" pitchFamily="49" charset="0"/>
-              </a:rPr>
-              <a:t>="</a:t>
-            </a:r>
-            <a:r>
-              <a:rPr lang="hu-HU" sz="1200" dirty="0" err="1">
-                <a:latin typeface="Monospac821 BT" panose="020B0609020202020204" pitchFamily="49" charset="0"/>
-              </a:rPr>
-              <a:t>btn</a:t>
-            </a:r>
-            <a:r>
-              <a:rPr lang="hu-HU" sz="1200" dirty="0">
-                <a:latin typeface="Monospac821 BT" panose="020B0609020202020204" pitchFamily="49" charset="0"/>
-              </a:rPr>
-              <a:t> </a:t>
-            </a:r>
-            <a:r>
-              <a:rPr lang="hu-HU" sz="1200" dirty="0" err="1">
-                <a:latin typeface="Monospac821 BT" panose="020B0609020202020204" pitchFamily="49" charset="0"/>
-              </a:rPr>
-              <a:t>btn-danger</a:t>
-            </a:r>
-            <a:r>
-              <a:rPr lang="hu-HU" sz="1200" dirty="0">
-                <a:latin typeface="Monospac821 BT" panose="020B0609020202020204" pitchFamily="49" charset="0"/>
-              </a:rPr>
-              <a:t> ms-3" </a:t>
-            </a:r>
-            <a:r>
-              <a:rPr lang="hu-HU" sz="1200" dirty="0" err="1">
-                <a:latin typeface="Monospac821 BT" panose="020B0609020202020204" pitchFamily="49" charset="0"/>
-              </a:rPr>
-              <a:t>id</a:t>
-            </a:r>
-            <a:r>
-              <a:rPr lang="hu-HU" sz="1200" dirty="0">
-                <a:latin typeface="Monospac821 BT" panose="020B0609020202020204" pitchFamily="49" charset="0"/>
-              </a:rPr>
-              <a:t>="</a:t>
-            </a:r>
-            <a:r>
-              <a:rPr lang="hu-HU" sz="1200" dirty="0" err="1">
-                <a:latin typeface="Monospac821 BT" panose="020B0609020202020204" pitchFamily="49" charset="0"/>
-              </a:rPr>
-              <a:t>resetFilter</a:t>
-            </a:r>
-            <a:r>
-              <a:rPr lang="hu-HU" sz="1200" dirty="0">
-                <a:latin typeface="Monospac821 BT" panose="020B0609020202020204" pitchFamily="49" charset="0"/>
-              </a:rPr>
-              <a:t>"&gt;Összes&lt;/</a:t>
-            </a:r>
-            <a:r>
-              <a:rPr lang="hu-HU" sz="1200" dirty="0" err="1">
-                <a:latin typeface="Monospac821 BT" panose="020B0609020202020204" pitchFamily="49" charset="0"/>
-              </a:rPr>
-              <a:t>button</a:t>
-            </a:r>
-            <a:r>
-              <a:rPr lang="hu-HU" sz="1200" dirty="0">
-                <a:latin typeface="Monospac821 BT" panose="020B0609020202020204" pitchFamily="49" charset="0"/>
-              </a:rPr>
-              <a:t>&gt;</a:t>
-            </a:r>
-          </a:p>
-          <a:p>
-            <a:endParaRPr lang="hu-HU" sz="1200" dirty="0">
-              <a:latin typeface="Monospac821 BT" panose="020B0609020202020204" pitchFamily="49" charset="0"/>
-            </a:endParaRPr>
-          </a:p>
-          <a:p>
-            <a:r>
-              <a:rPr lang="hu-HU" sz="1200" dirty="0">
-                <a:latin typeface="Monospac821 BT" panose="020B0609020202020204" pitchFamily="49" charset="0"/>
-              </a:rPr>
-              <a:t>&lt;/div&gt;</a:t>
-            </a:r>
-          </a:p>
-        </p:txBody>
-      </p:sp>
-      <p:sp>
-        <p:nvSpPr>
           <p:cNvPr id="9" name="Szövegdoboz 8">
             <a:extLst>
               <a:ext uri="{FF2B5EF4-FFF2-40B4-BE49-F238E27FC236}">
@@ -10554,6 +7844,36 @@
           </a:p>
         </p:txBody>
       </p:sp>
+      <p:pic>
+        <p:nvPicPr>
+          <p:cNvPr id="3" name="Kép 2">
+            <a:extLst>
+              <a:ext uri="{FF2B5EF4-FFF2-40B4-BE49-F238E27FC236}">
+                <a16:creationId xmlns:a16="http://schemas.microsoft.com/office/drawing/2014/main" id="{A436E710-E55B-4D89-9D96-D0ADF578060E}"/>
+              </a:ext>
+            </a:extLst>
+          </p:cNvPr>
+          <p:cNvPicPr>
+            <a:picLocks noChangeAspect="1"/>
+          </p:cNvPicPr>
+          <p:nvPr/>
+        </p:nvPicPr>
+        <p:blipFill>
+          <a:blip r:embed="rId2"/>
+          <a:stretch>
+            <a:fillRect/>
+          </a:stretch>
+        </p:blipFill>
+        <p:spPr>
+          <a:xfrm>
+            <a:off x="2232276" y="2797735"/>
+            <a:ext cx="7392432" cy="2372056"/>
+          </a:xfrm>
+          <a:prstGeom prst="rect">
+            <a:avLst/>
+          </a:prstGeom>
+        </p:spPr>
+      </p:pic>
     </p:spTree>
     <p:extLst>
       <p:ext uri="{BB962C8B-B14F-4D97-AF65-F5344CB8AC3E}">
@@ -10724,408 +8044,6 @@
       </p:sp>
       <p:sp>
         <p:nvSpPr>
-          <p:cNvPr id="2" name="Szövegdoboz 1">
-            <a:extLst>
-              <a:ext uri="{FF2B5EF4-FFF2-40B4-BE49-F238E27FC236}">
-                <a16:creationId xmlns:a16="http://schemas.microsoft.com/office/drawing/2014/main" id="{185943A9-DFFA-48AE-96FA-7262C2D863EE}"/>
-              </a:ext>
-            </a:extLst>
-          </p:cNvPr>
-          <p:cNvSpPr txBox="1"/>
-          <p:nvPr/>
-        </p:nvSpPr>
-        <p:spPr>
-          <a:xfrm>
-            <a:off x="4945776" y="982230"/>
-            <a:ext cx="6027937" cy="3231654"/>
-          </a:xfrm>
-          <a:prstGeom prst="rect">
-            <a:avLst/>
-          </a:prstGeom>
-          <a:noFill/>
-        </p:spPr>
-        <p:txBody>
-          <a:bodyPr wrap="square" rtlCol="0">
-            <a:spAutoFit/>
-          </a:bodyPr>
-          <a:lstStyle/>
-          <a:p>
-            <a:r>
-              <a:rPr lang="hu-HU" sz="1200" dirty="0">
-                <a:latin typeface="Monospac821 BT" panose="020B0609020202020204" pitchFamily="49" charset="0"/>
-              </a:rPr>
-              <a:t>&lt;script&gt;</a:t>
-            </a:r>
-          </a:p>
-          <a:p>
-            <a:r>
-              <a:rPr lang="hu-HU" sz="1200" dirty="0">
-                <a:latin typeface="Monospac821 BT" panose="020B0609020202020204" pitchFamily="49" charset="0"/>
-              </a:rPr>
-              <a:t>const </a:t>
-            </a:r>
-            <a:r>
-              <a:rPr lang="hu-HU" sz="1200" dirty="0" err="1">
-                <a:latin typeface="Monospac821 BT" panose="020B0609020202020204" pitchFamily="49" charset="0"/>
-              </a:rPr>
-              <a:t>buttons</a:t>
-            </a:r>
-            <a:r>
-              <a:rPr lang="hu-HU" sz="1200" dirty="0">
-                <a:latin typeface="Monospac821 BT" panose="020B0609020202020204" pitchFamily="49" charset="0"/>
-              </a:rPr>
-              <a:t> = </a:t>
-            </a:r>
-            <a:r>
-              <a:rPr lang="hu-HU" sz="1200" dirty="0" err="1">
-                <a:latin typeface="Monospac821 BT" panose="020B0609020202020204" pitchFamily="49" charset="0"/>
-              </a:rPr>
-              <a:t>document.querySelectorAll</a:t>
-            </a:r>
-            <a:r>
-              <a:rPr lang="hu-HU" sz="1200" dirty="0">
-                <a:latin typeface="Monospac821 BT" panose="020B0609020202020204" pitchFamily="49" charset="0"/>
-              </a:rPr>
-              <a:t>(".filter-</a:t>
-            </a:r>
-            <a:r>
-              <a:rPr lang="hu-HU" sz="1200" dirty="0" err="1">
-                <a:latin typeface="Monospac821 BT" panose="020B0609020202020204" pitchFamily="49" charset="0"/>
-              </a:rPr>
-              <a:t>btn</a:t>
-            </a:r>
-            <a:r>
-              <a:rPr lang="hu-HU" sz="1200" dirty="0">
-                <a:latin typeface="Monospac821 BT" panose="020B0609020202020204" pitchFamily="49" charset="0"/>
-              </a:rPr>
-              <a:t>");</a:t>
-            </a:r>
-          </a:p>
-          <a:p>
-            <a:r>
-              <a:rPr lang="hu-HU" sz="1200" dirty="0">
-                <a:latin typeface="Monospac821 BT" panose="020B0609020202020204" pitchFamily="49" charset="0"/>
-              </a:rPr>
-              <a:t>const </a:t>
-            </a:r>
-            <a:r>
-              <a:rPr lang="hu-HU" sz="1200" dirty="0" err="1">
-                <a:latin typeface="Monospac821 BT" panose="020B0609020202020204" pitchFamily="49" charset="0"/>
-              </a:rPr>
-              <a:t>cards</a:t>
-            </a:r>
-            <a:r>
-              <a:rPr lang="hu-HU" sz="1200" dirty="0">
-                <a:latin typeface="Monospac821 BT" panose="020B0609020202020204" pitchFamily="49" charset="0"/>
-              </a:rPr>
-              <a:t> = </a:t>
-            </a:r>
-            <a:r>
-              <a:rPr lang="hu-HU" sz="1200" dirty="0" err="1">
-                <a:latin typeface="Monospac821 BT" panose="020B0609020202020204" pitchFamily="49" charset="0"/>
-              </a:rPr>
-              <a:t>document.querySelectorAll</a:t>
-            </a:r>
-            <a:r>
-              <a:rPr lang="hu-HU" sz="1200" dirty="0">
-                <a:latin typeface="Monospac821 BT" panose="020B0609020202020204" pitchFamily="49" charset="0"/>
-              </a:rPr>
-              <a:t>(".</a:t>
-            </a:r>
-            <a:r>
-              <a:rPr lang="hu-HU" sz="1200" dirty="0" err="1">
-                <a:latin typeface="Monospac821 BT" panose="020B0609020202020204" pitchFamily="49" charset="0"/>
-              </a:rPr>
-              <a:t>ghost-card</a:t>
-            </a:r>
-            <a:r>
-              <a:rPr lang="hu-HU" sz="1200" dirty="0">
-                <a:latin typeface="Monospac821 BT" panose="020B0609020202020204" pitchFamily="49" charset="0"/>
-              </a:rPr>
-              <a:t>");</a:t>
-            </a:r>
-          </a:p>
-          <a:p>
-            <a:r>
-              <a:rPr lang="hu-HU" sz="1200" dirty="0">
-                <a:latin typeface="Monospac821 BT" panose="020B0609020202020204" pitchFamily="49" charset="0"/>
-              </a:rPr>
-              <a:t>const </a:t>
-            </a:r>
-            <a:r>
-              <a:rPr lang="hu-HU" sz="1200" dirty="0" err="1">
-                <a:latin typeface="Monospac821 BT" panose="020B0609020202020204" pitchFamily="49" charset="0"/>
-              </a:rPr>
-              <a:t>resetBtn</a:t>
-            </a:r>
-            <a:r>
-              <a:rPr lang="hu-HU" sz="1200" dirty="0">
-                <a:latin typeface="Monospac821 BT" panose="020B0609020202020204" pitchFamily="49" charset="0"/>
-              </a:rPr>
-              <a:t> = </a:t>
-            </a:r>
-            <a:r>
-              <a:rPr lang="hu-HU" sz="1200" dirty="0" err="1">
-                <a:latin typeface="Monospac821 BT" panose="020B0609020202020204" pitchFamily="49" charset="0"/>
-              </a:rPr>
-              <a:t>document.getElementById</a:t>
-            </a:r>
-            <a:r>
-              <a:rPr lang="hu-HU" sz="1200" dirty="0">
-                <a:latin typeface="Monospac821 BT" panose="020B0609020202020204" pitchFamily="49" charset="0"/>
-              </a:rPr>
-              <a:t>("</a:t>
-            </a:r>
-            <a:r>
-              <a:rPr lang="hu-HU" sz="1200" dirty="0" err="1">
-                <a:latin typeface="Monospac821 BT" panose="020B0609020202020204" pitchFamily="49" charset="0"/>
-              </a:rPr>
-              <a:t>resetFilter</a:t>
-            </a:r>
-            <a:r>
-              <a:rPr lang="hu-HU" sz="1200" dirty="0">
-                <a:latin typeface="Monospac821 BT" panose="020B0609020202020204" pitchFamily="49" charset="0"/>
-              </a:rPr>
-              <a:t>");</a:t>
-            </a:r>
-          </a:p>
-          <a:p>
-            <a:endParaRPr lang="hu-HU" sz="1200" dirty="0">
-              <a:latin typeface="Monospac821 BT" panose="020B0609020202020204" pitchFamily="49" charset="0"/>
-            </a:endParaRPr>
-          </a:p>
-          <a:p>
-            <a:r>
-              <a:rPr lang="hu-HU" sz="1200" dirty="0" err="1">
-                <a:latin typeface="Monospac821 BT" panose="020B0609020202020204" pitchFamily="49" charset="0"/>
-              </a:rPr>
-              <a:t>buttons.forEach</a:t>
-            </a:r>
-            <a:r>
-              <a:rPr lang="hu-HU" sz="1200" dirty="0">
-                <a:latin typeface="Monospac821 BT" panose="020B0609020202020204" pitchFamily="49" charset="0"/>
-              </a:rPr>
-              <a:t>(</a:t>
-            </a:r>
-            <a:r>
-              <a:rPr lang="hu-HU" sz="1200" dirty="0" err="1">
-                <a:latin typeface="Monospac821 BT" panose="020B0609020202020204" pitchFamily="49" charset="0"/>
-              </a:rPr>
-              <a:t>button</a:t>
-            </a:r>
-            <a:r>
-              <a:rPr lang="hu-HU" sz="1200" dirty="0">
-                <a:latin typeface="Monospac821 BT" panose="020B0609020202020204" pitchFamily="49" charset="0"/>
-              </a:rPr>
-              <a:t> =&gt; {</a:t>
-            </a:r>
-          </a:p>
-          <a:p>
-            <a:r>
-              <a:rPr lang="hu-HU" sz="1200" dirty="0">
-                <a:latin typeface="Monospac821 BT" panose="020B0609020202020204" pitchFamily="49" charset="0"/>
-              </a:rPr>
-              <a:t>    </a:t>
-            </a:r>
-            <a:r>
-              <a:rPr lang="hu-HU" sz="1200" dirty="0" err="1">
-                <a:latin typeface="Monospac821 BT" panose="020B0609020202020204" pitchFamily="49" charset="0"/>
-              </a:rPr>
-              <a:t>button.addEventListener</a:t>
-            </a:r>
-            <a:r>
-              <a:rPr lang="hu-HU" sz="1200" dirty="0">
-                <a:latin typeface="Monospac821 BT" panose="020B0609020202020204" pitchFamily="49" charset="0"/>
-              </a:rPr>
-              <a:t>("</a:t>
-            </a:r>
-            <a:r>
-              <a:rPr lang="hu-HU" sz="1200" dirty="0" err="1">
-                <a:latin typeface="Monospac821 BT" panose="020B0609020202020204" pitchFamily="49" charset="0"/>
-              </a:rPr>
-              <a:t>click</a:t>
-            </a:r>
-            <a:r>
-              <a:rPr lang="hu-HU" sz="1200" dirty="0">
-                <a:latin typeface="Monospac821 BT" panose="020B0609020202020204" pitchFamily="49" charset="0"/>
-              </a:rPr>
-              <a:t>", () =&gt; {</a:t>
-            </a:r>
-          </a:p>
-          <a:p>
-            <a:r>
-              <a:rPr lang="hu-HU" sz="1200" dirty="0">
-                <a:latin typeface="Monospac821 BT" panose="020B0609020202020204" pitchFamily="49" charset="0"/>
-              </a:rPr>
-              <a:t>        </a:t>
-            </a:r>
-          </a:p>
-          <a:p>
-            <a:r>
-              <a:rPr lang="hu-HU" sz="1200" dirty="0">
-                <a:latin typeface="Monospac821 BT" panose="020B0609020202020204" pitchFamily="49" charset="0"/>
-              </a:rPr>
-              <a:t>        // Aktív állapot váltás</a:t>
-            </a:r>
-          </a:p>
-          <a:p>
-            <a:r>
-              <a:rPr lang="hu-HU" sz="1200" dirty="0">
-                <a:latin typeface="Monospac821 BT" panose="020B0609020202020204" pitchFamily="49" charset="0"/>
-              </a:rPr>
-              <a:t>        </a:t>
-            </a:r>
-            <a:r>
-              <a:rPr lang="hu-HU" sz="1200" dirty="0" err="1">
-                <a:latin typeface="Monospac821 BT" panose="020B0609020202020204" pitchFamily="49" charset="0"/>
-              </a:rPr>
-              <a:t>button.classList.toggle</a:t>
-            </a:r>
-            <a:r>
-              <a:rPr lang="hu-HU" sz="1200" dirty="0">
-                <a:latin typeface="Monospac821 BT" panose="020B0609020202020204" pitchFamily="49" charset="0"/>
-              </a:rPr>
-              <a:t>("</a:t>
-            </a:r>
-            <a:r>
-              <a:rPr lang="hu-HU" sz="1200" dirty="0" err="1">
-                <a:latin typeface="Monospac821 BT" panose="020B0609020202020204" pitchFamily="49" charset="0"/>
-              </a:rPr>
-              <a:t>active</a:t>
-            </a:r>
-            <a:r>
-              <a:rPr lang="hu-HU" sz="1200" dirty="0">
-                <a:latin typeface="Monospac821 BT" panose="020B0609020202020204" pitchFamily="49" charset="0"/>
-              </a:rPr>
-              <a:t>");</a:t>
-            </a:r>
-          </a:p>
-          <a:p>
-            <a:r>
-              <a:rPr lang="hu-HU" sz="1200" dirty="0">
-                <a:latin typeface="Monospac821 BT" panose="020B0609020202020204" pitchFamily="49" charset="0"/>
-              </a:rPr>
-              <a:t>        </a:t>
-            </a:r>
-            <a:r>
-              <a:rPr lang="hu-HU" sz="1200" dirty="0" err="1">
-                <a:latin typeface="Monospac821 BT" panose="020B0609020202020204" pitchFamily="49" charset="0"/>
-              </a:rPr>
-              <a:t>button.classList.toggle</a:t>
-            </a:r>
-            <a:r>
-              <a:rPr lang="hu-HU" sz="1200" dirty="0">
-                <a:latin typeface="Monospac821 BT" panose="020B0609020202020204" pitchFamily="49" charset="0"/>
-              </a:rPr>
-              <a:t>("</a:t>
-            </a:r>
-            <a:r>
-              <a:rPr lang="hu-HU" sz="1200" dirty="0" err="1">
-                <a:latin typeface="Monospac821 BT" panose="020B0609020202020204" pitchFamily="49" charset="0"/>
-              </a:rPr>
-              <a:t>btn-danger</a:t>
-            </a:r>
-            <a:r>
-              <a:rPr lang="hu-HU" sz="1200" dirty="0">
-                <a:latin typeface="Monospac821 BT" panose="020B0609020202020204" pitchFamily="49" charset="0"/>
-              </a:rPr>
-              <a:t>");</a:t>
-            </a:r>
-          </a:p>
-          <a:p>
-            <a:r>
-              <a:rPr lang="hu-HU" sz="1200" dirty="0">
-                <a:latin typeface="Monospac821 BT" panose="020B0609020202020204" pitchFamily="49" charset="0"/>
-              </a:rPr>
-              <a:t>        </a:t>
-            </a:r>
-            <a:r>
-              <a:rPr lang="hu-HU" sz="1200" dirty="0" err="1">
-                <a:latin typeface="Monospac821 BT" panose="020B0609020202020204" pitchFamily="49" charset="0"/>
-              </a:rPr>
-              <a:t>button.classList.toggle</a:t>
-            </a:r>
-            <a:r>
-              <a:rPr lang="hu-HU" sz="1200" dirty="0">
-                <a:latin typeface="Monospac821 BT" panose="020B0609020202020204" pitchFamily="49" charset="0"/>
-              </a:rPr>
-              <a:t>("</a:t>
-            </a:r>
-            <a:r>
-              <a:rPr lang="hu-HU" sz="1200" dirty="0" err="1">
-                <a:latin typeface="Monospac821 BT" panose="020B0609020202020204" pitchFamily="49" charset="0"/>
-              </a:rPr>
-              <a:t>btn</a:t>
-            </a:r>
-            <a:r>
-              <a:rPr lang="hu-HU" sz="1200" dirty="0">
-                <a:latin typeface="Monospac821 BT" panose="020B0609020202020204" pitchFamily="49" charset="0"/>
-              </a:rPr>
-              <a:t>-outline-</a:t>
-            </a:r>
-            <a:r>
-              <a:rPr lang="hu-HU" sz="1200" dirty="0" err="1">
-                <a:latin typeface="Monospac821 BT" panose="020B0609020202020204" pitchFamily="49" charset="0"/>
-              </a:rPr>
-              <a:t>danger</a:t>
-            </a:r>
-            <a:r>
-              <a:rPr lang="hu-HU" sz="1200" dirty="0">
-                <a:latin typeface="Monospac821 BT" panose="020B0609020202020204" pitchFamily="49" charset="0"/>
-              </a:rPr>
-              <a:t>");</a:t>
-            </a:r>
-          </a:p>
-          <a:p>
-            <a:endParaRPr lang="hu-HU" sz="1200" dirty="0">
-              <a:latin typeface="Monospac821 BT" panose="020B0609020202020204" pitchFamily="49" charset="0"/>
-            </a:endParaRPr>
-          </a:p>
-          <a:p>
-            <a:r>
-              <a:rPr lang="hu-HU" sz="1200" dirty="0">
-                <a:latin typeface="Monospac821 BT" panose="020B0609020202020204" pitchFamily="49" charset="0"/>
-              </a:rPr>
-              <a:t>        </a:t>
-            </a:r>
-            <a:r>
-              <a:rPr lang="hu-HU" sz="1200" dirty="0" err="1">
-                <a:latin typeface="Monospac821 BT" panose="020B0609020202020204" pitchFamily="49" charset="0"/>
-              </a:rPr>
-              <a:t>applyFilters</a:t>
-            </a:r>
-            <a:r>
-              <a:rPr lang="hu-HU" sz="1200" dirty="0">
-                <a:latin typeface="Monospac821 BT" panose="020B0609020202020204" pitchFamily="49" charset="0"/>
-              </a:rPr>
-              <a:t>();</a:t>
-            </a:r>
-          </a:p>
-          <a:p>
-            <a:r>
-              <a:rPr lang="hu-HU" sz="1200" dirty="0">
-                <a:latin typeface="Monospac821 BT" panose="020B0609020202020204" pitchFamily="49" charset="0"/>
-              </a:rPr>
-              <a:t>    });</a:t>
-            </a:r>
-          </a:p>
-          <a:p>
-            <a:r>
-              <a:rPr lang="hu-HU" sz="1200" dirty="0">
-                <a:latin typeface="Monospac821 BT" panose="020B0609020202020204" pitchFamily="49" charset="0"/>
-              </a:rPr>
-              <a:t>});</a:t>
-            </a:r>
-          </a:p>
-          <a:p>
-            <a:endParaRPr lang="hu-HU" sz="1200" dirty="0">
-              <a:latin typeface="Monospac821 BT" panose="020B0609020202020204" pitchFamily="49" charset="0"/>
-            </a:endParaRPr>
-          </a:p>
-        </p:txBody>
-      </p:sp>
-      <p:sp>
-        <p:nvSpPr>
           <p:cNvPr id="5" name="Szövegdoboz 4">
             <a:extLst>
               <a:ext uri="{FF2B5EF4-FFF2-40B4-BE49-F238E27FC236}">
@@ -11268,6 +8186,36 @@
           </a:p>
         </p:txBody>
       </p:sp>
+      <p:pic>
+        <p:nvPicPr>
+          <p:cNvPr id="8" name="Kép 7">
+            <a:extLst>
+              <a:ext uri="{FF2B5EF4-FFF2-40B4-BE49-F238E27FC236}">
+                <a16:creationId xmlns:a16="http://schemas.microsoft.com/office/drawing/2014/main" id="{CDFE2E70-1A33-4867-BF21-9F771FA6795D}"/>
+              </a:ext>
+            </a:extLst>
+          </p:cNvPr>
+          <p:cNvPicPr>
+            <a:picLocks noChangeAspect="1"/>
+          </p:cNvPicPr>
+          <p:nvPr/>
+        </p:nvPicPr>
+        <p:blipFill>
+          <a:blip r:embed="rId2"/>
+          <a:stretch>
+            <a:fillRect/>
+          </a:stretch>
+        </p:blipFill>
+        <p:spPr>
+          <a:xfrm>
+            <a:off x="5411553" y="1287963"/>
+            <a:ext cx="4458322" cy="2972215"/>
+          </a:xfrm>
+          <a:prstGeom prst="rect">
+            <a:avLst/>
+          </a:prstGeom>
+        </p:spPr>
+      </p:pic>
     </p:spTree>
     <p:extLst>
       <p:ext uri="{BB962C8B-B14F-4D97-AF65-F5344CB8AC3E}">
@@ -11438,408 +8386,6 @@
       </p:sp>
       <p:sp>
         <p:nvSpPr>
-          <p:cNvPr id="2" name="Szövegdoboz 1">
-            <a:extLst>
-              <a:ext uri="{FF2B5EF4-FFF2-40B4-BE49-F238E27FC236}">
-                <a16:creationId xmlns:a16="http://schemas.microsoft.com/office/drawing/2014/main" id="{185943A9-DFFA-48AE-96FA-7262C2D863EE}"/>
-              </a:ext>
-            </a:extLst>
-          </p:cNvPr>
-          <p:cNvSpPr txBox="1"/>
-          <p:nvPr/>
-        </p:nvSpPr>
-        <p:spPr>
-          <a:xfrm>
-            <a:off x="4945776" y="982230"/>
-            <a:ext cx="6027937" cy="3231654"/>
-          </a:xfrm>
-          <a:prstGeom prst="rect">
-            <a:avLst/>
-          </a:prstGeom>
-          <a:noFill/>
-        </p:spPr>
-        <p:txBody>
-          <a:bodyPr wrap="square" rtlCol="0">
-            <a:spAutoFit/>
-          </a:bodyPr>
-          <a:lstStyle/>
-          <a:p>
-            <a:r>
-              <a:rPr lang="hu-HU" sz="1200" dirty="0">
-                <a:latin typeface="Monospac821 BT" panose="020B0609020202020204" pitchFamily="49" charset="0"/>
-              </a:rPr>
-              <a:t>&lt;script&gt;</a:t>
-            </a:r>
-          </a:p>
-          <a:p>
-            <a:r>
-              <a:rPr lang="hu-HU" sz="1200" dirty="0">
-                <a:latin typeface="Monospac821 BT" panose="020B0609020202020204" pitchFamily="49" charset="0"/>
-              </a:rPr>
-              <a:t>const </a:t>
-            </a:r>
-            <a:r>
-              <a:rPr lang="hu-HU" sz="1200" dirty="0" err="1">
-                <a:latin typeface="Monospac821 BT" panose="020B0609020202020204" pitchFamily="49" charset="0"/>
-              </a:rPr>
-              <a:t>buttons</a:t>
-            </a:r>
-            <a:r>
-              <a:rPr lang="hu-HU" sz="1200" dirty="0">
-                <a:latin typeface="Monospac821 BT" panose="020B0609020202020204" pitchFamily="49" charset="0"/>
-              </a:rPr>
-              <a:t> = </a:t>
-            </a:r>
-            <a:r>
-              <a:rPr lang="hu-HU" sz="1200" dirty="0" err="1">
-                <a:latin typeface="Monospac821 BT" panose="020B0609020202020204" pitchFamily="49" charset="0"/>
-              </a:rPr>
-              <a:t>document.querySelectorAll</a:t>
-            </a:r>
-            <a:r>
-              <a:rPr lang="hu-HU" sz="1200" dirty="0">
-                <a:latin typeface="Monospac821 BT" panose="020B0609020202020204" pitchFamily="49" charset="0"/>
-              </a:rPr>
-              <a:t>(".filter-</a:t>
-            </a:r>
-            <a:r>
-              <a:rPr lang="hu-HU" sz="1200" dirty="0" err="1">
-                <a:latin typeface="Monospac821 BT" panose="020B0609020202020204" pitchFamily="49" charset="0"/>
-              </a:rPr>
-              <a:t>btn</a:t>
-            </a:r>
-            <a:r>
-              <a:rPr lang="hu-HU" sz="1200" dirty="0">
-                <a:latin typeface="Monospac821 BT" panose="020B0609020202020204" pitchFamily="49" charset="0"/>
-              </a:rPr>
-              <a:t>");</a:t>
-            </a:r>
-          </a:p>
-          <a:p>
-            <a:r>
-              <a:rPr lang="hu-HU" sz="1200" dirty="0">
-                <a:latin typeface="Monospac821 BT" panose="020B0609020202020204" pitchFamily="49" charset="0"/>
-              </a:rPr>
-              <a:t>const </a:t>
-            </a:r>
-            <a:r>
-              <a:rPr lang="hu-HU" sz="1200" dirty="0" err="1">
-                <a:latin typeface="Monospac821 BT" panose="020B0609020202020204" pitchFamily="49" charset="0"/>
-              </a:rPr>
-              <a:t>cards</a:t>
-            </a:r>
-            <a:r>
-              <a:rPr lang="hu-HU" sz="1200" dirty="0">
-                <a:latin typeface="Monospac821 BT" panose="020B0609020202020204" pitchFamily="49" charset="0"/>
-              </a:rPr>
-              <a:t> = </a:t>
-            </a:r>
-            <a:r>
-              <a:rPr lang="hu-HU" sz="1200" dirty="0" err="1">
-                <a:latin typeface="Monospac821 BT" panose="020B0609020202020204" pitchFamily="49" charset="0"/>
-              </a:rPr>
-              <a:t>document.querySelectorAll</a:t>
-            </a:r>
-            <a:r>
-              <a:rPr lang="hu-HU" sz="1200" dirty="0">
-                <a:latin typeface="Monospac821 BT" panose="020B0609020202020204" pitchFamily="49" charset="0"/>
-              </a:rPr>
-              <a:t>(".</a:t>
-            </a:r>
-            <a:r>
-              <a:rPr lang="hu-HU" sz="1200" dirty="0" err="1">
-                <a:latin typeface="Monospac821 BT" panose="020B0609020202020204" pitchFamily="49" charset="0"/>
-              </a:rPr>
-              <a:t>ghost-card</a:t>
-            </a:r>
-            <a:r>
-              <a:rPr lang="hu-HU" sz="1200" dirty="0">
-                <a:latin typeface="Monospac821 BT" panose="020B0609020202020204" pitchFamily="49" charset="0"/>
-              </a:rPr>
-              <a:t>");</a:t>
-            </a:r>
-          </a:p>
-          <a:p>
-            <a:r>
-              <a:rPr lang="hu-HU" sz="1200" dirty="0">
-                <a:latin typeface="Monospac821 BT" panose="020B0609020202020204" pitchFamily="49" charset="0"/>
-              </a:rPr>
-              <a:t>const </a:t>
-            </a:r>
-            <a:r>
-              <a:rPr lang="hu-HU" sz="1200" dirty="0" err="1">
-                <a:latin typeface="Monospac821 BT" panose="020B0609020202020204" pitchFamily="49" charset="0"/>
-              </a:rPr>
-              <a:t>resetBtn</a:t>
-            </a:r>
-            <a:r>
-              <a:rPr lang="hu-HU" sz="1200" dirty="0">
-                <a:latin typeface="Monospac821 BT" panose="020B0609020202020204" pitchFamily="49" charset="0"/>
-              </a:rPr>
-              <a:t> = </a:t>
-            </a:r>
-            <a:r>
-              <a:rPr lang="hu-HU" sz="1200" dirty="0" err="1">
-                <a:latin typeface="Monospac821 BT" panose="020B0609020202020204" pitchFamily="49" charset="0"/>
-              </a:rPr>
-              <a:t>document.getElementById</a:t>
-            </a:r>
-            <a:r>
-              <a:rPr lang="hu-HU" sz="1200" dirty="0">
-                <a:latin typeface="Monospac821 BT" panose="020B0609020202020204" pitchFamily="49" charset="0"/>
-              </a:rPr>
-              <a:t>("</a:t>
-            </a:r>
-            <a:r>
-              <a:rPr lang="hu-HU" sz="1200" dirty="0" err="1">
-                <a:latin typeface="Monospac821 BT" panose="020B0609020202020204" pitchFamily="49" charset="0"/>
-              </a:rPr>
-              <a:t>resetFilter</a:t>
-            </a:r>
-            <a:r>
-              <a:rPr lang="hu-HU" sz="1200" dirty="0">
-                <a:latin typeface="Monospac821 BT" panose="020B0609020202020204" pitchFamily="49" charset="0"/>
-              </a:rPr>
-              <a:t>");</a:t>
-            </a:r>
-          </a:p>
-          <a:p>
-            <a:endParaRPr lang="hu-HU" sz="1200" dirty="0">
-              <a:latin typeface="Monospac821 BT" panose="020B0609020202020204" pitchFamily="49" charset="0"/>
-            </a:endParaRPr>
-          </a:p>
-          <a:p>
-            <a:r>
-              <a:rPr lang="hu-HU" sz="1200" dirty="0" err="1">
-                <a:latin typeface="Monospac821 BT" panose="020B0609020202020204" pitchFamily="49" charset="0"/>
-              </a:rPr>
-              <a:t>buttons.forEach</a:t>
-            </a:r>
-            <a:r>
-              <a:rPr lang="hu-HU" sz="1200" dirty="0">
-                <a:latin typeface="Monospac821 BT" panose="020B0609020202020204" pitchFamily="49" charset="0"/>
-              </a:rPr>
-              <a:t>(</a:t>
-            </a:r>
-            <a:r>
-              <a:rPr lang="hu-HU" sz="1200" dirty="0" err="1">
-                <a:latin typeface="Monospac821 BT" panose="020B0609020202020204" pitchFamily="49" charset="0"/>
-              </a:rPr>
-              <a:t>button</a:t>
-            </a:r>
-            <a:r>
-              <a:rPr lang="hu-HU" sz="1200" dirty="0">
-                <a:latin typeface="Monospac821 BT" panose="020B0609020202020204" pitchFamily="49" charset="0"/>
-              </a:rPr>
-              <a:t> =&gt; {</a:t>
-            </a:r>
-          </a:p>
-          <a:p>
-            <a:r>
-              <a:rPr lang="hu-HU" sz="1200" dirty="0">
-                <a:latin typeface="Monospac821 BT" panose="020B0609020202020204" pitchFamily="49" charset="0"/>
-              </a:rPr>
-              <a:t>    </a:t>
-            </a:r>
-            <a:r>
-              <a:rPr lang="hu-HU" sz="1200" dirty="0" err="1">
-                <a:latin typeface="Monospac821 BT" panose="020B0609020202020204" pitchFamily="49" charset="0"/>
-              </a:rPr>
-              <a:t>button.addEventListener</a:t>
-            </a:r>
-            <a:r>
-              <a:rPr lang="hu-HU" sz="1200" dirty="0">
-                <a:latin typeface="Monospac821 BT" panose="020B0609020202020204" pitchFamily="49" charset="0"/>
-              </a:rPr>
-              <a:t>("</a:t>
-            </a:r>
-            <a:r>
-              <a:rPr lang="hu-HU" sz="1200" dirty="0" err="1">
-                <a:latin typeface="Monospac821 BT" panose="020B0609020202020204" pitchFamily="49" charset="0"/>
-              </a:rPr>
-              <a:t>click</a:t>
-            </a:r>
-            <a:r>
-              <a:rPr lang="hu-HU" sz="1200" dirty="0">
-                <a:latin typeface="Monospac821 BT" panose="020B0609020202020204" pitchFamily="49" charset="0"/>
-              </a:rPr>
-              <a:t>", () =&gt; {</a:t>
-            </a:r>
-          </a:p>
-          <a:p>
-            <a:r>
-              <a:rPr lang="hu-HU" sz="1200" dirty="0">
-                <a:latin typeface="Monospac821 BT" panose="020B0609020202020204" pitchFamily="49" charset="0"/>
-              </a:rPr>
-              <a:t>        </a:t>
-            </a:r>
-          </a:p>
-          <a:p>
-            <a:r>
-              <a:rPr lang="hu-HU" sz="1200" dirty="0">
-                <a:latin typeface="Monospac821 BT" panose="020B0609020202020204" pitchFamily="49" charset="0"/>
-              </a:rPr>
-              <a:t>        // Aktív állapot váltás</a:t>
-            </a:r>
-          </a:p>
-          <a:p>
-            <a:r>
-              <a:rPr lang="hu-HU" sz="1200" dirty="0">
-                <a:latin typeface="Monospac821 BT" panose="020B0609020202020204" pitchFamily="49" charset="0"/>
-              </a:rPr>
-              <a:t>        </a:t>
-            </a:r>
-            <a:r>
-              <a:rPr lang="hu-HU" sz="1200" dirty="0" err="1">
-                <a:latin typeface="Monospac821 BT" panose="020B0609020202020204" pitchFamily="49" charset="0"/>
-              </a:rPr>
-              <a:t>button.classList.toggle</a:t>
-            </a:r>
-            <a:r>
-              <a:rPr lang="hu-HU" sz="1200" dirty="0">
-                <a:latin typeface="Monospac821 BT" panose="020B0609020202020204" pitchFamily="49" charset="0"/>
-              </a:rPr>
-              <a:t>("</a:t>
-            </a:r>
-            <a:r>
-              <a:rPr lang="hu-HU" sz="1200" dirty="0" err="1">
-                <a:latin typeface="Monospac821 BT" panose="020B0609020202020204" pitchFamily="49" charset="0"/>
-              </a:rPr>
-              <a:t>active</a:t>
-            </a:r>
-            <a:r>
-              <a:rPr lang="hu-HU" sz="1200" dirty="0">
-                <a:latin typeface="Monospac821 BT" panose="020B0609020202020204" pitchFamily="49" charset="0"/>
-              </a:rPr>
-              <a:t>");</a:t>
-            </a:r>
-          </a:p>
-          <a:p>
-            <a:r>
-              <a:rPr lang="hu-HU" sz="1200" dirty="0">
-                <a:latin typeface="Monospac821 BT" panose="020B0609020202020204" pitchFamily="49" charset="0"/>
-              </a:rPr>
-              <a:t>        </a:t>
-            </a:r>
-            <a:r>
-              <a:rPr lang="hu-HU" sz="1200" dirty="0" err="1">
-                <a:latin typeface="Monospac821 BT" panose="020B0609020202020204" pitchFamily="49" charset="0"/>
-              </a:rPr>
-              <a:t>button.classList.toggle</a:t>
-            </a:r>
-            <a:r>
-              <a:rPr lang="hu-HU" sz="1200" dirty="0">
-                <a:latin typeface="Monospac821 BT" panose="020B0609020202020204" pitchFamily="49" charset="0"/>
-              </a:rPr>
-              <a:t>("</a:t>
-            </a:r>
-            <a:r>
-              <a:rPr lang="hu-HU" sz="1200" dirty="0" err="1">
-                <a:latin typeface="Monospac821 BT" panose="020B0609020202020204" pitchFamily="49" charset="0"/>
-              </a:rPr>
-              <a:t>btn-danger</a:t>
-            </a:r>
-            <a:r>
-              <a:rPr lang="hu-HU" sz="1200" dirty="0">
-                <a:latin typeface="Monospac821 BT" panose="020B0609020202020204" pitchFamily="49" charset="0"/>
-              </a:rPr>
-              <a:t>");</a:t>
-            </a:r>
-          </a:p>
-          <a:p>
-            <a:r>
-              <a:rPr lang="hu-HU" sz="1200" dirty="0">
-                <a:latin typeface="Monospac821 BT" panose="020B0609020202020204" pitchFamily="49" charset="0"/>
-              </a:rPr>
-              <a:t>        </a:t>
-            </a:r>
-            <a:r>
-              <a:rPr lang="hu-HU" sz="1200" dirty="0" err="1">
-                <a:latin typeface="Monospac821 BT" panose="020B0609020202020204" pitchFamily="49" charset="0"/>
-              </a:rPr>
-              <a:t>button.classList.toggle</a:t>
-            </a:r>
-            <a:r>
-              <a:rPr lang="hu-HU" sz="1200" dirty="0">
-                <a:latin typeface="Monospac821 BT" panose="020B0609020202020204" pitchFamily="49" charset="0"/>
-              </a:rPr>
-              <a:t>("</a:t>
-            </a:r>
-            <a:r>
-              <a:rPr lang="hu-HU" sz="1200" dirty="0" err="1">
-                <a:latin typeface="Monospac821 BT" panose="020B0609020202020204" pitchFamily="49" charset="0"/>
-              </a:rPr>
-              <a:t>btn</a:t>
-            </a:r>
-            <a:r>
-              <a:rPr lang="hu-HU" sz="1200" dirty="0">
-                <a:latin typeface="Monospac821 BT" panose="020B0609020202020204" pitchFamily="49" charset="0"/>
-              </a:rPr>
-              <a:t>-outline-</a:t>
-            </a:r>
-            <a:r>
-              <a:rPr lang="hu-HU" sz="1200" dirty="0" err="1">
-                <a:latin typeface="Monospac821 BT" panose="020B0609020202020204" pitchFamily="49" charset="0"/>
-              </a:rPr>
-              <a:t>danger</a:t>
-            </a:r>
-            <a:r>
-              <a:rPr lang="hu-HU" sz="1200" dirty="0">
-                <a:latin typeface="Monospac821 BT" panose="020B0609020202020204" pitchFamily="49" charset="0"/>
-              </a:rPr>
-              <a:t>");</a:t>
-            </a:r>
-          </a:p>
-          <a:p>
-            <a:endParaRPr lang="hu-HU" sz="1200" dirty="0">
-              <a:latin typeface="Monospac821 BT" panose="020B0609020202020204" pitchFamily="49" charset="0"/>
-            </a:endParaRPr>
-          </a:p>
-          <a:p>
-            <a:r>
-              <a:rPr lang="hu-HU" sz="1200" dirty="0">
-                <a:latin typeface="Monospac821 BT" panose="020B0609020202020204" pitchFamily="49" charset="0"/>
-              </a:rPr>
-              <a:t>        </a:t>
-            </a:r>
-            <a:r>
-              <a:rPr lang="hu-HU" sz="1200" dirty="0" err="1">
-                <a:latin typeface="Monospac821 BT" panose="020B0609020202020204" pitchFamily="49" charset="0"/>
-              </a:rPr>
-              <a:t>applyFilters</a:t>
-            </a:r>
-            <a:r>
-              <a:rPr lang="hu-HU" sz="1200" dirty="0">
-                <a:latin typeface="Monospac821 BT" panose="020B0609020202020204" pitchFamily="49" charset="0"/>
-              </a:rPr>
-              <a:t>();</a:t>
-            </a:r>
-          </a:p>
-          <a:p>
-            <a:r>
-              <a:rPr lang="hu-HU" sz="1200" dirty="0">
-                <a:latin typeface="Monospac821 BT" panose="020B0609020202020204" pitchFamily="49" charset="0"/>
-              </a:rPr>
-              <a:t>    });</a:t>
-            </a:r>
-          </a:p>
-          <a:p>
-            <a:r>
-              <a:rPr lang="hu-HU" sz="1200" dirty="0">
-                <a:latin typeface="Monospac821 BT" panose="020B0609020202020204" pitchFamily="49" charset="0"/>
-              </a:rPr>
-              <a:t>});</a:t>
-            </a:r>
-          </a:p>
-          <a:p>
-            <a:endParaRPr lang="hu-HU" sz="1200" dirty="0">
-              <a:latin typeface="Monospac821 BT" panose="020B0609020202020204" pitchFamily="49" charset="0"/>
-            </a:endParaRPr>
-          </a:p>
-        </p:txBody>
-      </p:sp>
-      <p:sp>
-        <p:nvSpPr>
           <p:cNvPr id="5" name="Szövegdoboz 4">
             <a:extLst>
               <a:ext uri="{FF2B5EF4-FFF2-40B4-BE49-F238E27FC236}">
@@ -11982,6 +8528,36 @@
           </a:p>
         </p:txBody>
       </p:sp>
+      <p:pic>
+        <p:nvPicPr>
+          <p:cNvPr id="8" name="Kép 7">
+            <a:extLst>
+              <a:ext uri="{FF2B5EF4-FFF2-40B4-BE49-F238E27FC236}">
+                <a16:creationId xmlns:a16="http://schemas.microsoft.com/office/drawing/2014/main" id="{501AE01C-A14C-4890-896E-2806C492BBB2}"/>
+              </a:ext>
+            </a:extLst>
+          </p:cNvPr>
+          <p:cNvPicPr>
+            <a:picLocks noChangeAspect="1"/>
+          </p:cNvPicPr>
+          <p:nvPr/>
+        </p:nvPicPr>
+        <p:blipFill>
+          <a:blip r:embed="rId2"/>
+          <a:stretch>
+            <a:fillRect/>
+          </a:stretch>
+        </p:blipFill>
+        <p:spPr>
+          <a:xfrm>
+            <a:off x="5319819" y="1356966"/>
+            <a:ext cx="4458322" cy="2972215"/>
+          </a:xfrm>
+          <a:prstGeom prst="rect">
+            <a:avLst/>
+          </a:prstGeom>
+        </p:spPr>
+      </p:pic>
     </p:spTree>
     <p:extLst>
       <p:ext uri="{BB962C8B-B14F-4D97-AF65-F5344CB8AC3E}">
@@ -12152,716 +8728,6 @@
       </p:sp>
       <p:sp>
         <p:nvSpPr>
-          <p:cNvPr id="2" name="Szövegdoboz 1">
-            <a:extLst>
-              <a:ext uri="{FF2B5EF4-FFF2-40B4-BE49-F238E27FC236}">
-                <a16:creationId xmlns:a16="http://schemas.microsoft.com/office/drawing/2014/main" id="{185943A9-DFFA-48AE-96FA-7262C2D863EE}"/>
-              </a:ext>
-            </a:extLst>
-          </p:cNvPr>
-          <p:cNvSpPr txBox="1"/>
-          <p:nvPr/>
-        </p:nvSpPr>
-        <p:spPr>
-          <a:xfrm>
-            <a:off x="4936898" y="192117"/>
-            <a:ext cx="6027937" cy="5339923"/>
-          </a:xfrm>
-          <a:prstGeom prst="rect">
-            <a:avLst/>
-          </a:prstGeom>
-          <a:noFill/>
-        </p:spPr>
-        <p:txBody>
-          <a:bodyPr wrap="square" rtlCol="0">
-            <a:spAutoFit/>
-          </a:bodyPr>
-          <a:lstStyle/>
-          <a:p>
-            <a:r>
-              <a:rPr lang="hu-HU" sz="1100" dirty="0" err="1">
-                <a:latin typeface="Monospac821 BT" panose="020B0609020202020204" pitchFamily="49" charset="0"/>
-              </a:rPr>
-              <a:t>function</a:t>
-            </a:r>
-            <a:r>
-              <a:rPr lang="hu-HU" sz="1100" dirty="0">
-                <a:latin typeface="Monospac821 BT" panose="020B0609020202020204" pitchFamily="49" charset="0"/>
-              </a:rPr>
-              <a:t> </a:t>
-            </a:r>
-            <a:r>
-              <a:rPr lang="hu-HU" sz="1100" dirty="0" err="1">
-                <a:latin typeface="Monospac821 BT" panose="020B0609020202020204" pitchFamily="49" charset="0"/>
-              </a:rPr>
-              <a:t>applyFilters</a:t>
-            </a:r>
-            <a:r>
-              <a:rPr lang="hu-HU" sz="1100" dirty="0">
-                <a:latin typeface="Monospac821 BT" panose="020B0609020202020204" pitchFamily="49" charset="0"/>
-              </a:rPr>
-              <a:t>() {</a:t>
-            </a:r>
-          </a:p>
-          <a:p>
-            <a:r>
-              <a:rPr lang="hu-HU" sz="1100" dirty="0">
-                <a:latin typeface="Monospac821 BT" panose="020B0609020202020204" pitchFamily="49" charset="0"/>
-              </a:rPr>
-              <a:t>    const </a:t>
-            </a:r>
-            <a:r>
-              <a:rPr lang="hu-HU" sz="1100" dirty="0" err="1">
-                <a:latin typeface="Monospac821 BT" panose="020B0609020202020204" pitchFamily="49" charset="0"/>
-              </a:rPr>
-              <a:t>activeFilters</a:t>
-            </a:r>
-            <a:r>
-              <a:rPr lang="hu-HU" sz="1100" dirty="0">
-                <a:latin typeface="Monospac821 BT" panose="020B0609020202020204" pitchFamily="49" charset="0"/>
-              </a:rPr>
-              <a:t> = </a:t>
-            </a:r>
-            <a:r>
-              <a:rPr lang="hu-HU" sz="1100" dirty="0" err="1">
-                <a:latin typeface="Monospac821 BT" panose="020B0609020202020204" pitchFamily="49" charset="0"/>
-              </a:rPr>
-              <a:t>Array.from</a:t>
-            </a:r>
-            <a:r>
-              <a:rPr lang="hu-HU" sz="1100" dirty="0">
-                <a:latin typeface="Monospac821 BT" panose="020B0609020202020204" pitchFamily="49" charset="0"/>
-              </a:rPr>
-              <a:t>(</a:t>
-            </a:r>
-            <a:r>
-              <a:rPr lang="hu-HU" sz="1100" dirty="0" err="1">
-                <a:latin typeface="Monospac821 BT" panose="020B0609020202020204" pitchFamily="49" charset="0"/>
-              </a:rPr>
-              <a:t>document.querySelectorAll</a:t>
-            </a:r>
-            <a:r>
-              <a:rPr lang="hu-HU" sz="1100" dirty="0">
-                <a:latin typeface="Monospac821 BT" panose="020B0609020202020204" pitchFamily="49" charset="0"/>
-              </a:rPr>
-              <a:t>(".filter-</a:t>
-            </a:r>
-            <a:r>
-              <a:rPr lang="hu-HU" sz="1100" dirty="0" err="1">
-                <a:latin typeface="Monospac821 BT" panose="020B0609020202020204" pitchFamily="49" charset="0"/>
-              </a:rPr>
-              <a:t>btn.active</a:t>
-            </a:r>
-            <a:r>
-              <a:rPr lang="hu-HU" sz="1100" dirty="0">
-                <a:latin typeface="Monospac821 BT" panose="020B0609020202020204" pitchFamily="49" charset="0"/>
-              </a:rPr>
-              <a:t>"))</a:t>
-            </a:r>
-          </a:p>
-          <a:p>
-            <a:r>
-              <a:rPr lang="hu-HU" sz="1100" dirty="0">
-                <a:latin typeface="Monospac821 BT" panose="020B0609020202020204" pitchFamily="49" charset="0"/>
-              </a:rPr>
-              <a:t>        .map(</a:t>
-            </a:r>
-            <a:r>
-              <a:rPr lang="hu-HU" sz="1100" dirty="0" err="1">
-                <a:latin typeface="Monospac821 BT" panose="020B0609020202020204" pitchFamily="49" charset="0"/>
-              </a:rPr>
-              <a:t>btn</a:t>
-            </a:r>
-            <a:r>
-              <a:rPr lang="hu-HU" sz="1100" dirty="0">
-                <a:latin typeface="Monospac821 BT" panose="020B0609020202020204" pitchFamily="49" charset="0"/>
-              </a:rPr>
-              <a:t> =&gt; </a:t>
-            </a:r>
-            <a:r>
-              <a:rPr lang="hu-HU" sz="1100" dirty="0" err="1">
-                <a:latin typeface="Monospac821 BT" panose="020B0609020202020204" pitchFamily="49" charset="0"/>
-              </a:rPr>
-              <a:t>btn.getAttribute</a:t>
-            </a:r>
-            <a:r>
-              <a:rPr lang="hu-HU" sz="1100" dirty="0">
-                <a:latin typeface="Monospac821 BT" panose="020B0609020202020204" pitchFamily="49" charset="0"/>
-              </a:rPr>
-              <a:t>("</a:t>
-            </a:r>
-            <a:r>
-              <a:rPr lang="hu-HU" sz="1100" dirty="0" err="1">
-                <a:latin typeface="Monospac821 BT" panose="020B0609020202020204" pitchFamily="49" charset="0"/>
-              </a:rPr>
-              <a:t>data</a:t>
-            </a:r>
-            <a:r>
-              <a:rPr lang="hu-HU" sz="1100" dirty="0">
-                <a:latin typeface="Monospac821 BT" panose="020B0609020202020204" pitchFamily="49" charset="0"/>
-              </a:rPr>
-              <a:t>-filter"));</a:t>
-            </a:r>
-          </a:p>
-          <a:p>
-            <a:endParaRPr lang="hu-HU" sz="1100" dirty="0">
-              <a:latin typeface="Monospac821 BT" panose="020B0609020202020204" pitchFamily="49" charset="0"/>
-            </a:endParaRPr>
-          </a:p>
-          <a:p>
-            <a:r>
-              <a:rPr lang="hu-HU" sz="1100" dirty="0">
-                <a:latin typeface="Monospac821 BT" panose="020B0609020202020204" pitchFamily="49" charset="0"/>
-              </a:rPr>
-              <a:t>    </a:t>
-            </a:r>
-            <a:r>
-              <a:rPr lang="hu-HU" sz="1100" dirty="0" err="1">
-                <a:latin typeface="Monospac821 BT" panose="020B0609020202020204" pitchFamily="49" charset="0"/>
-              </a:rPr>
-              <a:t>cards.forEach</a:t>
-            </a:r>
-            <a:r>
-              <a:rPr lang="hu-HU" sz="1100" dirty="0">
-                <a:latin typeface="Monospac821 BT" panose="020B0609020202020204" pitchFamily="49" charset="0"/>
-              </a:rPr>
-              <a:t>(</a:t>
-            </a:r>
-            <a:r>
-              <a:rPr lang="hu-HU" sz="1100" dirty="0" err="1">
-                <a:latin typeface="Monospac821 BT" panose="020B0609020202020204" pitchFamily="49" charset="0"/>
-              </a:rPr>
-              <a:t>card</a:t>
-            </a:r>
-            <a:r>
-              <a:rPr lang="hu-HU" sz="1100" dirty="0">
-                <a:latin typeface="Monospac821 BT" panose="020B0609020202020204" pitchFamily="49" charset="0"/>
-              </a:rPr>
-              <a:t> =&gt; {</a:t>
-            </a:r>
-          </a:p>
-          <a:p>
-            <a:r>
-              <a:rPr lang="hu-HU" sz="1100" dirty="0">
-                <a:latin typeface="Monospac821 BT" panose="020B0609020202020204" pitchFamily="49" charset="0"/>
-              </a:rPr>
-              <a:t>        const </a:t>
-            </a:r>
-            <a:r>
-              <a:rPr lang="hu-HU" sz="1100" dirty="0" err="1">
-                <a:latin typeface="Monospac821 BT" panose="020B0609020202020204" pitchFamily="49" charset="0"/>
-              </a:rPr>
-              <a:t>evidences</a:t>
-            </a:r>
-            <a:r>
-              <a:rPr lang="hu-HU" sz="1100" dirty="0">
-                <a:latin typeface="Monospac821 BT" panose="020B0609020202020204" pitchFamily="49" charset="0"/>
-              </a:rPr>
-              <a:t> = </a:t>
-            </a:r>
-            <a:r>
-              <a:rPr lang="hu-HU" sz="1100" dirty="0" err="1">
-                <a:latin typeface="Monospac821 BT" panose="020B0609020202020204" pitchFamily="49" charset="0"/>
-              </a:rPr>
-              <a:t>card.getAttribute</a:t>
-            </a:r>
-            <a:r>
-              <a:rPr lang="hu-HU" sz="1100" dirty="0">
-                <a:latin typeface="Monospac821 BT" panose="020B0609020202020204" pitchFamily="49" charset="0"/>
-              </a:rPr>
-              <a:t>("</a:t>
-            </a:r>
-            <a:r>
-              <a:rPr lang="hu-HU" sz="1100" dirty="0" err="1">
-                <a:latin typeface="Monospac821 BT" panose="020B0609020202020204" pitchFamily="49" charset="0"/>
-              </a:rPr>
-              <a:t>data-evidence</a:t>
-            </a:r>
-            <a:r>
-              <a:rPr lang="hu-HU" sz="1100" dirty="0">
-                <a:latin typeface="Monospac821 BT" panose="020B0609020202020204" pitchFamily="49" charset="0"/>
-              </a:rPr>
-              <a:t>");</a:t>
-            </a:r>
-          </a:p>
-          <a:p>
-            <a:endParaRPr lang="hu-HU" sz="1100" dirty="0">
-              <a:latin typeface="Monospac821 BT" panose="020B0609020202020204" pitchFamily="49" charset="0"/>
-            </a:endParaRPr>
-          </a:p>
-          <a:p>
-            <a:r>
-              <a:rPr lang="hu-HU" sz="1100" dirty="0">
-                <a:latin typeface="Monospac821 BT" panose="020B0609020202020204" pitchFamily="49" charset="0"/>
-              </a:rPr>
-              <a:t>        const </a:t>
-            </a:r>
-            <a:r>
-              <a:rPr lang="hu-HU" sz="1100" dirty="0" err="1">
-                <a:latin typeface="Monospac821 BT" panose="020B0609020202020204" pitchFamily="49" charset="0"/>
-              </a:rPr>
-              <a:t>matches</a:t>
-            </a:r>
-            <a:r>
-              <a:rPr lang="hu-HU" sz="1100" dirty="0">
-                <a:latin typeface="Monospac821 BT" panose="020B0609020202020204" pitchFamily="49" charset="0"/>
-              </a:rPr>
-              <a:t> = </a:t>
-            </a:r>
-            <a:r>
-              <a:rPr lang="hu-HU" sz="1100" dirty="0" err="1">
-                <a:latin typeface="Monospac821 BT" panose="020B0609020202020204" pitchFamily="49" charset="0"/>
-              </a:rPr>
-              <a:t>activeFilters.every</a:t>
-            </a:r>
-            <a:r>
-              <a:rPr lang="hu-HU" sz="1100" dirty="0">
-                <a:latin typeface="Monospac821 BT" panose="020B0609020202020204" pitchFamily="49" charset="0"/>
-              </a:rPr>
-              <a:t>(filter =&gt; </a:t>
-            </a:r>
-          </a:p>
-          <a:p>
-            <a:r>
-              <a:rPr lang="hu-HU" sz="1100" dirty="0">
-                <a:latin typeface="Monospac821 BT" panose="020B0609020202020204" pitchFamily="49" charset="0"/>
-              </a:rPr>
-              <a:t>            </a:t>
-            </a:r>
-            <a:r>
-              <a:rPr lang="hu-HU" sz="1100" dirty="0" err="1">
-                <a:latin typeface="Monospac821 BT" panose="020B0609020202020204" pitchFamily="49" charset="0"/>
-              </a:rPr>
-              <a:t>evidences.includes</a:t>
-            </a:r>
-            <a:r>
-              <a:rPr lang="hu-HU" sz="1100" dirty="0">
-                <a:latin typeface="Monospac821 BT" panose="020B0609020202020204" pitchFamily="49" charset="0"/>
-              </a:rPr>
-              <a:t>(filter)</a:t>
-            </a:r>
-          </a:p>
-          <a:p>
-            <a:r>
-              <a:rPr lang="hu-HU" sz="1100" dirty="0">
-                <a:latin typeface="Monospac821 BT" panose="020B0609020202020204" pitchFamily="49" charset="0"/>
-              </a:rPr>
-              <a:t>        );</a:t>
-            </a:r>
-          </a:p>
-          <a:p>
-            <a:endParaRPr lang="hu-HU" sz="1100" dirty="0">
-              <a:latin typeface="Monospac821 BT" panose="020B0609020202020204" pitchFamily="49" charset="0"/>
-            </a:endParaRPr>
-          </a:p>
-          <a:p>
-            <a:r>
-              <a:rPr lang="hu-HU" sz="1100" dirty="0">
-                <a:latin typeface="Monospac821 BT" panose="020B0609020202020204" pitchFamily="49" charset="0"/>
-              </a:rPr>
-              <a:t>        </a:t>
-            </a:r>
-            <a:r>
-              <a:rPr lang="hu-HU" sz="1100" dirty="0" err="1">
-                <a:latin typeface="Monospac821 BT" panose="020B0609020202020204" pitchFamily="49" charset="0"/>
-              </a:rPr>
-              <a:t>if</a:t>
-            </a:r>
-            <a:r>
-              <a:rPr lang="hu-HU" sz="1100" dirty="0">
-                <a:latin typeface="Monospac821 BT" panose="020B0609020202020204" pitchFamily="49" charset="0"/>
-              </a:rPr>
-              <a:t> (</a:t>
-            </a:r>
-            <a:r>
-              <a:rPr lang="hu-HU" sz="1100" dirty="0" err="1">
-                <a:latin typeface="Monospac821 BT" panose="020B0609020202020204" pitchFamily="49" charset="0"/>
-              </a:rPr>
-              <a:t>activeFilters.length</a:t>
-            </a:r>
-            <a:r>
-              <a:rPr lang="hu-HU" sz="1100" dirty="0">
-                <a:latin typeface="Monospac821 BT" panose="020B0609020202020204" pitchFamily="49" charset="0"/>
-              </a:rPr>
-              <a:t> === 0 || </a:t>
-            </a:r>
-            <a:r>
-              <a:rPr lang="hu-HU" sz="1100" dirty="0" err="1">
-                <a:latin typeface="Monospac821 BT" panose="020B0609020202020204" pitchFamily="49" charset="0"/>
-              </a:rPr>
-              <a:t>matches</a:t>
-            </a:r>
-            <a:r>
-              <a:rPr lang="hu-HU" sz="1100" dirty="0">
-                <a:latin typeface="Monospac821 BT" panose="020B0609020202020204" pitchFamily="49" charset="0"/>
-              </a:rPr>
-              <a:t>) {</a:t>
-            </a:r>
-          </a:p>
-          <a:p>
-            <a:r>
-              <a:rPr lang="hu-HU" sz="1100" dirty="0">
-                <a:latin typeface="Monospac821 BT" panose="020B0609020202020204" pitchFamily="49" charset="0"/>
-              </a:rPr>
-              <a:t>            </a:t>
-            </a:r>
-            <a:r>
-              <a:rPr lang="hu-HU" sz="1100" dirty="0" err="1">
-                <a:latin typeface="Monospac821 BT" panose="020B0609020202020204" pitchFamily="49" charset="0"/>
-              </a:rPr>
-              <a:t>card.style.display</a:t>
-            </a:r>
-            <a:r>
-              <a:rPr lang="hu-HU" sz="1100" dirty="0">
-                <a:latin typeface="Monospac821 BT" panose="020B0609020202020204" pitchFamily="49" charset="0"/>
-              </a:rPr>
-              <a:t> = "</a:t>
-            </a:r>
-            <a:r>
-              <a:rPr lang="hu-HU" sz="1100" dirty="0" err="1">
-                <a:latin typeface="Monospac821 BT" panose="020B0609020202020204" pitchFamily="49" charset="0"/>
-              </a:rPr>
-              <a:t>block</a:t>
-            </a:r>
-            <a:r>
-              <a:rPr lang="hu-HU" sz="1100" dirty="0">
-                <a:latin typeface="Monospac821 BT" panose="020B0609020202020204" pitchFamily="49" charset="0"/>
-              </a:rPr>
-              <a:t>";</a:t>
-            </a:r>
-          </a:p>
-          <a:p>
-            <a:r>
-              <a:rPr lang="hu-HU" sz="1100" dirty="0">
-                <a:latin typeface="Monospac821 BT" panose="020B0609020202020204" pitchFamily="49" charset="0"/>
-              </a:rPr>
-              <a:t>        } </a:t>
-            </a:r>
-            <a:r>
-              <a:rPr lang="hu-HU" sz="1100" dirty="0" err="1">
-                <a:latin typeface="Monospac821 BT" panose="020B0609020202020204" pitchFamily="49" charset="0"/>
-              </a:rPr>
-              <a:t>else</a:t>
-            </a:r>
-            <a:r>
-              <a:rPr lang="hu-HU" sz="1100" dirty="0">
-                <a:latin typeface="Monospac821 BT" panose="020B0609020202020204" pitchFamily="49" charset="0"/>
-              </a:rPr>
-              <a:t> {</a:t>
-            </a:r>
-          </a:p>
-          <a:p>
-            <a:r>
-              <a:rPr lang="hu-HU" sz="1100" dirty="0">
-                <a:latin typeface="Monospac821 BT" panose="020B0609020202020204" pitchFamily="49" charset="0"/>
-              </a:rPr>
-              <a:t>            </a:t>
-            </a:r>
-            <a:r>
-              <a:rPr lang="hu-HU" sz="1100" dirty="0" err="1">
-                <a:latin typeface="Monospac821 BT" panose="020B0609020202020204" pitchFamily="49" charset="0"/>
-              </a:rPr>
-              <a:t>card.style.display</a:t>
-            </a:r>
-            <a:r>
-              <a:rPr lang="hu-HU" sz="1100" dirty="0">
-                <a:latin typeface="Monospac821 BT" panose="020B0609020202020204" pitchFamily="49" charset="0"/>
-              </a:rPr>
-              <a:t> = "</a:t>
-            </a:r>
-            <a:r>
-              <a:rPr lang="hu-HU" sz="1100" dirty="0" err="1">
-                <a:latin typeface="Monospac821 BT" panose="020B0609020202020204" pitchFamily="49" charset="0"/>
-              </a:rPr>
-              <a:t>none</a:t>
-            </a:r>
-            <a:r>
-              <a:rPr lang="hu-HU" sz="1100" dirty="0">
-                <a:latin typeface="Monospac821 BT" panose="020B0609020202020204" pitchFamily="49" charset="0"/>
-              </a:rPr>
-              <a:t>";</a:t>
-            </a:r>
-          </a:p>
-          <a:p>
-            <a:r>
-              <a:rPr lang="hu-HU" sz="1100" dirty="0">
-                <a:latin typeface="Monospac821 BT" panose="020B0609020202020204" pitchFamily="49" charset="0"/>
-              </a:rPr>
-              <a:t>        }</a:t>
-            </a:r>
-          </a:p>
-          <a:p>
-            <a:r>
-              <a:rPr lang="hu-HU" sz="1100" dirty="0">
-                <a:latin typeface="Monospac821 BT" panose="020B0609020202020204" pitchFamily="49" charset="0"/>
-              </a:rPr>
-              <a:t>    });</a:t>
-            </a:r>
-          </a:p>
-          <a:p>
-            <a:r>
-              <a:rPr lang="hu-HU" sz="1100" dirty="0">
-                <a:latin typeface="Monospac821 BT" panose="020B0609020202020204" pitchFamily="49" charset="0"/>
-              </a:rPr>
-              <a:t>}</a:t>
-            </a:r>
-          </a:p>
-          <a:p>
-            <a:endParaRPr lang="hu-HU" sz="1100" dirty="0">
-              <a:latin typeface="Monospac821 BT" panose="020B0609020202020204" pitchFamily="49" charset="0"/>
-            </a:endParaRPr>
-          </a:p>
-          <a:p>
-            <a:r>
-              <a:rPr lang="hu-HU" sz="1100" dirty="0" err="1">
-                <a:latin typeface="Monospac821 BT" panose="020B0609020202020204" pitchFamily="49" charset="0"/>
-              </a:rPr>
-              <a:t>resetBtn.addEventListener</a:t>
-            </a:r>
-            <a:r>
-              <a:rPr lang="hu-HU" sz="1100" dirty="0">
-                <a:latin typeface="Monospac821 BT" panose="020B0609020202020204" pitchFamily="49" charset="0"/>
-              </a:rPr>
-              <a:t>("</a:t>
-            </a:r>
-            <a:r>
-              <a:rPr lang="hu-HU" sz="1100" dirty="0" err="1">
-                <a:latin typeface="Monospac821 BT" panose="020B0609020202020204" pitchFamily="49" charset="0"/>
-              </a:rPr>
-              <a:t>click</a:t>
-            </a:r>
-            <a:r>
-              <a:rPr lang="hu-HU" sz="1100" dirty="0">
-                <a:latin typeface="Monospac821 BT" panose="020B0609020202020204" pitchFamily="49" charset="0"/>
-              </a:rPr>
-              <a:t>", () =&gt; {</a:t>
-            </a:r>
-          </a:p>
-          <a:p>
-            <a:r>
-              <a:rPr lang="hu-HU" sz="1100" dirty="0">
-                <a:latin typeface="Monospac821 BT" panose="020B0609020202020204" pitchFamily="49" charset="0"/>
-              </a:rPr>
-              <a:t>    </a:t>
-            </a:r>
-            <a:r>
-              <a:rPr lang="hu-HU" sz="1100" dirty="0" err="1">
-                <a:latin typeface="Monospac821 BT" panose="020B0609020202020204" pitchFamily="49" charset="0"/>
-              </a:rPr>
-              <a:t>buttons.forEach</a:t>
-            </a:r>
-            <a:r>
-              <a:rPr lang="hu-HU" sz="1100" dirty="0">
-                <a:latin typeface="Monospac821 BT" panose="020B0609020202020204" pitchFamily="49" charset="0"/>
-              </a:rPr>
-              <a:t>(</a:t>
-            </a:r>
-            <a:r>
-              <a:rPr lang="hu-HU" sz="1100" dirty="0" err="1">
-                <a:latin typeface="Monospac821 BT" panose="020B0609020202020204" pitchFamily="49" charset="0"/>
-              </a:rPr>
-              <a:t>btn</a:t>
-            </a:r>
-            <a:r>
-              <a:rPr lang="hu-HU" sz="1100" dirty="0">
-                <a:latin typeface="Monospac821 BT" panose="020B0609020202020204" pitchFamily="49" charset="0"/>
-              </a:rPr>
-              <a:t> =&gt; {</a:t>
-            </a:r>
-          </a:p>
-          <a:p>
-            <a:r>
-              <a:rPr lang="hu-HU" sz="1100" dirty="0">
-                <a:latin typeface="Monospac821 BT" panose="020B0609020202020204" pitchFamily="49" charset="0"/>
-              </a:rPr>
-              <a:t>        </a:t>
-            </a:r>
-            <a:r>
-              <a:rPr lang="hu-HU" sz="1100" dirty="0" err="1">
-                <a:latin typeface="Monospac821 BT" panose="020B0609020202020204" pitchFamily="49" charset="0"/>
-              </a:rPr>
-              <a:t>btn.classList.remove</a:t>
-            </a:r>
-            <a:r>
-              <a:rPr lang="hu-HU" sz="1100" dirty="0">
-                <a:latin typeface="Monospac821 BT" panose="020B0609020202020204" pitchFamily="49" charset="0"/>
-              </a:rPr>
-              <a:t>("</a:t>
-            </a:r>
-            <a:r>
-              <a:rPr lang="hu-HU" sz="1100" dirty="0" err="1">
-                <a:latin typeface="Monospac821 BT" panose="020B0609020202020204" pitchFamily="49" charset="0"/>
-              </a:rPr>
-              <a:t>active</a:t>
-            </a:r>
-            <a:r>
-              <a:rPr lang="hu-HU" sz="1100" dirty="0">
-                <a:latin typeface="Monospac821 BT" panose="020B0609020202020204" pitchFamily="49" charset="0"/>
-              </a:rPr>
-              <a:t>", "</a:t>
-            </a:r>
-            <a:r>
-              <a:rPr lang="hu-HU" sz="1100" dirty="0" err="1">
-                <a:latin typeface="Monospac821 BT" panose="020B0609020202020204" pitchFamily="49" charset="0"/>
-              </a:rPr>
-              <a:t>btn-danger</a:t>
-            </a:r>
-            <a:r>
-              <a:rPr lang="hu-HU" sz="1100" dirty="0">
-                <a:latin typeface="Monospac821 BT" panose="020B0609020202020204" pitchFamily="49" charset="0"/>
-              </a:rPr>
-              <a:t>");</a:t>
-            </a:r>
-          </a:p>
-          <a:p>
-            <a:r>
-              <a:rPr lang="hu-HU" sz="1100" dirty="0">
-                <a:latin typeface="Monospac821 BT" panose="020B0609020202020204" pitchFamily="49" charset="0"/>
-              </a:rPr>
-              <a:t>        </a:t>
-            </a:r>
-            <a:r>
-              <a:rPr lang="hu-HU" sz="1100" dirty="0" err="1">
-                <a:latin typeface="Monospac821 BT" panose="020B0609020202020204" pitchFamily="49" charset="0"/>
-              </a:rPr>
-              <a:t>btn.classList.add</a:t>
-            </a:r>
-            <a:r>
-              <a:rPr lang="hu-HU" sz="1100" dirty="0">
-                <a:latin typeface="Monospac821 BT" panose="020B0609020202020204" pitchFamily="49" charset="0"/>
-              </a:rPr>
-              <a:t>("</a:t>
-            </a:r>
-            <a:r>
-              <a:rPr lang="hu-HU" sz="1100" dirty="0" err="1">
-                <a:latin typeface="Monospac821 BT" panose="020B0609020202020204" pitchFamily="49" charset="0"/>
-              </a:rPr>
-              <a:t>btn</a:t>
-            </a:r>
-            <a:r>
-              <a:rPr lang="hu-HU" sz="1100" dirty="0">
-                <a:latin typeface="Monospac821 BT" panose="020B0609020202020204" pitchFamily="49" charset="0"/>
-              </a:rPr>
-              <a:t>-outline-</a:t>
-            </a:r>
-            <a:r>
-              <a:rPr lang="hu-HU" sz="1100" dirty="0" err="1">
-                <a:latin typeface="Monospac821 BT" panose="020B0609020202020204" pitchFamily="49" charset="0"/>
-              </a:rPr>
-              <a:t>danger</a:t>
-            </a:r>
-            <a:r>
-              <a:rPr lang="hu-HU" sz="1100" dirty="0">
-                <a:latin typeface="Monospac821 BT" panose="020B0609020202020204" pitchFamily="49" charset="0"/>
-              </a:rPr>
-              <a:t>");</a:t>
-            </a:r>
-          </a:p>
-          <a:p>
-            <a:r>
-              <a:rPr lang="hu-HU" sz="1100" dirty="0">
-                <a:latin typeface="Monospac821 BT" panose="020B0609020202020204" pitchFamily="49" charset="0"/>
-              </a:rPr>
-              <a:t>    });</a:t>
-            </a:r>
-          </a:p>
-          <a:p>
-            <a:endParaRPr lang="hu-HU" sz="1100" dirty="0">
-              <a:latin typeface="Monospac821 BT" panose="020B0609020202020204" pitchFamily="49" charset="0"/>
-            </a:endParaRPr>
-          </a:p>
-          <a:p>
-            <a:r>
-              <a:rPr lang="hu-HU" sz="1100" dirty="0">
-                <a:latin typeface="Monospac821 BT" panose="020B0609020202020204" pitchFamily="49" charset="0"/>
-              </a:rPr>
-              <a:t>    </a:t>
-            </a:r>
-            <a:r>
-              <a:rPr lang="hu-HU" sz="1100" dirty="0" err="1">
-                <a:latin typeface="Monospac821 BT" panose="020B0609020202020204" pitchFamily="49" charset="0"/>
-              </a:rPr>
-              <a:t>cards.forEach</a:t>
-            </a:r>
-            <a:r>
-              <a:rPr lang="hu-HU" sz="1100" dirty="0">
-                <a:latin typeface="Monospac821 BT" panose="020B0609020202020204" pitchFamily="49" charset="0"/>
-              </a:rPr>
-              <a:t>(</a:t>
-            </a:r>
-            <a:r>
-              <a:rPr lang="hu-HU" sz="1100" dirty="0" err="1">
-                <a:latin typeface="Monospac821 BT" panose="020B0609020202020204" pitchFamily="49" charset="0"/>
-              </a:rPr>
-              <a:t>card</a:t>
-            </a:r>
-            <a:r>
-              <a:rPr lang="hu-HU" sz="1100" dirty="0">
-                <a:latin typeface="Monospac821 BT" panose="020B0609020202020204" pitchFamily="49" charset="0"/>
-              </a:rPr>
-              <a:t> =&gt; {</a:t>
-            </a:r>
-          </a:p>
-          <a:p>
-            <a:r>
-              <a:rPr lang="hu-HU" sz="1100" dirty="0">
-                <a:latin typeface="Monospac821 BT" panose="020B0609020202020204" pitchFamily="49" charset="0"/>
-              </a:rPr>
-              <a:t>        </a:t>
-            </a:r>
-            <a:r>
-              <a:rPr lang="hu-HU" sz="1100" dirty="0" err="1">
-                <a:latin typeface="Monospac821 BT" panose="020B0609020202020204" pitchFamily="49" charset="0"/>
-              </a:rPr>
-              <a:t>card.style.display</a:t>
-            </a:r>
-            <a:r>
-              <a:rPr lang="hu-HU" sz="1100" dirty="0">
-                <a:latin typeface="Monospac821 BT" panose="020B0609020202020204" pitchFamily="49" charset="0"/>
-              </a:rPr>
-              <a:t> = "</a:t>
-            </a:r>
-            <a:r>
-              <a:rPr lang="hu-HU" sz="1100" dirty="0" err="1">
-                <a:latin typeface="Monospac821 BT" panose="020B0609020202020204" pitchFamily="49" charset="0"/>
-              </a:rPr>
-              <a:t>block</a:t>
-            </a:r>
-            <a:r>
-              <a:rPr lang="hu-HU" sz="1100" dirty="0">
-                <a:latin typeface="Monospac821 BT" panose="020B0609020202020204" pitchFamily="49" charset="0"/>
-              </a:rPr>
-              <a:t>";</a:t>
-            </a:r>
-          </a:p>
-          <a:p>
-            <a:r>
-              <a:rPr lang="hu-HU" sz="1100" dirty="0">
-                <a:latin typeface="Monospac821 BT" panose="020B0609020202020204" pitchFamily="49" charset="0"/>
-              </a:rPr>
-              <a:t>    });</a:t>
-            </a:r>
-          </a:p>
-          <a:p>
-            <a:r>
-              <a:rPr lang="hu-HU" sz="1100" dirty="0">
-                <a:latin typeface="Monospac821 BT" panose="020B0609020202020204" pitchFamily="49" charset="0"/>
-              </a:rPr>
-              <a:t>});</a:t>
-            </a:r>
-          </a:p>
-          <a:p>
-            <a:r>
-              <a:rPr lang="hu-HU" sz="1100" dirty="0">
-                <a:latin typeface="Monospac821 BT" panose="020B0609020202020204" pitchFamily="49" charset="0"/>
-              </a:rPr>
-              <a:t>&lt;/script&gt;</a:t>
-            </a:r>
-          </a:p>
-        </p:txBody>
-      </p:sp>
-      <p:sp>
-        <p:nvSpPr>
           <p:cNvPr id="8" name="Szövegdoboz 7">
             <a:extLst>
               <a:ext uri="{FF2B5EF4-FFF2-40B4-BE49-F238E27FC236}">
@@ -13012,6 +8878,36 @@
           </a:p>
         </p:txBody>
       </p:sp>
+      <p:pic>
+        <p:nvPicPr>
+          <p:cNvPr id="5" name="Kép 4">
+            <a:extLst>
+              <a:ext uri="{FF2B5EF4-FFF2-40B4-BE49-F238E27FC236}">
+                <a16:creationId xmlns:a16="http://schemas.microsoft.com/office/drawing/2014/main" id="{356A85A3-2068-479D-8EA0-46EE2FBAB024}"/>
+              </a:ext>
+            </a:extLst>
+          </p:cNvPr>
+          <p:cNvPicPr>
+            <a:picLocks noChangeAspect="1"/>
+          </p:cNvPicPr>
+          <p:nvPr/>
+        </p:nvPicPr>
+        <p:blipFill>
+          <a:blip r:embed="rId2"/>
+          <a:stretch>
+            <a:fillRect/>
+          </a:stretch>
+        </p:blipFill>
+        <p:spPr>
+          <a:xfrm>
+            <a:off x="5096932" y="378480"/>
+            <a:ext cx="5849916" cy="5049035"/>
+          </a:xfrm>
+          <a:prstGeom prst="rect">
+            <a:avLst/>
+          </a:prstGeom>
+        </p:spPr>
+      </p:pic>
     </p:spTree>
     <p:extLst>
       <p:ext uri="{BB962C8B-B14F-4D97-AF65-F5344CB8AC3E}">
